--- a/docs/presentacion.pptx
+++ b/docs/presentacion.pptx
@@ -112,6 +112,853 @@
     </a:lvl9pPr>
   </p:defaultTextStyle>
 </p:presentation>
+</file>
+
+<file path=ppt/charts/chart1.xml><?xml version="1.0" encoding="utf-8"?>
+<c:chartSpace xmlns:c="http://schemas.openxmlformats.org/drawingml/2006/chart" xmlns:a="http://schemas.openxmlformats.org/drawingml/2006/main" xmlns:r="http://schemas.openxmlformats.org/officeDocument/2006/relationships">
+  <c:date1904 val="0"/>
+  <c:chart>
+    <c:autoTitleDeleted val="1"/>
+    <c:plotArea>
+      <c:barChart>
+        <c:barDir val="col"/>
+        <c:grouping val="clustered"/>
+        <c:ser>
+          <c:idx val="0"/>
+          <c:order val="0"/>
+          <c:tx>
+            <c:strRef>
+              <c:f>Sheet1!$B$1</c:f>
+              <c:strCache>
+                <c:ptCount val="1"/>
+                <c:pt idx="0">
+                  <c:v>Pedido inicial A013</c:v>
+                </c:pt>
+              </c:strCache>
+            </c:strRef>
+          </c:tx>
+          <c:spPr>
+            <a:solidFill>
+              <a:srgbClr val="0072B2"/>
+            </a:solidFill>
+            <a:ln>
+              <a:solidFill>
+                <a:srgbClr val="0072B2"/>
+              </a:solidFill>
+            </a:ln>
+          </c:spPr>
+          <c:cat>
+            <c:strRef>
+              <c:f>Sheet1!$A$2:$A$13</c:f>
+              <c:strCache>
+                <c:ptCount val="12"/>
+                <c:pt idx="0">
+                  <c:v>1</c:v>
+                </c:pt>
+                <c:pt idx="1">
+                  <c:v>2</c:v>
+                </c:pt>
+                <c:pt idx="2">
+                  <c:v>3</c:v>
+                </c:pt>
+                <c:pt idx="3">
+                  <c:v>4</c:v>
+                </c:pt>
+                <c:pt idx="4">
+                  <c:v>5</c:v>
+                </c:pt>
+                <c:pt idx="5">
+                  <c:v>6</c:v>
+                </c:pt>
+                <c:pt idx="6">
+                  <c:v>7</c:v>
+                </c:pt>
+                <c:pt idx="7">
+                  <c:v>8</c:v>
+                </c:pt>
+                <c:pt idx="8">
+                  <c:v>9</c:v>
+                </c:pt>
+                <c:pt idx="9">
+                  <c:v>10</c:v>
+                </c:pt>
+                <c:pt idx="10">
+                  <c:v>11</c:v>
+                </c:pt>
+                <c:pt idx="11">
+                  <c:v>12</c:v>
+                </c:pt>
+              </c:strCache>
+            </c:strRef>
+          </c:cat>
+          <c:val>
+            <c:numRef>
+              <c:f>Sheet1!$B$2:$B$13</c:f>
+              <c:numCache>
+                <c:formatCode>General</c:formatCode>
+                <c:ptCount val="12"/>
+                <c:pt idx="0">
+                  <c:v>1245.0</c:v>
+                </c:pt>
+                <c:pt idx="1">
+                  <c:v>1553.0</c:v>
+                </c:pt>
+                <c:pt idx="2">
+                  <c:v>2091.0</c:v>
+                </c:pt>
+                <c:pt idx="3">
+                  <c:v>1620.0</c:v>
+                </c:pt>
+                <c:pt idx="4">
+                  <c:v>778.0</c:v>
+                </c:pt>
+                <c:pt idx="5">
+                  <c:v>767.0</c:v>
+                </c:pt>
+                <c:pt idx="6">
+                  <c:v>1077.0</c:v>
+                </c:pt>
+                <c:pt idx="7">
+                  <c:v>1464.0</c:v>
+                </c:pt>
+                <c:pt idx="8">
+                  <c:v>1754.0</c:v>
+                </c:pt>
+                <c:pt idx="9">
+                  <c:v>969.0</c:v>
+                </c:pt>
+                <c:pt idx="10">
+                  <c:v>1256.0</c:v>
+                </c:pt>
+                <c:pt idx="11">
+                  <c:v>1570.0</c:v>
+                </c:pt>
+              </c:numCache>
+            </c:numRef>
+          </c:val>
+        </c:ser>
+        <c:axId val="-2068027336"/>
+        <c:axId val="-2113994440"/>
+      </c:barChart>
+      <c:catAx>
+        <c:axId val="-2068027336"/>
+        <c:scaling>
+          <c:orientation val="minMax"/>
+        </c:scaling>
+        <c:delete val="0"/>
+        <c:axPos val="b"/>
+        <c:majorTickMark val="out"/>
+        <c:minorTickMark val="none"/>
+        <c:tickLblPos val="nextTo"/>
+        <c:txPr>
+          <a:bodyPr/>
+          <a:lstStyle/>
+          <a:p>
+            <a:pPr>
+              <a:defRPr sz="1500">
+                <a:latin typeface="Arial"/>
+              </a:defRPr>
+            </a:pPr>
+          </a:p>
+        </c:txPr>
+        <c:crossAx val="-2113994440"/>
+        <c:crosses val="autoZero"/>
+        <c:auto val="1"/>
+        <c:lblAlgn val="ctr"/>
+        <c:lblOffset val="100"/>
+        <c:noMultiLvlLbl val="0"/>
+      </c:catAx>
+      <c:valAx>
+        <c:axId val="-2113994440"/>
+        <c:scaling>
+          <c:min val="0.0"/>
+        </c:scaling>
+        <c:delete val="0"/>
+        <c:axPos val="l"/>
+        <c:majorGridlines/>
+        <c:majorTickMark val="out"/>
+        <c:minorTickMark val="none"/>
+        <c:tickLblPos val="nextTo"/>
+        <c:txPr>
+          <a:bodyPr/>
+          <a:lstStyle/>
+          <a:p>
+            <a:pPr>
+              <a:defRPr sz="1500">
+                <a:latin typeface="Arial"/>
+              </a:defRPr>
+            </a:pPr>
+          </a:p>
+        </c:txPr>
+        <c:crossAx val="-2068027336"/>
+        <c:crosses val="autoZero"/>
+      </c:valAx>
+    </c:plotArea>
+    <c:legend>
+      <c:legendPos val="b"/>
+      <c:overlay val="0"/>
+      <c:txPr>
+        <a:bodyPr/>
+        <a:lstStyle/>
+        <a:p>
+          <a:pPr>
+            <a:defRPr sz="1400">
+              <a:latin typeface="Arial"/>
+            </a:defRPr>
+          </a:pPr>
+        </a:p>
+      </c:txPr>
+    </c:legend>
+    <c:dispBlanksAs val="gap"/>
+  </c:chart>
+  <c:txPr>
+    <a:bodyPr/>
+    <a:lstStyle/>
+    <a:p>
+      <a:pPr>
+        <a:defRPr sz="1800"/>
+      </a:pPr>
+      <a:endParaRPr lang="en-US"/>
+    </a:p>
+  </c:txPr>
+  <c:externalData r:id="rId1">
+    <c:autoUpdate val="0"/>
+  </c:externalData>
+</c:chartSpace>
+</file>
+
+<file path=ppt/charts/chart2.xml><?xml version="1.0" encoding="utf-8"?>
+<c:chartSpace xmlns:c="http://schemas.openxmlformats.org/drawingml/2006/chart" xmlns:a="http://schemas.openxmlformats.org/drawingml/2006/main" xmlns:r="http://schemas.openxmlformats.org/officeDocument/2006/relationships">
+  <c:date1904 val="0"/>
+  <c:chart>
+    <c:autoTitleDeleted val="1"/>
+    <c:plotArea>
+      <c:barChart>
+        <c:barDir val="col"/>
+        <c:grouping val="clustered"/>
+        <c:ser>
+          <c:idx val="0"/>
+          <c:order val="0"/>
+          <c:tx>
+            <c:strRef>
+              <c:f>Sheet1!$B$1</c:f>
+              <c:strCache>
+                <c:ptCount val="1"/>
+                <c:pt idx="0">
+                  <c:v>Ventas (coches)</c:v>
+                </c:pt>
+              </c:strCache>
+            </c:strRef>
+          </c:tx>
+          <c:spPr>
+            <a:solidFill>
+              <a:srgbClr val="0072B2"/>
+            </a:solidFill>
+            <a:ln>
+              <a:solidFill>
+                <a:srgbClr val="0072B2"/>
+              </a:solidFill>
+            </a:ln>
+          </c:spPr>
+          <c:dPt>
+            <c:idx val="0"/>
+            <c:spPr>
+              <a:solidFill>
+                <a:srgbClr val="D55E00"/>
+              </a:solidFill>
+            </c:spPr>
+          </c:dPt>
+          <c:dPt>
+            <c:idx val="1"/>
+            <c:spPr>
+              <a:solidFill>
+                <a:srgbClr val="0072B2"/>
+              </a:solidFill>
+            </c:spPr>
+          </c:dPt>
+          <c:dPt>
+            <c:idx val="2"/>
+            <c:spPr>
+              <a:solidFill>
+                <a:srgbClr val="009E73"/>
+              </a:solidFill>
+            </c:spPr>
+          </c:dPt>
+          <c:cat>
+            <c:strRef>
+              <c:f>Sheet1!$A$2:$A$4</c:f>
+              <c:strCache>
+                <c:ptCount val="3"/>
+                <c:pt idx="0">
+                  <c:v>Pesimista</c:v>
+                </c:pt>
+                <c:pt idx="1">
+                  <c:v>Central</c:v>
+                </c:pt>
+                <c:pt idx="2">
+                  <c:v>Optimista</c:v>
+                </c:pt>
+              </c:strCache>
+            </c:strRef>
+          </c:cat>
+          <c:val>
+            <c:numRef>
+              <c:f>Sheet1!$B$2:$B$4</c:f>
+              <c:numCache>
+                <c:formatCode>General</c:formatCode>
+                <c:ptCount val="3"/>
+                <c:pt idx="0">
+                  <c:v>12132.0</c:v>
+                </c:pt>
+                <c:pt idx="1">
+                  <c:v>18505.5</c:v>
+                </c:pt>
+                <c:pt idx="2">
+                  <c:v>24907.5</c:v>
+                </c:pt>
+              </c:numCache>
+            </c:numRef>
+          </c:val>
+        </c:ser>
+        <c:axId val="-2068027336"/>
+        <c:axId val="-2113994440"/>
+      </c:barChart>
+      <c:catAx>
+        <c:axId val="-2068027336"/>
+        <c:scaling>
+          <c:orientation val="minMax"/>
+        </c:scaling>
+        <c:delete val="0"/>
+        <c:axPos val="b"/>
+        <c:majorTickMark val="out"/>
+        <c:minorTickMark val="none"/>
+        <c:tickLblPos val="nextTo"/>
+        <c:txPr>
+          <a:bodyPr/>
+          <a:lstStyle/>
+          <a:p>
+            <a:pPr>
+              <a:defRPr sz="1500">
+                <a:latin typeface="Arial"/>
+              </a:defRPr>
+            </a:pPr>
+          </a:p>
+        </c:txPr>
+        <c:crossAx val="-2113994440"/>
+        <c:crosses val="autoZero"/>
+        <c:auto val="1"/>
+        <c:lblAlgn val="ctr"/>
+        <c:lblOffset val="100"/>
+        <c:noMultiLvlLbl val="0"/>
+      </c:catAx>
+      <c:valAx>
+        <c:axId val="-2113994440"/>
+        <c:scaling>
+          <c:min val="0.0"/>
+        </c:scaling>
+        <c:delete val="0"/>
+        <c:axPos val="l"/>
+        <c:majorGridlines/>
+        <c:majorTickMark val="out"/>
+        <c:minorTickMark val="none"/>
+        <c:tickLblPos val="nextTo"/>
+        <c:txPr>
+          <a:bodyPr/>
+          <a:lstStyle/>
+          <a:p>
+            <a:pPr>
+              <a:defRPr sz="1500">
+                <a:latin typeface="Arial"/>
+              </a:defRPr>
+            </a:pPr>
+          </a:p>
+        </c:txPr>
+        <c:crossAx val="-2068027336"/>
+        <c:crosses val="autoZero"/>
+      </c:valAx>
+    </c:plotArea>
+    <c:legend>
+      <c:legendPos val="b"/>
+      <c:overlay val="0"/>
+      <c:txPr>
+        <a:bodyPr/>
+        <a:lstStyle/>
+        <a:p>
+          <a:pPr>
+            <a:defRPr sz="1400">
+              <a:latin typeface="Arial"/>
+            </a:defRPr>
+          </a:pPr>
+        </a:p>
+      </c:txPr>
+    </c:legend>
+    <c:dispBlanksAs val="gap"/>
+  </c:chart>
+  <c:txPr>
+    <a:bodyPr/>
+    <a:lstStyle/>
+    <a:p>
+      <a:pPr>
+        <a:defRPr sz="1800"/>
+      </a:pPr>
+      <a:endParaRPr lang="en-US"/>
+    </a:p>
+  </c:txPr>
+  <c:externalData r:id="rId1">
+    <c:autoUpdate val="0"/>
+  </c:externalData>
+</c:chartSpace>
+</file>
+
+<file path=ppt/charts/chart3.xml><?xml version="1.0" encoding="utf-8"?>
+<c:chartSpace xmlns:c="http://schemas.openxmlformats.org/drawingml/2006/chart" xmlns:a="http://schemas.openxmlformats.org/drawingml/2006/main" xmlns:r="http://schemas.openxmlformats.org/officeDocument/2006/relationships">
+  <c:date1904 val="0"/>
+  <c:chart>
+    <c:autoTitleDeleted val="1"/>
+    <c:plotArea>
+      <c:barChart>
+        <c:barDir val="col"/>
+        <c:grouping val="clustered"/>
+        <c:ser>
+          <c:idx val="0"/>
+          <c:order val="0"/>
+          <c:tx>
+            <c:strRef>
+              <c:f>Sheet1!$B$1</c:f>
+              <c:strCache>
+                <c:ptCount val="1"/>
+                <c:pt idx="0">
+                  <c:v>Resultado medio (M€)</c:v>
+                </c:pt>
+              </c:strCache>
+            </c:strRef>
+          </c:tx>
+          <c:spPr>
+            <a:solidFill>
+              <a:srgbClr val="0072B2"/>
+            </a:solidFill>
+            <a:ln>
+              <a:solidFill>
+                <a:srgbClr val="0072B2"/>
+              </a:solidFill>
+            </a:ln>
+          </c:spPr>
+          <c:dPt>
+            <c:idx val="0"/>
+            <c:spPr>
+              <a:solidFill>
+                <a:srgbClr val="D55E00"/>
+              </a:solidFill>
+            </c:spPr>
+          </c:dPt>
+          <c:dPt>
+            <c:idx val="1"/>
+            <c:spPr>
+              <a:solidFill>
+                <a:srgbClr val="0072B2"/>
+              </a:solidFill>
+            </c:spPr>
+          </c:dPt>
+          <c:dPt>
+            <c:idx val="2"/>
+            <c:spPr>
+              <a:solidFill>
+                <a:srgbClr val="009E73"/>
+              </a:solidFill>
+            </c:spPr>
+          </c:dPt>
+          <c:cat>
+            <c:strRef>
+              <c:f>Sheet1!$A$2:$A$4</c:f>
+              <c:strCache>
+                <c:ptCount val="3"/>
+                <c:pt idx="0">
+                  <c:v>Pesimista</c:v>
+                </c:pt>
+                <c:pt idx="1">
+                  <c:v>Central</c:v>
+                </c:pt>
+                <c:pt idx="2">
+                  <c:v>Optimista</c:v>
+                </c:pt>
+              </c:strCache>
+            </c:strRef>
+          </c:cat>
+          <c:val>
+            <c:numRef>
+              <c:f>Sheet1!$B$2:$B$4</c:f>
+              <c:numCache>
+                <c:formatCode>General</c:formatCode>
+                <c:ptCount val="3"/>
+                <c:pt idx="0">
+                  <c:v>3.094993058</c:v>
+                </c:pt>
+                <c:pt idx="1">
+                  <c:v>62.88207069</c:v>
+                </c:pt>
+                <c:pt idx="2">
+                  <c:v>91.374149836</c:v>
+                </c:pt>
+              </c:numCache>
+            </c:numRef>
+          </c:val>
+        </c:ser>
+        <c:axId val="-2068027336"/>
+        <c:axId val="-2113994440"/>
+      </c:barChart>
+      <c:catAx>
+        <c:axId val="-2068027336"/>
+        <c:scaling>
+          <c:orientation val="minMax"/>
+        </c:scaling>
+        <c:delete val="0"/>
+        <c:axPos val="b"/>
+        <c:majorTickMark val="out"/>
+        <c:minorTickMark val="none"/>
+        <c:tickLblPos val="nextTo"/>
+        <c:txPr>
+          <a:bodyPr/>
+          <a:lstStyle/>
+          <a:p>
+            <a:pPr>
+              <a:defRPr sz="1500">
+                <a:latin typeface="Arial"/>
+              </a:defRPr>
+            </a:pPr>
+          </a:p>
+        </c:txPr>
+        <c:crossAx val="-2113994440"/>
+        <c:crosses val="autoZero"/>
+        <c:auto val="1"/>
+        <c:lblAlgn val="ctr"/>
+        <c:lblOffset val="100"/>
+        <c:noMultiLvlLbl val="0"/>
+      </c:catAx>
+      <c:valAx>
+        <c:axId val="-2113994440"/>
+        <c:scaling>
+          <c:min val="0.0"/>
+        </c:scaling>
+        <c:delete val="0"/>
+        <c:axPos val="l"/>
+        <c:majorGridlines/>
+        <c:majorTickMark val="out"/>
+        <c:minorTickMark val="none"/>
+        <c:tickLblPos val="nextTo"/>
+        <c:txPr>
+          <a:bodyPr/>
+          <a:lstStyle/>
+          <a:p>
+            <a:pPr>
+              <a:defRPr sz="1500">
+                <a:latin typeface="Arial"/>
+              </a:defRPr>
+            </a:pPr>
+          </a:p>
+        </c:txPr>
+        <c:crossAx val="-2068027336"/>
+        <c:crosses val="autoZero"/>
+      </c:valAx>
+    </c:plotArea>
+    <c:legend>
+      <c:legendPos val="b"/>
+      <c:overlay val="0"/>
+      <c:txPr>
+        <a:bodyPr/>
+        <a:lstStyle/>
+        <a:p>
+          <a:pPr>
+            <a:defRPr sz="1400">
+              <a:latin typeface="Arial"/>
+            </a:defRPr>
+          </a:pPr>
+        </a:p>
+      </c:txPr>
+    </c:legend>
+    <c:dispBlanksAs val="gap"/>
+  </c:chart>
+  <c:txPr>
+    <a:bodyPr/>
+    <a:lstStyle/>
+    <a:p>
+      <a:pPr>
+        <a:defRPr sz="1800"/>
+      </a:pPr>
+      <a:endParaRPr lang="en-US"/>
+    </a:p>
+  </c:txPr>
+  <c:externalData r:id="rId1">
+    <c:autoUpdate val="0"/>
+  </c:externalData>
+</c:chartSpace>
+</file>
+
+<file path=ppt/charts/chart4.xml><?xml version="1.0" encoding="utf-8"?>
+<c:chartSpace xmlns:c="http://schemas.openxmlformats.org/drawingml/2006/chart" xmlns:a="http://schemas.openxmlformats.org/drawingml/2006/main" xmlns:r="http://schemas.openxmlformats.org/officeDocument/2006/relationships">
+  <c:date1904 val="0"/>
+  <c:chart>
+    <c:autoTitleDeleted val="1"/>
+    <c:plotArea>
+      <c:barChart>
+        <c:barDir val="col"/>
+        <c:grouping val="clustered"/>
+        <c:ser>
+          <c:idx val="0"/>
+          <c:order val="0"/>
+          <c:tx>
+            <c:strRef>
+              <c:f>Sheet1!$B$1</c:f>
+              <c:strCache>
+                <c:ptCount val="1"/>
+                <c:pt idx="0">
+                  <c:v>Servicio medio (%)</c:v>
+                </c:pt>
+              </c:strCache>
+            </c:strRef>
+          </c:tx>
+          <c:spPr>
+            <a:solidFill>
+              <a:srgbClr val="0072B2"/>
+            </a:solidFill>
+            <a:ln>
+              <a:solidFill>
+                <a:srgbClr val="0072B2"/>
+              </a:solidFill>
+            </a:ln>
+          </c:spPr>
+          <c:cat>
+            <c:strRef>
+              <c:f>Sheet1!$A$2:$A$8</c:f>
+              <c:strCache>
+                <c:ptCount val="7"/>
+                <c:pt idx="0">
+                  <c:v>B</c:v>
+                </c:pt>
+                <c:pt idx="1">
+                  <c:v>C</c:v>
+                </c:pt>
+                <c:pt idx="2">
+                  <c:v>MD</c:v>
+                </c:pt>
+                <c:pt idx="3">
+                  <c:v>SSUV</c:v>
+                </c:pt>
+                <c:pt idx="4">
+                  <c:v>CSUV</c:v>
+                </c:pt>
+                <c:pt idx="5">
+                  <c:v>MSUV</c:v>
+                </c:pt>
+                <c:pt idx="6">
+                  <c:v>S</c:v>
+                </c:pt>
+              </c:strCache>
+            </c:strRef>
+          </c:cat>
+          <c:val>
+            <c:numRef>
+              <c:f>Sheet1!$B$2:$B$8</c:f>
+              <c:numCache>
+                <c:formatCode>General</c:formatCode>
+                <c:ptCount val="7"/>
+                <c:pt idx="0">
+                  <c:v>96.4977478422018</c:v>
+                </c:pt>
+                <c:pt idx="1">
+                  <c:v>99.61717223470103</c:v>
+                </c:pt>
+                <c:pt idx="2">
+                  <c:v>99.65217004415481</c:v>
+                </c:pt>
+                <c:pt idx="3">
+                  <c:v>95.3572637440957</c:v>
+                </c:pt>
+                <c:pt idx="4">
+                  <c:v>98.34383516748004</c:v>
+                </c:pt>
+                <c:pt idx="5">
+                  <c:v>99.22317087686004</c:v>
+                </c:pt>
+                <c:pt idx="6">
+                  <c:v>95.96958850382548</c:v>
+                </c:pt>
+              </c:numCache>
+            </c:numRef>
+          </c:val>
+        </c:ser>
+        <c:ser>
+          <c:idx val="1"/>
+          <c:order val="1"/>
+          <c:tx>
+            <c:strRef>
+              <c:f>Sheet1!$C$1</c:f>
+              <c:strCache>
+                <c:ptCount val="1"/>
+                <c:pt idx="0">
+                  <c:v>Objetivo (%)</c:v>
+                </c:pt>
+              </c:strCache>
+            </c:strRef>
+          </c:tx>
+          <c:spPr>
+            <a:solidFill>
+              <a:srgbClr val="888888"/>
+            </a:solidFill>
+            <a:ln>
+              <a:solidFill>
+                <a:srgbClr val="888888"/>
+              </a:solidFill>
+            </a:ln>
+          </c:spPr>
+          <c:cat>
+            <c:strRef>
+              <c:f>Sheet1!$A$2:$A$8</c:f>
+              <c:strCache>
+                <c:ptCount val="7"/>
+                <c:pt idx="0">
+                  <c:v>B</c:v>
+                </c:pt>
+                <c:pt idx="1">
+                  <c:v>C</c:v>
+                </c:pt>
+                <c:pt idx="2">
+                  <c:v>MD</c:v>
+                </c:pt>
+                <c:pt idx="3">
+                  <c:v>SSUV</c:v>
+                </c:pt>
+                <c:pt idx="4">
+                  <c:v>CSUV</c:v>
+                </c:pt>
+                <c:pt idx="5">
+                  <c:v>MSUV</c:v>
+                </c:pt>
+                <c:pt idx="6">
+                  <c:v>S</c:v>
+                </c:pt>
+              </c:strCache>
+            </c:strRef>
+          </c:cat>
+          <c:val>
+            <c:numRef>
+              <c:f>Sheet1!$C$2:$C$8</c:f>
+              <c:numCache>
+                <c:formatCode>General</c:formatCode>
+                <c:ptCount val="7"/>
+                <c:pt idx="0">
+                  <c:v>95.0</c:v>
+                </c:pt>
+                <c:pt idx="1">
+                  <c:v>95.0</c:v>
+                </c:pt>
+                <c:pt idx="2">
+                  <c:v>95.0</c:v>
+                </c:pt>
+                <c:pt idx="3">
+                  <c:v>95.0</c:v>
+                </c:pt>
+                <c:pt idx="4">
+                  <c:v>95.0</c:v>
+                </c:pt>
+                <c:pt idx="5">
+                  <c:v>95.0</c:v>
+                </c:pt>
+                <c:pt idx="6">
+                  <c:v>95.0</c:v>
+                </c:pt>
+              </c:numCache>
+            </c:numRef>
+          </c:val>
+        </c:ser>
+        <c:axId val="-2068027336"/>
+        <c:axId val="-2113994440"/>
+      </c:barChart>
+      <c:catAx>
+        <c:axId val="-2068027336"/>
+        <c:scaling>
+          <c:orientation val="minMax"/>
+        </c:scaling>
+        <c:delete val="0"/>
+        <c:axPos val="b"/>
+        <c:majorTickMark val="out"/>
+        <c:minorTickMark val="none"/>
+        <c:tickLblPos val="nextTo"/>
+        <c:txPr>
+          <a:bodyPr/>
+          <a:lstStyle/>
+          <a:p>
+            <a:pPr>
+              <a:defRPr sz="1500">
+                <a:latin typeface="Arial"/>
+              </a:defRPr>
+            </a:pPr>
+          </a:p>
+        </c:txPr>
+        <c:crossAx val="-2113994440"/>
+        <c:crosses val="autoZero"/>
+        <c:auto val="1"/>
+        <c:lblAlgn val="ctr"/>
+        <c:lblOffset val="100"/>
+        <c:noMultiLvlLbl val="0"/>
+      </c:catAx>
+      <c:valAx>
+        <c:axId val="-2113994440"/>
+        <c:scaling>
+          <c:max val="100.0"/>
+          <c:min val="0.0"/>
+        </c:scaling>
+        <c:delete val="0"/>
+        <c:axPos val="l"/>
+        <c:majorGridlines/>
+        <c:majorTickMark val="out"/>
+        <c:minorTickMark val="none"/>
+        <c:tickLblPos val="nextTo"/>
+        <c:txPr>
+          <a:bodyPr/>
+          <a:lstStyle/>
+          <a:p>
+            <a:pPr>
+              <a:defRPr sz="1500">
+                <a:latin typeface="Arial"/>
+              </a:defRPr>
+            </a:pPr>
+          </a:p>
+        </c:txPr>
+        <c:crossAx val="-2068027336"/>
+        <c:crosses val="autoZero"/>
+      </c:valAx>
+    </c:plotArea>
+    <c:legend>
+      <c:legendPos val="b"/>
+      <c:overlay val="0"/>
+      <c:txPr>
+        <a:bodyPr/>
+        <a:lstStyle/>
+        <a:p>
+          <a:pPr>
+            <a:defRPr sz="1400">
+              <a:latin typeface="Arial"/>
+            </a:defRPr>
+          </a:pPr>
+        </a:p>
+      </c:txPr>
+    </c:legend>
+    <c:dispBlanksAs val="gap"/>
+  </c:chart>
+  <c:txPr>
+    <a:bodyPr/>
+    <a:lstStyle/>
+    <a:p>
+      <a:pPr>
+        <a:defRPr sz="1800"/>
+      </a:pPr>
+      <a:endParaRPr lang="en-US"/>
+    </a:p>
+  </c:txPr>
+  <c:externalData r:id="rId1">
+    <c:autoUpdate val="0"/>
+  </c:externalData>
+</c:chartSpace>
 </file>
 
 <file path=ppt/notesMasters/notesMaster1.xml><?xml version="1.0" encoding="utf-8"?>
@@ -509,7 +1356,12 @@
           <a:lstStyle/>
           <a:p>
             <a:r>
-              <a:t>Minuto 0:00–0:30. Mensaje: recibir unos 17.400 coches en A013, con más stock donde hay margen. Se explican la demanda real, los escenarios, el plan y qué vigilar.</a:t>
+              <a:t>Abrir con la recomendación condicionada al indicador de factibilidad. No se asignan probabilidades a los escenarios. Explicar que se trata de resultados simulados.</a:t>
+            </a:r>
+          </a:p>
+          <a:p>
+            <a:r>
+              <a:t>Tiempo orientativo: 1 min 15 s.</a:t>
             </a:r>
           </a:p>
         </p:txBody>
@@ -579,7 +1431,12 @@
           <a:lstStyle/>
           <a:p>
             <a:r>
-              <a:t>0:30–1:45. El 8,5 % de crecimiento de matriculaciones incluye automatriculaciones, el lanzamiento de CSUV y compras adelantadas de noviembre–diciembre (estimación entre 0 y 1.200 coches). La demanda subyacente se estima en −3,2 % (−0,2 % a −6,2 %), igual que el mercado en enero–julio.</a:t>
+              <a:t>Diferenciar ventas observadas, gama comparable y ajuste parcial de episodios. La estimación ajustada no identifica toda la demanda potencial ni la demanda perdida por falta de stock.</a:t>
+            </a:r>
+          </a:p>
+          <a:p>
+            <a:r>
+              <a:t>Tiempo orientativo: 1 min 15 s.</a:t>
             </a:r>
           </a:p>
         </p:txBody>
@@ -649,7 +1506,12 @@
           <a:lstStyle/>
           <a:p>
             <a:r>
-              <a:t>1:45–3:00. La previsión es mercado por cuota: modelo de la variación interanual con calendario, sucesos y confianza del consumidor retrasada tres meses. Validación con A012: error mensual del 12–13 % en el total, igual que la referencia estacional, y peor en B y S. La demanda de CSUV pasa de 1.192 a unos 2.770 coches porque A012 solo recoge cinco meses de venta.</a:t>
+              <a:t>Modelo seleccionado con A009–A011. A012 ya fue observado en el desarrollo inicial y no se presenta como prueba independiente. El MAE mensual relativo divide el error absoluto medio por las ventas mensuales medias del total comparable.</a:t>
+            </a:r>
+          </a:p>
+          <a:p>
+            <a:r>
+              <a:t>Tiempo orientativo: 1 min 15 s.</a:t>
             </a:r>
           </a:p>
         </p:txBody>
@@ -719,7 +1581,12 @@
           <a:lstStyle/>
           <a:p>
             <a:r>
-              <a:t>3:00–4:15. Los escenarios combinan todos los sucesos a la vez y no tienen probabilidades. La confianza usa los percentiles 10 y 90 del cambio a nueve meses en A001–A012; el efecto de una renovación de gama es la mediana de 21 renovaciones (+11 %); turismo: una desviación típica de viajeros_var. Combustible, tipo de cambio y arancel no se cuantifican por falta de datos.</a:t>
+              <a:t>Mostrar pedidos del plan inicial agrupados por mes de decisión. La serie de fabricación/pedido no es la serie de llegadas. Pedidos de cierre llegan en la prolongación de A014.</a:t>
+            </a:r>
+          </a:p>
+          <a:p>
+            <a:r>
+              <a:t>Tiempo orientativo: 1 min 15 s.</a:t>
             </a:r>
           </a:p>
         </p:txBody>
@@ -789,7 +1656,12 @@
           <a:lstStyle/>
           <a:p>
             <a:r>
-              <a:t>4:15–5:30. Tabla 5 del enunciado, total de los siete segmentos, mediana y P10–P90 dentro de cada escenario. La prima de CO2, si la matriz la carga entera, es el suceso que más pesa. En el optimista se pierden unas 1.800 ventas: el plan central no puede responder a tiempo.</a:t>
+              <a:t>Comparar mediana de ventas y contribución media total en el mismo orden de la tabla 5. P10–P90 describe variabilidad interna, no probabilidades de los escenarios. Arancel, divisa y combustible contienen tamaños exploratorios explícitos.</a:t>
+            </a:r>
+          </a:p>
+          <a:p>
+            <a:r>
+              <a:t>Tiempo orientativo: 1 min 15 s.</a:t>
             </a:r>
           </a:p>
         </p:txBody>
@@ -859,7 +1731,12 @@
           <a:lstStyle/>
           <a:p>
             <a:r>
-              <a:t>5:30–6:45. Llegadas por mes y segmento, con demanda prevista y stock mediano del escenario central. Enero y febrero ya están en camino (2.110 coches al mes, por encima de la demanda), por eso C y CSUV no piden hasta septiembre y junio. El nivel de servicio z es 0 en B, 0,84 en C, 1,65 en MD y S, 2,33 en SSUV y CSUV y 3,0 en MSUV, elegido con el resultado del escenario central.</a:t>
+              <a:t>La diferencia se calcula cargando la prima a las mismas ventas centrales. No se atribuye a CO₂ toda la distancia central–pesimista ni se reoptimiza en este contraste.</a:t>
+            </a:r>
+          </a:p>
+          <a:p>
+            <a:r>
+              <a:t>Tiempo orientativo: 1 min 15 s.</a:t>
             </a:r>
           </a:p>
         </p:txBody>
@@ -929,7 +1806,12 @@
           <a:lstStyle/>
           <a:p>
             <a:r>
-              <a:t>6:45–8:15. Un coche de más cuesta unos 60 € al mes; uno de menos cuesta su CVP. En el optimista faltarían coches por 4,7 M€ de CVP (1,7 con transfers); pasarse en el pesimista cuesta solo 0,2 M€ más que en el central. Empujar MSUV, S, CSUV y MD; vigilar SSUV; frenar B y C.</a:t>
+              <a:t>El servicio es la proporción de unidades atendidas, no la probabilidad de ausencia de roturas. Revisar cociente entre sumas de ventas y previsión de tres meses, evitando interpretar ventas censuradas por stock como menor demanda.</a:t>
+            </a:r>
+          </a:p>
+          <a:p>
+            <a:r>
+              <a:t>Tiempo orientativo: 1 min 15 s.</a:t>
             </a:r>
           </a:p>
         </p:txBody>
@@ -999,7 +1881,12 @@
           <a:lstStyle/>
           <a:p>
             <a:r>
-              <a:t>8:15–10:00. Cuatro señales y una regla. Revisar la llegada de t+3 si las ventas de los últimos tres meses salen del rango 0,88–1,24 veces la previsión. Limitaciones: llegadas de enero y febrero supuestas, sin automatriculaciones ni transfers, arancel y combustible no cuantificados; los rangos son una cota baja si los errores están más correlacionados.</a:t>
+              <a:t>Cerrar con las limitaciones documentadas. La continuidad hasta junio A014 es una sensibilidad, sin valoración ficticia del inventario. No se optimiza el gasto comercial porque falta una respuesta de demanda a ese gasto.</a:t>
+            </a:r>
+          </a:p>
+          <a:p>
+            <a:r>
+              <a:t>Tiempo orientativo: 1 min 15 s.</a:t>
             </a:r>
           </a:p>
         </p:txBody>
@@ -3998,6 +4885,14 @@
 <file path=ppt/slides/slide1.xml><?xml version="1.0" encoding="utf-8"?>
 <p:sld xmlns:a="http://schemas.openxmlformats.org/drawingml/2006/main" xmlns:p="http://schemas.openxmlformats.org/presentationml/2006/main" xmlns:r="http://schemas.openxmlformats.org/officeDocument/2006/relationships">
   <p:cSld>
+    <p:bg>
+      <p:bgPr>
+        <a:solidFill>
+          <a:srgbClr val="FFFFFF"/>
+        </a:solidFill>
+        <a:effectLst/>
+      </p:bgPr>
+    </p:bg>
     <p:spTree>
       <p:nvGrpSpPr>
         <p:cNvPr id="1" name=""/>
@@ -4007,16 +4902,920 @@
       <p:grpSpPr/>
       <p:sp>
         <p:nvSpPr>
-          <p:cNvPr id="2" name="Rectangle 1"/>
+          <p:cNvPr id="2" name="TextBox 1"/>
+          <p:cNvSpPr txBox="1"/>
+          <p:nvPr/>
+        </p:nvSpPr>
+        <p:spPr>
+          <a:xfrm>
+            <a:off x="502920" y="320040"/>
+            <a:ext cx="11155680" cy="594360"/>
+          </a:xfrm>
+          <a:prstGeom prst="rect">
+            <a:avLst/>
+          </a:prstGeom>
+          <a:noFill/>
+        </p:spPr>
+        <p:txBody>
+          <a:bodyPr wrap="none">
+            <a:spAutoFit/>
+          </a:bodyPr>
+          <a:lstStyle/>
+          <a:p>
+            <a:pPr>
+              <a:defRPr sz="3000" b="1">
+                <a:solidFill>
+                  <a:srgbClr val="0072B2"/>
+                </a:solidFill>
+                <a:latin typeface="Arial"/>
+              </a:defRPr>
+            </a:pPr>
+            <a:r>
+              <a:t>A013: margen con servicio y revisión mensual</a:t>
+            </a:r>
+          </a:p>
+        </p:txBody>
+      </p:sp>
+      <p:sp>
+        <p:nvSpPr>
+          <p:cNvPr id="3" name="TextBox 2"/>
+          <p:cNvSpPr txBox="1"/>
+          <p:nvPr/>
+        </p:nvSpPr>
+        <p:spPr>
+          <a:xfrm>
+            <a:off x="731520" y="1234440"/>
+            <a:ext cx="10698480" cy="1280160"/>
+          </a:xfrm>
+          <a:prstGeom prst="rect">
+            <a:avLst/>
+          </a:prstGeom>
+          <a:noFill/>
+        </p:spPr>
+        <p:txBody>
+          <a:bodyPr wrap="square">
+            <a:spAutoFit/>
+          </a:bodyPr>
+          <a:lstStyle/>
+          <a:p>
+            <a:pPr>
+              <a:spcAft>
+                <a:spcPts val="1400"/>
+              </a:spcAft>
+              <a:defRPr sz="2100">
+                <a:solidFill>
+                  <a:srgbClr val="333333"/>
+                </a:solidFill>
+                <a:latin typeface="Arial"/>
+              </a:defRPr>
+            </a:pPr>
+            <a:r>
+              <a:t>La mejor política evaluada alcanza al menos un 95 % de servicio medio por segmento en el escenario central; mantener revisión mensual y seguimiento de compromisos.</a:t>
+            </a:r>
+          </a:p>
+        </p:txBody>
+      </p:sp>
+      <p:sp>
+        <p:nvSpPr>
+          <p:cNvPr id="4" name="Rounded Rectangle 3"/>
           <p:cNvSpPr/>
           <p:nvPr/>
         </p:nvSpPr>
         <p:spPr>
           <a:xfrm>
-            <a:off x="731520" y="1828800"/>
-            <a:ext cx="137160" cy="2194560"/>
+            <a:off x="914400" y="2971800"/>
+            <a:ext cx="3246120" cy="1325880"/>
+          </a:xfrm>
+          <a:prstGeom prst="roundRect">
+            <a:avLst/>
+          </a:prstGeom>
+          <a:solidFill>
+            <a:srgbClr val="EAF3F8"/>
+          </a:solidFill>
+          <a:ln>
+            <a:solidFill>
+              <a:srgbClr val="D3E2EC"/>
+            </a:solidFill>
+          </a:ln>
+        </p:spPr>
+        <p:style>
+          <a:lnRef idx="1">
+            <a:schemeClr val="accent1"/>
+          </a:lnRef>
+          <a:fillRef idx="3">
+            <a:schemeClr val="accent1"/>
+          </a:fillRef>
+          <a:effectRef idx="2">
+            <a:schemeClr val="accent1"/>
+          </a:effectRef>
+          <a:fontRef idx="minor">
+            <a:schemeClr val="lt1"/>
+          </a:fontRef>
+        </p:style>
+        <p:txBody>
+          <a:bodyPr rtlCol="0" anchor="ctr"/>
+          <a:lstStyle/>
+          <a:p>
+            <a:pPr algn="ctr">
+              <a:defRPr sz="2500" b="1">
+                <a:solidFill>
+                  <a:srgbClr val="0072B2"/>
+                </a:solidFill>
+                <a:latin typeface="Arial"/>
+              </a:defRPr>
+            </a:pPr>
+            <a:r>
+              <a:t>62,9</a:t>
+            </a:r>
+          </a:p>
+          <a:p>
+            <a:pPr algn="ctr">
+              <a:defRPr sz="1500">
+                <a:solidFill>
+                  <a:srgbClr val="333333"/>
+                </a:solidFill>
+                <a:latin typeface="Arial"/>
+              </a:defRPr>
+            </a:pPr>
+            <a:r>
+              <a:t>Resultado medio central (M€)</a:t>
+            </a:r>
+          </a:p>
+        </p:txBody>
+      </p:sp>
+      <p:sp>
+        <p:nvSpPr>
+          <p:cNvPr id="5" name="Rounded Rectangle 4"/>
+          <p:cNvSpPr/>
+          <p:nvPr/>
+        </p:nvSpPr>
+        <p:spPr>
+          <a:xfrm>
+            <a:off x="4663440" y="2971800"/>
+            <a:ext cx="3246120" cy="1325880"/>
+          </a:xfrm>
+          <a:prstGeom prst="roundRect">
+            <a:avLst/>
+          </a:prstGeom>
+          <a:solidFill>
+            <a:srgbClr val="EAF3F8"/>
+          </a:solidFill>
+          <a:ln>
+            <a:solidFill>
+              <a:srgbClr val="D3E2EC"/>
+            </a:solidFill>
+          </a:ln>
+        </p:spPr>
+        <p:style>
+          <a:lnRef idx="1">
+            <a:schemeClr val="accent1"/>
+          </a:lnRef>
+          <a:fillRef idx="3">
+            <a:schemeClr val="accent1"/>
+          </a:fillRef>
+          <a:effectRef idx="2">
+            <a:schemeClr val="accent1"/>
+          </a:effectRef>
+          <a:fontRef idx="minor">
+            <a:schemeClr val="lt1"/>
+          </a:fontRef>
+        </p:style>
+        <p:txBody>
+          <a:bodyPr rtlCol="0" anchor="ctr"/>
+          <a:lstStyle/>
+          <a:p>
+            <a:pPr algn="ctr">
+              <a:defRPr sz="2500" b="1">
+                <a:solidFill>
+                  <a:srgbClr val="0072B2"/>
+                </a:solidFill>
+                <a:latin typeface="Arial"/>
+              </a:defRPr>
+            </a:pPr>
+            <a:r>
+              <a:t>97,6 %</a:t>
+            </a:r>
+          </a:p>
+          <a:p>
+            <a:pPr algn="ctr">
+              <a:defRPr sz="1500">
+                <a:solidFill>
+                  <a:srgbClr val="333333"/>
+                </a:solidFill>
+                <a:latin typeface="Arial"/>
+              </a:defRPr>
+            </a:pPr>
+            <a:r>
+              <a:t>Servicio medio central</a:t>
+            </a:r>
+          </a:p>
+        </p:txBody>
+      </p:sp>
+      <p:sp>
+        <p:nvSpPr>
+          <p:cNvPr id="6" name="Rounded Rectangle 5"/>
+          <p:cNvSpPr/>
+          <p:nvPr/>
+        </p:nvSpPr>
+        <p:spPr>
+          <a:xfrm>
+            <a:off x="8412480" y="2971800"/>
+            <a:ext cx="3246120" cy="1325880"/>
+          </a:xfrm>
+          <a:prstGeom prst="roundRect">
+            <a:avLst/>
+          </a:prstGeom>
+          <a:solidFill>
+            <a:srgbClr val="EAF3F8"/>
+          </a:solidFill>
+          <a:ln>
+            <a:solidFill>
+              <a:srgbClr val="D3E2EC"/>
+            </a:solidFill>
+          </a:ln>
+        </p:spPr>
+        <p:style>
+          <a:lnRef idx="1">
+            <a:schemeClr val="accent1"/>
+          </a:lnRef>
+          <a:fillRef idx="3">
+            <a:schemeClr val="accent1"/>
+          </a:fillRef>
+          <a:effectRef idx="2">
+            <a:schemeClr val="accent1"/>
+          </a:effectRef>
+          <a:fontRef idx="minor">
+            <a:schemeClr val="lt1"/>
+          </a:fontRef>
+        </p:style>
+        <p:txBody>
+          <a:bodyPr rtlCol="0" anchor="ctr"/>
+          <a:lstStyle/>
+          <a:p>
+            <a:pPr algn="ctr">
+              <a:defRPr sz="2500" b="1">
+                <a:solidFill>
+                  <a:srgbClr val="0072B2"/>
+                </a:solidFill>
+                <a:latin typeface="Arial"/>
+              </a:defRPr>
+            </a:pPr>
+            <a:r>
+              <a:t>14,8 %</a:t>
+            </a:r>
+          </a:p>
+          <a:p>
+            <a:pPr algn="ctr">
+              <a:defRPr sz="1500">
+                <a:solidFill>
+                  <a:srgbClr val="333333"/>
+                </a:solidFill>
+                <a:latin typeface="Arial"/>
+              </a:defRPr>
+            </a:pPr>
+            <a:r>
+              <a:t>MAE A012 sin CSUV</a:t>
+            </a:r>
+          </a:p>
+        </p:txBody>
+      </p:sp>
+    </p:spTree>
+  </p:cSld>
+  <p:clrMapOvr>
+    <a:masterClrMapping/>
+  </p:clrMapOvr>
+</p:sld>
+</file>
+
+<file path=ppt/slides/slide2.xml><?xml version="1.0" encoding="utf-8"?>
+<p:sld xmlns:a="http://schemas.openxmlformats.org/drawingml/2006/main" xmlns:p="http://schemas.openxmlformats.org/presentationml/2006/main" xmlns:r="http://schemas.openxmlformats.org/officeDocument/2006/relationships">
+  <p:cSld>
+    <p:bg>
+      <p:bgPr>
+        <a:solidFill>
+          <a:srgbClr val="FFFFFF"/>
+        </a:solidFill>
+        <a:effectLst/>
+      </p:bgPr>
+    </p:bg>
+    <p:spTree>
+      <p:nvGrpSpPr>
+        <p:cNvPr id="1" name=""/>
+        <p:cNvGrpSpPr/>
+        <p:nvPr/>
+      </p:nvGrpSpPr>
+      <p:grpSpPr/>
+      <p:sp>
+        <p:nvSpPr>
+          <p:cNvPr id="2" name="TextBox 1"/>
+          <p:cNvSpPr txBox="1"/>
+          <p:nvPr/>
+        </p:nvSpPr>
+        <p:spPr>
+          <a:xfrm>
+            <a:off x="502920" y="320040"/>
+            <a:ext cx="11155680" cy="594360"/>
           </a:xfrm>
           <a:prstGeom prst="rect">
+            <a:avLst/>
+          </a:prstGeom>
+          <a:noFill/>
+        </p:spPr>
+        <p:txBody>
+          <a:bodyPr wrap="none">
+            <a:spAutoFit/>
+          </a:bodyPr>
+          <a:lstStyle/>
+          <a:p>
+            <a:pPr>
+              <a:defRPr sz="3000" b="1">
+                <a:solidFill>
+                  <a:srgbClr val="0072B2"/>
+                </a:solidFill>
+                <a:latin typeface="Arial"/>
+              </a:defRPr>
+            </a:pPr>
+            <a:r>
+              <a:t>A012: crece el total, no la gama comparable</a:t>
+            </a:r>
+          </a:p>
+        </p:txBody>
+      </p:sp>
+      <p:sp>
+        <p:nvSpPr>
+          <p:cNvPr id="3" name="Rounded Rectangle 2"/>
+          <p:cNvSpPr/>
+          <p:nvPr/>
+        </p:nvSpPr>
+        <p:spPr>
+          <a:xfrm>
+            <a:off x="1005840" y="2011680"/>
+            <a:ext cx="3017520" cy="1325880"/>
+          </a:xfrm>
+          <a:prstGeom prst="roundRect">
+            <a:avLst/>
+          </a:prstGeom>
+          <a:solidFill>
+            <a:srgbClr val="EAF3F8"/>
+          </a:solidFill>
+          <a:ln>
+            <a:solidFill>
+              <a:srgbClr val="D3E2EC"/>
+            </a:solidFill>
+          </a:ln>
+        </p:spPr>
+        <p:style>
+          <a:lnRef idx="1">
+            <a:schemeClr val="accent1"/>
+          </a:lnRef>
+          <a:fillRef idx="3">
+            <a:schemeClr val="accent1"/>
+          </a:fillRef>
+          <a:effectRef idx="2">
+            <a:schemeClr val="accent1"/>
+          </a:effectRef>
+          <a:fontRef idx="minor">
+            <a:schemeClr val="lt1"/>
+          </a:fontRef>
+        </p:style>
+        <p:txBody>
+          <a:bodyPr rtlCol="0" anchor="ctr"/>
+          <a:lstStyle/>
+          <a:p>
+            <a:pPr algn="ctr">
+              <a:defRPr sz="2500" b="1">
+                <a:solidFill>
+                  <a:srgbClr val="0072B2"/>
+                </a:solidFill>
+                <a:latin typeface="Arial"/>
+              </a:defRPr>
+            </a:pPr>
+            <a:r>
+              <a:t>6,0 %</a:t>
+            </a:r>
+          </a:p>
+          <a:p>
+            <a:pPr algn="ctr">
+              <a:defRPr sz="1500">
+                <a:solidFill>
+                  <a:srgbClr val="333333"/>
+                </a:solidFill>
+                <a:latin typeface="Arial"/>
+              </a:defRPr>
+            </a:pPr>
+            <a:r>
+              <a:t>Observado</a:t>
+            </a:r>
+          </a:p>
+        </p:txBody>
+      </p:sp>
+      <p:sp>
+        <p:nvSpPr>
+          <p:cNvPr id="4" name="Rounded Rectangle 3"/>
+          <p:cNvSpPr/>
+          <p:nvPr/>
+        </p:nvSpPr>
+        <p:spPr>
+          <a:xfrm>
+            <a:off x="4572000" y="2011680"/>
+            <a:ext cx="3017520" cy="1325880"/>
+          </a:xfrm>
+          <a:prstGeom prst="roundRect">
+            <a:avLst/>
+          </a:prstGeom>
+          <a:solidFill>
+            <a:srgbClr val="EAF3F8"/>
+          </a:solidFill>
+          <a:ln>
+            <a:solidFill>
+              <a:srgbClr val="D3E2EC"/>
+            </a:solidFill>
+          </a:ln>
+        </p:spPr>
+        <p:style>
+          <a:lnRef idx="1">
+            <a:schemeClr val="accent1"/>
+          </a:lnRef>
+          <a:fillRef idx="3">
+            <a:schemeClr val="accent1"/>
+          </a:fillRef>
+          <a:effectRef idx="2">
+            <a:schemeClr val="accent1"/>
+          </a:effectRef>
+          <a:fontRef idx="minor">
+            <a:schemeClr val="lt1"/>
+          </a:fontRef>
+        </p:style>
+        <p:txBody>
+          <a:bodyPr rtlCol="0" anchor="ctr"/>
+          <a:lstStyle/>
+          <a:p>
+            <a:pPr algn="ctr">
+              <a:defRPr sz="2500" b="1">
+                <a:solidFill>
+                  <a:srgbClr val="0072B2"/>
+                </a:solidFill>
+                <a:latin typeface="Arial"/>
+              </a:defRPr>
+            </a:pPr>
+            <a:r>
+              <a:t>-0,1 %</a:t>
+            </a:r>
+          </a:p>
+          <a:p>
+            <a:pPr algn="ctr">
+              <a:defRPr sz="1500">
+                <a:solidFill>
+                  <a:srgbClr val="333333"/>
+                </a:solidFill>
+                <a:latin typeface="Arial"/>
+              </a:defRPr>
+            </a:pPr>
+            <a:r>
+              <a:t>Comparable</a:t>
+            </a:r>
+          </a:p>
+        </p:txBody>
+      </p:sp>
+      <p:sp>
+        <p:nvSpPr>
+          <p:cNvPr id="5" name="Rounded Rectangle 4"/>
+          <p:cNvSpPr/>
+          <p:nvPr/>
+        </p:nvSpPr>
+        <p:spPr>
+          <a:xfrm>
+            <a:off x="8138160" y="2011680"/>
+            <a:ext cx="3017520" cy="1325880"/>
+          </a:xfrm>
+          <a:prstGeom prst="roundRect">
+            <a:avLst/>
+          </a:prstGeom>
+          <a:solidFill>
+            <a:srgbClr val="EAF3F8"/>
+          </a:solidFill>
+          <a:ln>
+            <a:solidFill>
+              <a:srgbClr val="D3E2EC"/>
+            </a:solidFill>
+          </a:ln>
+        </p:spPr>
+        <p:style>
+          <a:lnRef idx="1">
+            <a:schemeClr val="accent1"/>
+          </a:lnRef>
+          <a:fillRef idx="3">
+            <a:schemeClr val="accent1"/>
+          </a:fillRef>
+          <a:effectRef idx="2">
+            <a:schemeClr val="accent1"/>
+          </a:effectRef>
+          <a:fontRef idx="minor">
+            <a:schemeClr val="lt1"/>
+          </a:fontRef>
+        </p:style>
+        <p:txBody>
+          <a:bodyPr rtlCol="0" anchor="ctr"/>
+          <a:lstStyle/>
+          <a:p>
+            <a:pPr algn="ctr">
+              <a:defRPr sz="2500" b="1">
+                <a:solidFill>
+                  <a:srgbClr val="0072B2"/>
+                </a:solidFill>
+                <a:latin typeface="Arial"/>
+              </a:defRPr>
+            </a:pPr>
+            <a:r>
+              <a:t>2,5 %</a:t>
+            </a:r>
+          </a:p>
+          <a:p>
+            <a:pPr algn="ctr">
+              <a:defRPr sz="1500">
+                <a:solidFill>
+                  <a:srgbClr val="333333"/>
+                </a:solidFill>
+                <a:latin typeface="Arial"/>
+              </a:defRPr>
+            </a:pPr>
+            <a:r>
+              <a:t>Ajuste parcial de episodios</a:t>
+            </a:r>
+          </a:p>
+        </p:txBody>
+      </p:sp>
+      <p:sp>
+        <p:nvSpPr>
+          <p:cNvPr id="6" name="TextBox 5"/>
+          <p:cNvSpPr txBox="1"/>
+          <p:nvPr/>
+        </p:nvSpPr>
+        <p:spPr>
+          <a:xfrm>
+            <a:off x="914400" y="3977639"/>
+            <a:ext cx="9601200" cy="1005840"/>
+          </a:xfrm>
+          <a:prstGeom prst="rect">
+            <a:avLst/>
+          </a:prstGeom>
+          <a:noFill/>
+        </p:spPr>
+        <p:txBody>
+          <a:bodyPr wrap="square">
+            <a:spAutoFit/>
+          </a:bodyPr>
+          <a:lstStyle/>
+          <a:p>
+            <a:pPr>
+              <a:spcAft>
+                <a:spcPts val="1400"/>
+              </a:spcAft>
+              <a:defRPr sz="2000">
+                <a:solidFill>
+                  <a:srgbClr val="333333"/>
+                </a:solidFill>
+                <a:latin typeface="Arial"/>
+              </a:defRPr>
+            </a:pPr>
+            <a:r>
+              <a:t>Crecimiento observado y comparable son referencias distintas; no equivalen por sí solos a la demanda futura.</a:t>
+            </a:r>
+          </a:p>
+        </p:txBody>
+      </p:sp>
+    </p:spTree>
+  </p:cSld>
+  <p:clrMapOvr>
+    <a:masterClrMapping/>
+  </p:clrMapOvr>
+</p:sld>
+</file>
+
+<file path=ppt/slides/slide3.xml><?xml version="1.0" encoding="utf-8"?>
+<p:sld xmlns:a="http://schemas.openxmlformats.org/drawingml/2006/main" xmlns:p="http://schemas.openxmlformats.org/presentationml/2006/main" xmlns:r="http://schemas.openxmlformats.org/officeDocument/2006/relationships">
+  <p:cSld>
+    <p:bg>
+      <p:bgPr>
+        <a:solidFill>
+          <a:srgbClr val="FFFFFF"/>
+        </a:solidFill>
+        <a:effectLst/>
+      </p:bgPr>
+    </p:bg>
+    <p:spTree>
+      <p:nvGrpSpPr>
+        <p:cNvPr id="1" name=""/>
+        <p:cNvGrpSpPr/>
+        <p:nvPr/>
+      </p:nvGrpSpPr>
+      <p:grpSpPr/>
+      <p:sp>
+        <p:nvSpPr>
+          <p:cNvPr id="2" name="TextBox 1"/>
+          <p:cNvSpPr txBox="1"/>
+          <p:nvPr/>
+        </p:nvSpPr>
+        <p:spPr>
+          <a:xfrm>
+            <a:off x="502920" y="320040"/>
+            <a:ext cx="11155680" cy="594360"/>
+          </a:xfrm>
+          <a:prstGeom prst="rect">
+            <a:avLst/>
+          </a:prstGeom>
+          <a:noFill/>
+        </p:spPr>
+        <p:txBody>
+          <a:bodyPr wrap="none">
+            <a:spAutoFit/>
+          </a:bodyPr>
+          <a:lstStyle/>
+          <a:p>
+            <a:pPr>
+              <a:defRPr sz="3000" b="1">
+                <a:solidFill>
+                  <a:srgbClr val="0072B2"/>
+                </a:solidFill>
+                <a:latin typeface="Arial"/>
+              </a:defRPr>
+            </a:pPr>
+            <a:r>
+              <a:t>A012: evaluación retrospectiva, sin CSUV</a:t>
+            </a:r>
+          </a:p>
+        </p:txBody>
+      </p:sp>
+      <p:sp>
+        <p:nvSpPr>
+          <p:cNvPr id="3" name="Rounded Rectangle 2"/>
+          <p:cNvSpPr/>
+          <p:nvPr/>
+        </p:nvSpPr>
+        <p:spPr>
+          <a:xfrm>
+            <a:off x="914400" y="1645920"/>
+            <a:ext cx="4389120" cy="1325880"/>
+          </a:xfrm>
+          <a:prstGeom prst="roundRect">
+            <a:avLst/>
+          </a:prstGeom>
+          <a:solidFill>
+            <a:srgbClr val="EAF3F8"/>
+          </a:solidFill>
+          <a:ln>
+            <a:solidFill>
+              <a:srgbClr val="D3E2EC"/>
+            </a:solidFill>
+          </a:ln>
+        </p:spPr>
+        <p:style>
+          <a:lnRef idx="1">
+            <a:schemeClr val="accent1"/>
+          </a:lnRef>
+          <a:fillRef idx="3">
+            <a:schemeClr val="accent1"/>
+          </a:fillRef>
+          <a:effectRef idx="2">
+            <a:schemeClr val="accent1"/>
+          </a:effectRef>
+          <a:fontRef idx="minor">
+            <a:schemeClr val="lt1"/>
+          </a:fontRef>
+        </p:style>
+        <p:txBody>
+          <a:bodyPr rtlCol="0" anchor="ctr"/>
+          <a:lstStyle/>
+          <a:p>
+            <a:pPr algn="ctr">
+              <a:defRPr sz="2500" b="1">
+                <a:solidFill>
+                  <a:srgbClr val="0072B2"/>
+                </a:solidFill>
+                <a:latin typeface="Arial"/>
+              </a:defRPr>
+            </a:pPr>
+            <a:r>
+              <a:t>14,8 %</a:t>
+            </a:r>
+          </a:p>
+          <a:p>
+            <a:pPr algn="ctr">
+              <a:defRPr sz="1500">
+                <a:solidFill>
+                  <a:srgbClr val="333333"/>
+                </a:solidFill>
+                <a:latin typeface="Arial"/>
+              </a:defRPr>
+            </a:pPr>
+            <a:r>
+              <a:t>MAE mensual relativo, sin CSUV</a:t>
+            </a:r>
+          </a:p>
+        </p:txBody>
+      </p:sp>
+      <p:sp>
+        <p:nvSpPr>
+          <p:cNvPr id="4" name="TextBox 3"/>
+          <p:cNvSpPr txBox="1"/>
+          <p:nvPr/>
+        </p:nvSpPr>
+        <p:spPr>
+          <a:xfrm>
+            <a:off x="822960" y="3657600"/>
+            <a:ext cx="9966960" cy="1463040"/>
+          </a:xfrm>
+          <a:prstGeom prst="rect">
+            <a:avLst/>
+          </a:prstGeom>
+          <a:noFill/>
+        </p:spPr>
+        <p:txBody>
+          <a:bodyPr wrap="square">
+            <a:spAutoFit/>
+          </a:bodyPr>
+          <a:lstStyle/>
+          <a:p>
+            <a:pPr>
+              <a:spcAft>
+                <a:spcPts val="1400"/>
+              </a:spcAft>
+              <a:defRPr sz="2100">
+                <a:solidFill>
+                  <a:srgbClr val="333333"/>
+                </a:solidFill>
+                <a:latin typeface="Arial"/>
+              </a:defRPr>
+            </a:pPr>
+            <a:r>
+              <a:t>Selección con A009–A011; evaluación retrospectiva A012.</a:t>
+            </a:r>
+          </a:p>
+          <a:p>
+            <a:pPr>
+              <a:spcAft>
+                <a:spcPts val="1400"/>
+              </a:spcAft>
+              <a:defRPr sz="2100">
+                <a:solidFill>
+                  <a:srgbClr val="333333"/>
+                </a:solidFill>
+                <a:latin typeface="Arial"/>
+              </a:defRPr>
+            </a:pPr>
+            <a:r>
+              <a:t>CSUV utiliza una sensibilidad específica, no la precisión del total comparable.</a:t>
+            </a:r>
+          </a:p>
+        </p:txBody>
+      </p:sp>
+    </p:spTree>
+  </p:cSld>
+  <p:clrMapOvr>
+    <a:masterClrMapping/>
+  </p:clrMapOvr>
+</p:sld>
+</file>
+
+<file path=ppt/slides/slide4.xml><?xml version="1.0" encoding="utf-8"?>
+<p:sld xmlns:a="http://schemas.openxmlformats.org/drawingml/2006/main" xmlns:p="http://schemas.openxmlformats.org/presentationml/2006/main" xmlns:r="http://schemas.openxmlformats.org/officeDocument/2006/relationships">
+  <p:cSld>
+    <p:bg>
+      <p:bgPr>
+        <a:solidFill>
+          <a:srgbClr val="FFFFFF"/>
+        </a:solidFill>
+        <a:effectLst/>
+      </p:bgPr>
+    </p:bg>
+    <p:spTree>
+      <p:nvGrpSpPr>
+        <p:cNvPr id="1" name=""/>
+        <p:cNvGrpSpPr/>
+        <p:nvPr/>
+      </p:nvGrpSpPr>
+      <p:grpSpPr/>
+      <p:sp>
+        <p:nvSpPr>
+          <p:cNvPr id="2" name="TextBox 1"/>
+          <p:cNvSpPr txBox="1"/>
+          <p:nvPr/>
+        </p:nvSpPr>
+        <p:spPr>
+          <a:xfrm>
+            <a:off x="502920" y="320040"/>
+            <a:ext cx="11155680" cy="594360"/>
+          </a:xfrm>
+          <a:prstGeom prst="rect">
+            <a:avLst/>
+          </a:prstGeom>
+          <a:noFill/>
+        </p:spPr>
+        <p:txBody>
+          <a:bodyPr wrap="none">
+            <a:spAutoFit/>
+          </a:bodyPr>
+          <a:lstStyle/>
+          <a:p>
+            <a:pPr>
+              <a:defRPr sz="3000" b="1">
+                <a:solidFill>
+                  <a:srgbClr val="0072B2"/>
+                </a:solidFill>
+                <a:latin typeface="Arial"/>
+              </a:defRPr>
+            </a:pPr>
+            <a:r>
+              <a:t>Pedir hoy para recibir dentro de tres meses</a:t>
+            </a:r>
+          </a:p>
+        </p:txBody>
+      </p:sp>
+      <p:graphicFrame>
+        <p:nvGraphicFramePr>
+          <p:cNvPr id="3" name="Chart 2"/>
+          <p:cNvGraphicFramePr>
+            <a:graphicFrameLocks noGrp="1"/>
+          </p:cNvGraphicFramePr>
+          <p:nvPr/>
+        </p:nvGraphicFramePr>
+        <p:xfrm>
+          <a:off x="777240" y="1234440"/>
+          <a:ext cx="10515600" cy="2971800"/>
+        </p:xfrm>
+        <a:graphic>
+          <a:graphicData uri="http://schemas.openxmlformats.org/drawingml/2006/chart">
+            <c:chart xmlns:c="http://schemas.openxmlformats.org/drawingml/2006/chart" r:id="rId3"/>
+          </a:graphicData>
+        </a:graphic>
+      </p:graphicFrame>
+      <p:sp>
+        <p:nvSpPr>
+          <p:cNvPr id="4" name="Rounded Rectangle 3"/>
+          <p:cNvSpPr/>
+          <p:nvPr/>
+        </p:nvSpPr>
+        <p:spPr>
+          <a:xfrm>
+            <a:off x="685800" y="4572000"/>
+            <a:ext cx="5120640" cy="868680"/>
+          </a:xfrm>
+          <a:prstGeom prst="roundRect">
+            <a:avLst/>
+          </a:prstGeom>
+          <a:solidFill>
+            <a:srgbClr val="EAF3F8"/>
+          </a:solidFill>
+          <a:ln>
+            <a:solidFill>
+              <a:srgbClr val="0072B2"/>
+            </a:solidFill>
+          </a:ln>
+        </p:spPr>
+        <p:style>
+          <a:lnRef idx="1">
+            <a:schemeClr val="accent1"/>
+          </a:lnRef>
+          <a:fillRef idx="3">
+            <a:schemeClr val="accent1"/>
+          </a:fillRef>
+          <a:effectRef idx="2">
+            <a:schemeClr val="accent1"/>
+          </a:effectRef>
+          <a:fontRef idx="minor">
+            <a:schemeClr val="lt1"/>
+          </a:fontRef>
+        </p:style>
+        <p:txBody>
+          <a:bodyPr rtlCol="0" anchor="ctr"/>
+          <a:lstStyle/>
+          <a:p>
+            <a:pPr algn="ctr">
+              <a:defRPr sz="1800">
+                <a:solidFill>
+                  <a:srgbClr val="333333"/>
+                </a:solidFill>
+                <a:latin typeface="Arial"/>
+              </a:defRPr>
+            </a:pPr>
+            <a:r>
+              <a:t>Decisión / pedido</a:t>
+            </a:r>
+          </a:p>
+        </p:txBody>
+      </p:sp>
+      <p:sp>
+        <p:nvSpPr>
+          <p:cNvPr id="5" name="Right Arrow 4"/>
+          <p:cNvSpPr/>
+          <p:nvPr/>
+        </p:nvSpPr>
+        <p:spPr>
+          <a:xfrm>
+            <a:off x="5779008" y="4828032"/>
+            <a:ext cx="320040" cy="329184"/>
+          </a:xfrm>
+          <a:prstGeom prst="rightArrow">
             <a:avLst/>
           </a:prstGeom>
           <a:solidFill>
@@ -4050,158 +5849,25 @@
       </p:sp>
       <p:sp>
         <p:nvSpPr>
-          <p:cNvPr id="3" name="TextBox 2"/>
-          <p:cNvSpPr txBox="1"/>
+          <p:cNvPr id="6" name="Rounded Rectangle 5"/>
+          <p:cNvSpPr/>
           <p:nvPr/>
         </p:nvSpPr>
         <p:spPr>
           <a:xfrm>
-            <a:off x="1097280" y="1737360"/>
-            <a:ext cx="10332720" cy="1463040"/>
+            <a:off x="6080760" y="4572000"/>
+            <a:ext cx="5120640" cy="868680"/>
           </a:xfrm>
-          <a:prstGeom prst="rect">
-            <a:avLst/>
-          </a:prstGeom>
-          <a:noFill/>
-        </p:spPr>
-        <p:txBody>
-          <a:bodyPr wrap="square" lIns="45720" rIns="45720" anchor="ctr">
-            <a:spAutoFit/>
-          </a:bodyPr>
-          <a:lstStyle/>
-          <a:p>
-            <a:pPr>
-              <a:spcAft>
-                <a:spcPts val="600"/>
-              </a:spcAft>
-            </a:pPr>
-            <a:r>
-              <a:rPr sz="3200" b="1">
-                <a:solidFill>
-                  <a:srgbClr val="1F1F1F"/>
-                </a:solidFill>
-                <a:latin typeface="Arial"/>
-              </a:rPr>
-              <a:t>Kaido Motors España: plan de producción de A013</a:t>
-            </a:r>
-          </a:p>
-        </p:txBody>
-      </p:sp>
-      <p:sp>
-        <p:nvSpPr>
-          <p:cNvPr id="4" name="TextBox 3"/>
-          <p:cNvSpPr txBox="1"/>
-          <p:nvPr/>
-        </p:nvSpPr>
-        <p:spPr>
-          <a:xfrm>
-            <a:off x="1097280" y="3200400"/>
-            <a:ext cx="10332720" cy="1097280"/>
-          </a:xfrm>
-          <a:prstGeom prst="rect">
-            <a:avLst/>
-          </a:prstGeom>
-          <a:noFill/>
-        </p:spPr>
-        <p:txBody>
-          <a:bodyPr wrap="square" lIns="45720" rIns="45720">
-            <a:spAutoFit/>
-          </a:bodyPr>
-          <a:lstStyle/>
-          <a:p>
-            <a:pPr>
-              <a:spcAft>
-                <a:spcPts val="600"/>
-              </a:spcAft>
-            </a:pPr>
-            <a:r>
-              <a:rPr sz="2400" b="0">
-                <a:solidFill>
-                  <a:srgbClr val="0072B2"/>
-                </a:solidFill>
-                <a:latin typeface="Arial"/>
-              </a:rPr>
-              <a:t>Recibir 17.400 coches y concentrar el stock en los SUV de mayor margen</a:t>
-            </a:r>
-          </a:p>
-        </p:txBody>
-      </p:sp>
-      <p:sp>
-        <p:nvSpPr>
-          <p:cNvPr id="5" name="TextBox 4"/>
-          <p:cNvSpPr txBox="1"/>
-          <p:nvPr/>
-        </p:nvSpPr>
-        <p:spPr>
-          <a:xfrm>
-            <a:off x="1097280" y="5760720"/>
-            <a:ext cx="10332720" cy="548640"/>
-          </a:xfrm>
-          <a:prstGeom prst="rect">
-            <a:avLst/>
-          </a:prstGeom>
-          <a:noFill/>
-        </p:spPr>
-        <p:txBody>
-          <a:bodyPr wrap="square" lIns="45720" rIns="45720">
-            <a:spAutoFit/>
-          </a:bodyPr>
-          <a:lstStyle/>
-          <a:p>
-            <a:pPr>
-              <a:spcAft>
-                <a:spcPts val="600"/>
-              </a:spcAft>
-            </a:pPr>
-            <a:r>
-              <a:rPr sz="1600" b="0">
-                <a:solidFill>
-                  <a:srgbClr val="555555"/>
-                </a:solidFill>
-                <a:latin typeface="Arial"/>
-              </a:rPr>
-              <a:t>Simulación de Sistemas Logísticos · Universidad Alfonso X el Sabio</a:t>
-            </a:r>
-          </a:p>
-        </p:txBody>
-      </p:sp>
-    </p:spTree>
-  </p:cSld>
-  <p:clrMapOvr>
-    <a:masterClrMapping/>
-  </p:clrMapOvr>
-</p:sld>
-</file>
-
-<file path=ppt/slides/slide2.xml><?xml version="1.0" encoding="utf-8"?>
-<p:sld xmlns:a="http://schemas.openxmlformats.org/drawingml/2006/main" xmlns:p="http://schemas.openxmlformats.org/presentationml/2006/main" xmlns:r="http://schemas.openxmlformats.org/officeDocument/2006/relationships">
-  <p:cSld>
-    <p:spTree>
-      <p:nvGrpSpPr>
-        <p:cNvPr id="1" name=""/>
-        <p:cNvGrpSpPr/>
-        <p:nvPr/>
-      </p:nvGrpSpPr>
-      <p:grpSpPr/>
-      <p:sp>
-        <p:nvSpPr>
-          <p:cNvPr id="2" name="Rectangle 1"/>
-          <p:cNvSpPr/>
-          <p:nvPr/>
-        </p:nvSpPr>
-        <p:spPr>
-          <a:xfrm>
-            <a:off x="457200" y="411480"/>
-            <a:ext cx="109728" cy="822960"/>
-          </a:xfrm>
-          <a:prstGeom prst="rect">
+          <a:prstGeom prst="roundRect">
             <a:avLst/>
           </a:prstGeom>
           <a:solidFill>
-            <a:srgbClr val="0072B2"/>
+            <a:srgbClr val="EAF3F8"/>
           </a:solidFill>
           <a:ln>
-            <a:noFill/>
+            <a:solidFill>
+              <a:srgbClr val="0072B2"/>
+            </a:solidFill>
           </a:ln>
         </p:spPr>
         <p:style>
@@ -4222,20 +5888,30 @@
           <a:bodyPr rtlCol="0" anchor="ctr"/>
           <a:lstStyle/>
           <a:p>
-            <a:pPr algn="ctr"/>
-          </a:p>
-        </p:txBody>
-      </p:sp>
-      <p:sp>
-        <p:nvSpPr>
-          <p:cNvPr id="3" name="TextBox 2"/>
+            <a:pPr algn="ctr">
+              <a:defRPr sz="1800">
+                <a:solidFill>
+                  <a:srgbClr val="333333"/>
+                </a:solidFill>
+                <a:latin typeface="Arial"/>
+              </a:defRPr>
+            </a:pPr>
+            <a:r>
+              <a:t>Llegada t+3</a:t>
+            </a:r>
+          </a:p>
+        </p:txBody>
+      </p:sp>
+      <p:sp>
+        <p:nvSpPr>
+          <p:cNvPr id="7" name="TextBox 6"/>
           <p:cNvSpPr txBox="1"/>
           <p:nvPr/>
         </p:nvSpPr>
         <p:spPr>
           <a:xfrm>
-            <a:off x="685800" y="320040"/>
-            <a:ext cx="10972800" cy="1005840"/>
+            <a:off x="7543800" y="5486400"/>
+            <a:ext cx="3840480" cy="548640"/>
           </a:xfrm>
           <a:prstGeom prst="rect">
             <a:avLst/>
@@ -4243,38 +5919,64 @@
           <a:noFill/>
         </p:spPr>
         <p:txBody>
-          <a:bodyPr wrap="square" lIns="45720" rIns="45720" anchor="ctr">
+          <a:bodyPr wrap="square">
             <a:spAutoFit/>
           </a:bodyPr>
           <a:lstStyle/>
           <a:p>
             <a:pPr>
               <a:spcAft>
-                <a:spcPts val="600"/>
+                <a:spcPts val="1400"/>
               </a:spcAft>
-            </a:pPr>
-            <a:r>
-              <a:rPr sz="2800" b="1">
+              <a:defRPr sz="1600">
                 <a:solidFill>
-                  <a:srgbClr val="1F1F1F"/>
+                  <a:srgbClr val="333333"/>
                 </a:solidFill>
                 <a:latin typeface="Arial"/>
-              </a:rPr>
-              <a:t>En A012 la demanda de clientes cayó; no creció</a:t>
-            </a:r>
-          </a:p>
-        </p:txBody>
-      </p:sp>
-      <p:sp>
-        <p:nvSpPr>
-          <p:cNvPr id="4" name="TextBox 3"/>
+              </a:defRPr>
+            </a:pPr>
+            <a:r>
+              <a:t>Pedidos de cierre: llegada en prolongación A014.</a:t>
+            </a:r>
+          </a:p>
+        </p:txBody>
+      </p:sp>
+    </p:spTree>
+  </p:cSld>
+  <p:clrMapOvr>
+    <a:masterClrMapping/>
+  </p:clrMapOvr>
+</p:sld>
+</file>
+
+<file path=ppt/slides/slide5.xml><?xml version="1.0" encoding="utf-8"?>
+<p:sld xmlns:a="http://schemas.openxmlformats.org/drawingml/2006/main" xmlns:p="http://schemas.openxmlformats.org/presentationml/2006/main" xmlns:r="http://schemas.openxmlformats.org/officeDocument/2006/relationships">
+  <p:cSld>
+    <p:bg>
+      <p:bgPr>
+        <a:solidFill>
+          <a:srgbClr val="FFFFFF"/>
+        </a:solidFill>
+        <a:effectLst/>
+      </p:bgPr>
+    </p:bg>
+    <p:spTree>
+      <p:nvGrpSpPr>
+        <p:cNvPr id="1" name=""/>
+        <p:cNvGrpSpPr/>
+        <p:nvPr/>
+      </p:nvGrpSpPr>
+      <p:grpSpPr/>
+      <p:sp>
+        <p:nvSpPr>
+          <p:cNvPr id="2" name="TextBox 1"/>
           <p:cNvSpPr txBox="1"/>
           <p:nvPr/>
         </p:nvSpPr>
         <p:spPr>
           <a:xfrm>
-            <a:off x="11155680" y="6400800"/>
-            <a:ext cx="731520" cy="320040"/>
+            <a:off x="502920" y="320040"/>
+            <a:ext cx="11155680" cy="594360"/>
           </a:xfrm>
           <a:prstGeom prst="rect">
             <a:avLst/>
@@ -4282,47 +5984,144 @@
           <a:noFill/>
         </p:spPr>
         <p:txBody>
-          <a:bodyPr wrap="square" lIns="45720" rIns="45720">
+          <a:bodyPr wrap="none">
             <a:spAutoFit/>
           </a:bodyPr>
           <a:lstStyle/>
           <a:p>
-            <a:pPr algn="r">
-              <a:spcAft>
-                <a:spcPts val="600"/>
-              </a:spcAft>
-            </a:pPr>
-            <a:r>
-              <a:rPr sz="1200" b="0">
+            <a:pPr>
+              <a:defRPr sz="3000" b="1">
                 <a:solidFill>
-                  <a:srgbClr val="555555"/>
+                  <a:srgbClr val="0072B2"/>
                 </a:solidFill>
                 <a:latin typeface="Arial"/>
-              </a:rPr>
-              <a:t>2</a:t>
-            </a:r>
-          </a:p>
-        </p:txBody>
-      </p:sp>
-      <p:sp>
-        <p:nvSpPr>
-          <p:cNvPr id="5" name="Rectangle 4"/>
-          <p:cNvSpPr/>
+              </a:defRPr>
+            </a:pPr>
+            <a:r>
+              <a:t>Tres escenarios, un mismo plan inicial</a:t>
+            </a:r>
+          </a:p>
+        </p:txBody>
+      </p:sp>
+      <p:graphicFrame>
+        <p:nvGraphicFramePr>
+          <p:cNvPr id="3" name="Chart 2"/>
+          <p:cNvGraphicFramePr>
+            <a:graphicFrameLocks noGrp="1"/>
+          </p:cNvGraphicFramePr>
+          <p:nvPr/>
+        </p:nvGraphicFramePr>
+        <p:xfrm>
+          <a:off x="914400" y="1371600"/>
+          <a:ext cx="4754880" cy="4297680"/>
+        </p:xfrm>
+        <a:graphic>
+          <a:graphicData uri="http://schemas.openxmlformats.org/drawingml/2006/chart">
+            <c:chart xmlns:c="http://schemas.openxmlformats.org/drawingml/2006/chart" r:id="rId3"/>
+          </a:graphicData>
+        </a:graphic>
+      </p:graphicFrame>
+      <p:graphicFrame>
+        <p:nvGraphicFramePr>
+          <p:cNvPr id="4" name="Chart 3"/>
+          <p:cNvGraphicFramePr>
+            <a:graphicFrameLocks noGrp="1"/>
+          </p:cNvGraphicFramePr>
+          <p:nvPr/>
+        </p:nvGraphicFramePr>
+        <p:xfrm>
+          <a:off x="6309360" y="1371600"/>
+          <a:ext cx="4754880" cy="4297680"/>
+        </p:xfrm>
+        <a:graphic>
+          <a:graphicData uri="http://schemas.openxmlformats.org/drawingml/2006/chart">
+            <c:chart xmlns:c="http://schemas.openxmlformats.org/drawingml/2006/chart" r:id="rId4"/>
+          </a:graphicData>
+        </a:graphic>
+      </p:graphicFrame>
+    </p:spTree>
+  </p:cSld>
+  <p:clrMapOvr>
+    <a:masterClrMapping/>
+  </p:clrMapOvr>
+</p:sld>
+</file>
+
+<file path=ppt/slides/slide6.xml><?xml version="1.0" encoding="utf-8"?>
+<p:sld xmlns:a="http://schemas.openxmlformats.org/drawingml/2006/main" xmlns:p="http://schemas.openxmlformats.org/presentationml/2006/main" xmlns:r="http://schemas.openxmlformats.org/officeDocument/2006/relationships">
+  <p:cSld>
+    <p:bg>
+      <p:bgPr>
+        <a:solidFill>
+          <a:srgbClr val="FFFFFF"/>
+        </a:solidFill>
+        <a:effectLst/>
+      </p:bgPr>
+    </p:bg>
+    <p:spTree>
+      <p:nvGrpSpPr>
+        <p:cNvPr id="1" name=""/>
+        <p:cNvGrpSpPr/>
+        <p:nvPr/>
+      </p:nvGrpSpPr>
+      <p:grpSpPr/>
+      <p:sp>
+        <p:nvSpPr>
+          <p:cNvPr id="2" name="TextBox 1"/>
+          <p:cNvSpPr txBox="1"/>
           <p:nvPr/>
         </p:nvSpPr>
         <p:spPr>
           <a:xfrm>
-            <a:off x="685800" y="1737360"/>
-            <a:ext cx="2651760" cy="2103120"/>
+            <a:off x="502920" y="320040"/>
+            <a:ext cx="11155680" cy="594360"/>
           </a:xfrm>
           <a:prstGeom prst="rect">
             <a:avLst/>
           </a:prstGeom>
+          <a:noFill/>
+        </p:spPr>
+        <p:txBody>
+          <a:bodyPr wrap="none">
+            <a:spAutoFit/>
+          </a:bodyPr>
+          <a:lstStyle/>
+          <a:p>
+            <a:pPr>
+              <a:defRPr sz="3000" b="1">
+                <a:solidFill>
+                  <a:srgbClr val="0072B2"/>
+                </a:solidFill>
+                <a:latin typeface="Arial"/>
+              </a:defRPr>
+            </a:pPr>
+            <a:r>
+              <a:t>CO₂: aislar el coste manteniendo los flujos</a:t>
+            </a:r>
+          </a:p>
+        </p:txBody>
+      </p:sp>
+      <p:sp>
+        <p:nvSpPr>
+          <p:cNvPr id="3" name="Rounded Rectangle 2"/>
+          <p:cNvSpPr/>
+          <p:nvPr/>
+        </p:nvSpPr>
+        <p:spPr>
+          <a:xfrm>
+            <a:off x="914400" y="1828800"/>
+            <a:ext cx="4114800" cy="1371600"/>
+          </a:xfrm>
+          <a:prstGeom prst="roundRect">
+            <a:avLst/>
+          </a:prstGeom>
           <a:solidFill>
-            <a:srgbClr val="DCEBF5"/>
+            <a:srgbClr val="EAF3F8"/>
           </a:solidFill>
           <a:ln>
-            <a:noFill/>
+            <a:solidFill>
+              <a:srgbClr val="D3E2EC"/>
+            </a:solidFill>
           </a:ln>
         </p:spPr>
         <p:style>
@@ -4343,107 +6142,54 @@
           <a:bodyPr rtlCol="0" anchor="ctr"/>
           <a:lstStyle/>
           <a:p>
-            <a:pPr algn="ctr"/>
-          </a:p>
-        </p:txBody>
-      </p:sp>
-      <p:sp>
-        <p:nvSpPr>
-          <p:cNvPr id="6" name="TextBox 5"/>
-          <p:cNvSpPr txBox="1"/>
+            <a:pPr algn="ctr">
+              <a:defRPr sz="2500" b="1">
+                <a:solidFill>
+                  <a:srgbClr val="0072B2"/>
+                </a:solidFill>
+                <a:latin typeface="Arial"/>
+              </a:defRPr>
+            </a:pPr>
+            <a:r>
+              <a:t>-55,01</a:t>
+            </a:r>
+          </a:p>
+          <a:p>
+            <a:pPr algn="ctr">
+              <a:defRPr sz="1500">
+                <a:solidFill>
+                  <a:srgbClr val="333333"/>
+                </a:solidFill>
+                <a:latin typeface="Arial"/>
+              </a:defRPr>
+            </a:pPr>
+            <a:r>
+              <a:t>Efecto CO₂ aislado (M€)</a:t>
+            </a:r>
+          </a:p>
+        </p:txBody>
+      </p:sp>
+      <p:sp>
+        <p:nvSpPr>
+          <p:cNvPr id="4" name="Rounded Rectangle 3"/>
+          <p:cNvSpPr/>
           <p:nvPr/>
         </p:nvSpPr>
         <p:spPr>
           <a:xfrm>
-            <a:off x="685800" y="1874519"/>
-            <a:ext cx="2651760" cy="1097280"/>
+            <a:off x="5669280" y="1828800"/>
+            <a:ext cx="4114800" cy="1371600"/>
           </a:xfrm>
-          <a:prstGeom prst="rect">
-            <a:avLst/>
-          </a:prstGeom>
-          <a:noFill/>
-        </p:spPr>
-        <p:txBody>
-          <a:bodyPr wrap="square" lIns="45720" rIns="45720" anchor="ctr">
-            <a:spAutoFit/>
-          </a:bodyPr>
-          <a:lstStyle/>
-          <a:p>
-            <a:pPr algn="ctr">
-              <a:spcAft>
-                <a:spcPts val="600"/>
-              </a:spcAft>
-            </a:pPr>
-            <a:r>
-              <a:rPr sz="3200" b="1">
-                <a:solidFill>
-                  <a:srgbClr val="1F1F1F"/>
-                </a:solidFill>
-                <a:latin typeface="Arial"/>
-              </a:rPr>
-              <a:t>+8,5 %</a:t>
-            </a:r>
-          </a:p>
-        </p:txBody>
-      </p:sp>
-      <p:sp>
-        <p:nvSpPr>
-          <p:cNvPr id="7" name="TextBox 6"/>
-          <p:cNvSpPr txBox="1"/>
-          <p:nvPr/>
-        </p:nvSpPr>
-        <p:spPr>
-          <a:xfrm>
-            <a:off x="685800" y="2926080"/>
-            <a:ext cx="2651760" cy="822960"/>
-          </a:xfrm>
-          <a:prstGeom prst="rect">
-            <a:avLst/>
-          </a:prstGeom>
-          <a:noFill/>
-        </p:spPr>
-        <p:txBody>
-          <a:bodyPr wrap="square" lIns="45720" rIns="45720">
-            <a:spAutoFit/>
-          </a:bodyPr>
-          <a:lstStyle/>
-          <a:p>
-            <a:pPr algn="ctr">
-              <a:spcAft>
-                <a:spcPts val="600"/>
-              </a:spcAft>
-            </a:pPr>
-            <a:r>
-              <a:rPr sz="2000" b="0">
-                <a:solidFill>
-                  <a:srgbClr val="1F1F1F"/>
-                </a:solidFill>
-                <a:latin typeface="Arial"/>
-              </a:rPr>
-              <a:t>Matriculaciones</a:t>
-            </a:r>
-          </a:p>
-        </p:txBody>
-      </p:sp>
-      <p:sp>
-        <p:nvSpPr>
-          <p:cNvPr id="8" name="Rectangle 7"/>
-          <p:cNvSpPr/>
-          <p:nvPr/>
-        </p:nvSpPr>
-        <p:spPr>
-          <a:xfrm>
-            <a:off x="3520440" y="1737360"/>
-            <a:ext cx="2651760" cy="2103120"/>
-          </a:xfrm>
-          <a:prstGeom prst="rect">
+          <a:prstGeom prst="roundRect">
             <a:avLst/>
           </a:prstGeom>
           <a:solidFill>
-            <a:srgbClr val="DCEBF5"/>
+            <a:srgbClr val="EAF3F8"/>
           </a:solidFill>
           <a:ln>
-            <a:noFill/>
+            <a:solidFill>
+              <a:srgbClr val="D3E2EC"/>
+            </a:solidFill>
           </a:ln>
         </p:spPr>
         <p:style>
@@ -4464,20 +6210,43 @@
           <a:bodyPr rtlCol="0" anchor="ctr"/>
           <a:lstStyle/>
           <a:p>
-            <a:pPr algn="ctr"/>
-          </a:p>
-        </p:txBody>
-      </p:sp>
-      <p:sp>
-        <p:nvSpPr>
-          <p:cNvPr id="9" name="TextBox 8"/>
+            <a:pPr algn="ctr">
+              <a:defRPr sz="2500" b="1">
+                <a:solidFill>
+                  <a:srgbClr val="0072B2"/>
+                </a:solidFill>
+                <a:latin typeface="Arial"/>
+              </a:defRPr>
+            </a:pPr>
+            <a:r>
+              <a:t>62,9</a:t>
+            </a:r>
+          </a:p>
+          <a:p>
+            <a:pPr algn="ctr">
+              <a:defRPr sz="1500">
+                <a:solidFill>
+                  <a:srgbClr val="333333"/>
+                </a:solidFill>
+                <a:latin typeface="Arial"/>
+              </a:defRPr>
+            </a:pPr>
+            <a:r>
+              <a:t>Resultado medio central (M€)</a:t>
+            </a:r>
+          </a:p>
+        </p:txBody>
+      </p:sp>
+      <p:sp>
+        <p:nvSpPr>
+          <p:cNvPr id="5" name="TextBox 4"/>
           <p:cNvSpPr txBox="1"/>
           <p:nvPr/>
         </p:nvSpPr>
         <p:spPr>
           <a:xfrm>
-            <a:off x="3520440" y="1874519"/>
-            <a:ext cx="2651760" cy="1097280"/>
+            <a:off x="914400" y="3977639"/>
+            <a:ext cx="9326880" cy="914400"/>
           </a:xfrm>
           <a:prstGeom prst="rect">
             <a:avLst/>
@@ -4485,38 +6254,64 @@
           <a:noFill/>
         </p:spPr>
         <p:txBody>
-          <a:bodyPr wrap="square" lIns="45720" rIns="45720" anchor="ctr">
+          <a:bodyPr wrap="square">
             <a:spAutoFit/>
           </a:bodyPr>
           <a:lstStyle/>
           <a:p>
-            <a:pPr algn="ctr">
+            <a:pPr>
               <a:spcAft>
-                <a:spcPts val="600"/>
+                <a:spcPts val="1400"/>
               </a:spcAft>
-            </a:pPr>
-            <a:r>
-              <a:rPr sz="3200" b="1">
+              <a:defRPr sz="2100">
                 <a:solidFill>
-                  <a:srgbClr val="1F1F1F"/>
+                  <a:srgbClr val="333333"/>
                 </a:solidFill>
                 <a:latin typeface="Arial"/>
-              </a:rPr>
-              <a:t>+6,0 %</a:t>
-            </a:r>
-          </a:p>
-        </p:txBody>
-      </p:sp>
-      <p:sp>
-        <p:nvSpPr>
-          <p:cNvPr id="10" name="TextBox 9"/>
+              </a:defRPr>
+            </a:pPr>
+            <a:r>
+              <a:t>VM, CVP y costes logísticos deben leerse por separado.</a:t>
+            </a:r>
+          </a:p>
+        </p:txBody>
+      </p:sp>
+    </p:spTree>
+  </p:cSld>
+  <p:clrMapOvr>
+    <a:masterClrMapping/>
+  </p:clrMapOvr>
+</p:sld>
+</file>
+
+<file path=ppt/slides/slide7.xml><?xml version="1.0" encoding="utf-8"?>
+<p:sld xmlns:a="http://schemas.openxmlformats.org/drawingml/2006/main" xmlns:p="http://schemas.openxmlformats.org/presentationml/2006/main" xmlns:r="http://schemas.openxmlformats.org/officeDocument/2006/relationships">
+  <p:cSld>
+    <p:bg>
+      <p:bgPr>
+        <a:solidFill>
+          <a:srgbClr val="FFFFFF"/>
+        </a:solidFill>
+        <a:effectLst/>
+      </p:bgPr>
+    </p:bg>
+    <p:spTree>
+      <p:nvGrpSpPr>
+        <p:cNvPr id="1" name=""/>
+        <p:cNvGrpSpPr/>
+        <p:nvPr/>
+      </p:nvGrpSpPr>
+      <p:grpSpPr/>
+      <p:sp>
+        <p:nvSpPr>
+          <p:cNvPr id="2" name="TextBox 1"/>
           <p:cNvSpPr txBox="1"/>
           <p:nvPr/>
         </p:nvSpPr>
         <p:spPr>
           <a:xfrm>
-            <a:off x="3520440" y="2926080"/>
-            <a:ext cx="2651760" cy="822960"/>
+            <a:off x="502920" y="320040"/>
+            <a:ext cx="11155680" cy="594360"/>
           </a:xfrm>
           <a:prstGeom prst="rect">
             <a:avLst/>
@@ -4524,47 +6319,197 @@
           <a:noFill/>
         </p:spPr>
         <p:txBody>
-          <a:bodyPr wrap="square" lIns="45720" rIns="45720">
+          <a:bodyPr wrap="none">
             <a:spAutoFit/>
           </a:bodyPr>
           <a:lstStyle/>
           <a:p>
-            <a:pPr algn="ctr">
-              <a:spcAft>
-                <a:spcPts val="600"/>
-              </a:spcAft>
-            </a:pPr>
-            <a:r>
-              <a:rPr sz="2000" b="0">
+            <a:pPr>
+              <a:defRPr sz="3000" b="1">
                 <a:solidFill>
-                  <a:srgbClr val="1F1F1F"/>
+                  <a:srgbClr val="0072B2"/>
                 </a:solidFill>
                 <a:latin typeface="Arial"/>
-              </a:rPr>
-              <a:t>Sin automatriculaciones</a:t>
-            </a:r>
-          </a:p>
-        </p:txBody>
-      </p:sp>
-      <p:sp>
-        <p:nvSpPr>
-          <p:cNvPr id="11" name="Rectangle 10"/>
-          <p:cNvSpPr/>
+              </a:defRPr>
+            </a:pPr>
+            <a:r>
+              <a:t>Servicio por segmento y señales de revisión</a:t>
+            </a:r>
+          </a:p>
+        </p:txBody>
+      </p:sp>
+      <p:graphicFrame>
+        <p:nvGraphicFramePr>
+          <p:cNvPr id="3" name="Chart 2"/>
+          <p:cNvGraphicFramePr>
+            <a:graphicFrameLocks noGrp="1"/>
+          </p:cNvGraphicFramePr>
+          <p:nvPr/>
+        </p:nvGraphicFramePr>
+        <p:xfrm>
+          <a:off x="822960" y="1325880"/>
+          <a:ext cx="6400800" cy="4206240"/>
+        </p:xfrm>
+        <a:graphic>
+          <a:graphicData uri="http://schemas.openxmlformats.org/drawingml/2006/chart">
+            <c:chart xmlns:c="http://schemas.openxmlformats.org/drawingml/2006/chart" r:id="rId3"/>
+          </a:graphicData>
+        </a:graphic>
+      </p:graphicFrame>
+      <p:sp>
+        <p:nvSpPr>
+          <p:cNvPr id="4" name="TextBox 3"/>
+          <p:cNvSpPr txBox="1"/>
           <p:nvPr/>
         </p:nvSpPr>
         <p:spPr>
           <a:xfrm>
-            <a:off x="6355080" y="1737360"/>
-            <a:ext cx="2651760" cy="2103120"/>
+            <a:off x="7589520" y="1828800"/>
+            <a:ext cx="3657600" cy="2560320"/>
           </a:xfrm>
           <a:prstGeom prst="rect">
             <a:avLst/>
           </a:prstGeom>
+          <a:noFill/>
+        </p:spPr>
+        <p:txBody>
+          <a:bodyPr wrap="square">
+            <a:spAutoFit/>
+          </a:bodyPr>
+          <a:lstStyle/>
+          <a:p>
+            <a:pPr>
+              <a:spcAft>
+                <a:spcPts val="1400"/>
+              </a:spcAft>
+              <a:defRPr sz="2000">
+                <a:solidFill>
+                  <a:srgbClr val="333333"/>
+                </a:solidFill>
+                <a:latin typeface="Arial"/>
+              </a:defRPr>
+            </a:pPr>
+            <a:r>
+              <a:t>Objetivo: 95 % de unidades</a:t>
+            </a:r>
+          </a:p>
+          <a:p>
+            <a:pPr>
+              <a:spcAft>
+                <a:spcPts val="1400"/>
+              </a:spcAft>
+              <a:defRPr sz="2000">
+                <a:solidFill>
+                  <a:srgbClr val="333333"/>
+                </a:solidFill>
+                <a:latin typeface="Arial"/>
+              </a:defRPr>
+            </a:pPr>
+            <a:r>
+              <a:t>Cumplimiento por segmento: sí</a:t>
+            </a:r>
+          </a:p>
+          <a:p>
+            <a:pPr>
+              <a:spcAft>
+                <a:spcPts val="1400"/>
+              </a:spcAft>
+              <a:defRPr sz="2000">
+                <a:solidFill>
+                  <a:srgbClr val="333333"/>
+                </a:solidFill>
+                <a:latin typeface="Arial"/>
+              </a:defRPr>
+            </a:pPr>
+            <a:r>
+              <a:t>Revisar ventas/previsión; vigilar roturas, edad y costes.</a:t>
+            </a:r>
+          </a:p>
+        </p:txBody>
+      </p:sp>
+    </p:spTree>
+  </p:cSld>
+  <p:clrMapOvr>
+    <a:masterClrMapping/>
+  </p:clrMapOvr>
+</p:sld>
+</file>
+
+<file path=ppt/slides/slide8.xml><?xml version="1.0" encoding="utf-8"?>
+<p:sld xmlns:a="http://schemas.openxmlformats.org/drawingml/2006/main" xmlns:p="http://schemas.openxmlformats.org/presentationml/2006/main" xmlns:r="http://schemas.openxmlformats.org/officeDocument/2006/relationships">
+  <p:cSld>
+    <p:bg>
+      <p:bgPr>
+        <a:solidFill>
+          <a:srgbClr val="FFFFFF"/>
+        </a:solidFill>
+        <a:effectLst/>
+      </p:bgPr>
+    </p:bg>
+    <p:spTree>
+      <p:nvGrpSpPr>
+        <p:cNvPr id="1" name=""/>
+        <p:cNvGrpSpPr/>
+        <p:nvPr/>
+      </p:nvGrpSpPr>
+      <p:grpSpPr/>
+      <p:sp>
+        <p:nvSpPr>
+          <p:cNvPr id="2" name="TextBox 1"/>
+          <p:cNvSpPr txBox="1"/>
+          <p:nvPr/>
+        </p:nvSpPr>
+        <p:spPr>
+          <a:xfrm>
+            <a:off x="502920" y="320040"/>
+            <a:ext cx="11155680" cy="594360"/>
+          </a:xfrm>
+          <a:prstGeom prst="rect">
+            <a:avLst/>
+          </a:prstGeom>
+          <a:noFill/>
+        </p:spPr>
+        <p:txBody>
+          <a:bodyPr wrap="none">
+            <a:spAutoFit/>
+          </a:bodyPr>
+          <a:lstStyle/>
+          <a:p>
+            <a:pPr>
+              <a:defRPr sz="3000" b="1">
+                <a:solidFill>
+                  <a:srgbClr val="0072B2"/>
+                </a:solidFill>
+                <a:latin typeface="Arial"/>
+              </a:defRPr>
+            </a:pPr>
+            <a:r>
+              <a:t>Aplicar el plan y vigilar sus límites</a:t>
+            </a:r>
+          </a:p>
+        </p:txBody>
+      </p:sp>
+      <p:sp>
+        <p:nvSpPr>
+          <p:cNvPr id="3" name="Rounded Rectangle 2"/>
+          <p:cNvSpPr/>
+          <p:nvPr/>
+        </p:nvSpPr>
+        <p:spPr>
+          <a:xfrm>
+            <a:off x="822960" y="1371600"/>
+            <a:ext cx="10515600" cy="914400"/>
+          </a:xfrm>
+          <a:prstGeom prst="roundRect">
+            <a:avLst/>
+          </a:prstGeom>
           <a:solidFill>
-            <a:srgbClr val="DCEBF5"/>
+            <a:srgbClr val="F0F3F5"/>
           </a:solidFill>
           <a:ln>
-            <a:noFill/>
+            <a:solidFill>
+              <a:srgbClr val="D3E2EC"/>
+            </a:solidFill>
           </a:ln>
         </p:spPr>
         <p:style>
@@ -4585,107 +6530,41 @@
           <a:bodyPr rtlCol="0" anchor="ctr"/>
           <a:lstStyle/>
           <a:p>
-            <a:pPr algn="ctr"/>
-          </a:p>
-        </p:txBody>
-      </p:sp>
-      <p:sp>
-        <p:nvSpPr>
-          <p:cNvPr id="12" name="TextBox 11"/>
-          <p:cNvSpPr txBox="1"/>
+            <a:pPr>
+              <a:defRPr sz="1800">
+                <a:solidFill>
+                  <a:srgbClr val="333333"/>
+                </a:solidFill>
+                <a:latin typeface="Arial"/>
+              </a:defRPr>
+            </a:pPr>
+            <a:r>
+              <a:t>A012 es evaluación retrospectiva; ya influyó en el desarrollo inicial.</a:t>
+            </a:r>
+          </a:p>
+        </p:txBody>
+      </p:sp>
+      <p:sp>
+        <p:nvSpPr>
+          <p:cNvPr id="4" name="Rounded Rectangle 3"/>
+          <p:cNvSpPr/>
           <p:nvPr/>
         </p:nvSpPr>
         <p:spPr>
           <a:xfrm>
-            <a:off x="6355080" y="1874519"/>
-            <a:ext cx="2651760" cy="1097280"/>
+            <a:off x="822960" y="2606040"/>
+            <a:ext cx="10515600" cy="914400"/>
           </a:xfrm>
-          <a:prstGeom prst="rect">
-            <a:avLst/>
-          </a:prstGeom>
-          <a:noFill/>
-        </p:spPr>
-        <p:txBody>
-          <a:bodyPr wrap="square" lIns="45720" rIns="45720" anchor="ctr">
-            <a:spAutoFit/>
-          </a:bodyPr>
-          <a:lstStyle/>
-          <a:p>
-            <a:pPr algn="ctr">
-              <a:spcAft>
-                <a:spcPts val="600"/>
-              </a:spcAft>
-            </a:pPr>
-            <a:r>
-              <a:rPr sz="3200" b="1">
-                <a:solidFill>
-                  <a:srgbClr val="1F1F1F"/>
-                </a:solidFill>
-                <a:latin typeface="Arial"/>
-              </a:rPr>
-              <a:t>−0,1 %</a:t>
-            </a:r>
-          </a:p>
-        </p:txBody>
-      </p:sp>
-      <p:sp>
-        <p:nvSpPr>
-          <p:cNvPr id="13" name="TextBox 12"/>
-          <p:cNvSpPr txBox="1"/>
-          <p:nvPr/>
-        </p:nvSpPr>
-        <p:spPr>
-          <a:xfrm>
-            <a:off x="6355080" y="2926080"/>
-            <a:ext cx="2651760" cy="822960"/>
-          </a:xfrm>
-          <a:prstGeom prst="rect">
-            <a:avLst/>
-          </a:prstGeom>
-          <a:noFill/>
-        </p:spPr>
-        <p:txBody>
-          <a:bodyPr wrap="square" lIns="45720" rIns="45720">
-            <a:spAutoFit/>
-          </a:bodyPr>
-          <a:lstStyle/>
-          <a:p>
-            <a:pPr algn="ctr">
-              <a:spcAft>
-                <a:spcPts val="600"/>
-              </a:spcAft>
-            </a:pPr>
-            <a:r>
-              <a:rPr sz="2000" b="0">
-                <a:solidFill>
-                  <a:srgbClr val="1F1F1F"/>
-                </a:solidFill>
-                <a:latin typeface="Arial"/>
-              </a:rPr>
-              <a:t>Sin el lanzamiento de CSUV</a:t>
-            </a:r>
-          </a:p>
-        </p:txBody>
-      </p:sp>
-      <p:sp>
-        <p:nvSpPr>
-          <p:cNvPr id="14" name="Rectangle 13"/>
-          <p:cNvSpPr/>
-          <p:nvPr/>
-        </p:nvSpPr>
-        <p:spPr>
-          <a:xfrm>
-            <a:off x="9189720" y="1737360"/>
-            <a:ext cx="2651760" cy="2103120"/>
-          </a:xfrm>
-          <a:prstGeom prst="rect">
+          <a:prstGeom prst="roundRect">
             <a:avLst/>
           </a:prstGeom>
           <a:solidFill>
-            <a:srgbClr val="0072B2"/>
+            <a:srgbClr val="F0F3F5"/>
           </a:solidFill>
           <a:ln>
-            <a:noFill/>
+            <a:solidFill>
+              <a:srgbClr val="D3E2EC"/>
+            </a:solidFill>
           </a:ln>
         </p:spPr>
         <p:style>
@@ -4706,196 +6585,41 @@
           <a:bodyPr rtlCol="0" anchor="ctr"/>
           <a:lstStyle/>
           <a:p>
-            <a:pPr algn="ctr"/>
-          </a:p>
-        </p:txBody>
-      </p:sp>
-      <p:sp>
-        <p:nvSpPr>
-          <p:cNvPr id="15" name="TextBox 14"/>
-          <p:cNvSpPr txBox="1"/>
+            <a:pPr>
+              <a:defRPr sz="1800">
+                <a:solidFill>
+                  <a:srgbClr val="333333"/>
+                </a:solidFill>
+                <a:latin typeface="Arial"/>
+              </a:defRPr>
+            </a:pPr>
+            <a:r>
+              <a:t>CSUV tiene poca historia: cuota, lanzamiento e incertidumbre requieren sensibilidad.</a:t>
+            </a:r>
+          </a:p>
+        </p:txBody>
+      </p:sp>
+      <p:sp>
+        <p:nvSpPr>
+          <p:cNvPr id="5" name="Rounded Rectangle 4"/>
+          <p:cNvSpPr/>
           <p:nvPr/>
         </p:nvSpPr>
         <p:spPr>
           <a:xfrm>
-            <a:off x="9189720" y="1874519"/>
-            <a:ext cx="2651760" cy="1097280"/>
+            <a:off x="822960" y="3840480"/>
+            <a:ext cx="10515600" cy="914400"/>
           </a:xfrm>
-          <a:prstGeom prst="rect">
-            <a:avLst/>
-          </a:prstGeom>
-          <a:noFill/>
-        </p:spPr>
-        <p:txBody>
-          <a:bodyPr wrap="square" lIns="45720" rIns="45720" anchor="ctr">
-            <a:spAutoFit/>
-          </a:bodyPr>
-          <a:lstStyle/>
-          <a:p>
-            <a:pPr algn="ctr">
-              <a:spcAft>
-                <a:spcPts val="600"/>
-              </a:spcAft>
-            </a:pPr>
-            <a:r>
-              <a:rPr sz="3200" b="1">
-                <a:solidFill>
-                  <a:srgbClr val="FFFFFF"/>
-                </a:solidFill>
-                <a:latin typeface="Arial"/>
-              </a:rPr>
-              <a:t>−3,2 %</a:t>
-            </a:r>
-          </a:p>
-        </p:txBody>
-      </p:sp>
-      <p:sp>
-        <p:nvSpPr>
-          <p:cNvPr id="16" name="TextBox 15"/>
-          <p:cNvSpPr txBox="1"/>
-          <p:nvPr/>
-        </p:nvSpPr>
-        <p:spPr>
-          <a:xfrm>
-            <a:off x="9189720" y="2926080"/>
-            <a:ext cx="2651760" cy="822960"/>
-          </a:xfrm>
-          <a:prstGeom prst="rect">
-            <a:avLst/>
-          </a:prstGeom>
-          <a:noFill/>
-        </p:spPr>
-        <p:txBody>
-          <a:bodyPr wrap="square" lIns="45720" rIns="45720">
-            <a:spAutoFit/>
-          </a:bodyPr>
-          <a:lstStyle/>
-          <a:p>
-            <a:pPr algn="ctr">
-              <a:spcAft>
-                <a:spcPts val="600"/>
-              </a:spcAft>
-            </a:pPr>
-            <a:r>
-              <a:rPr sz="2000" b="0">
-                <a:solidFill>
-                  <a:srgbClr val="FFFFFF"/>
-                </a:solidFill>
-                <a:latin typeface="Arial"/>
-              </a:rPr>
-              <a:t>Sin compras adelantadas</a:t>
-            </a:r>
-          </a:p>
-        </p:txBody>
-      </p:sp>
-      <p:sp>
-        <p:nvSpPr>
-          <p:cNvPr id="17" name="TextBox 16"/>
-          <p:cNvSpPr txBox="1"/>
-          <p:nvPr/>
-        </p:nvSpPr>
-        <p:spPr>
-          <a:xfrm>
-            <a:off x="685800" y="4206240"/>
-            <a:ext cx="10789920" cy="2011680"/>
-          </a:xfrm>
-          <a:prstGeom prst="rect">
-            <a:avLst/>
-          </a:prstGeom>
-          <a:noFill/>
-        </p:spPr>
-        <p:txBody>
-          <a:bodyPr wrap="square" lIns="45720" rIns="45720">
-            <a:spAutoFit/>
-          </a:bodyPr>
-          <a:lstStyle/>
-          <a:p>
-            <a:pPr>
-              <a:spcAft>
-                <a:spcPts val="600"/>
-              </a:spcAft>
-            </a:pPr>
-            <a:r>
-              <a:rPr sz="2000" b="0">
-                <a:solidFill>
-                  <a:srgbClr val="1F1F1F"/>
-                </a:solidFill>
-                <a:latin typeface="Arial"/>
-              </a:rPr>
-              <a:t>Variación de la demanda de A012 respecto a A011. Según el adelanto estimado, la subyacente va de −6,2 % a −0,2 %.</a:t>
-            </a:r>
-          </a:p>
-          <a:p>
-            <a:pPr>
-              <a:spcAft>
-                <a:spcPts val="600"/>
-              </a:spcAft>
-            </a:pPr>
-            <a:r>
-              <a:rPr sz="2000" b="0">
-                <a:solidFill>
-                  <a:srgbClr val="1F1F1F"/>
-                </a:solidFill>
-                <a:latin typeface="Arial"/>
-              </a:rPr>
-              <a:t>Las automatriculaciones pasaron del 8,5 % al 10,7 % de las matriculaciones.</a:t>
-            </a:r>
-          </a:p>
-          <a:p>
-            <a:pPr>
-              <a:spcAft>
-                <a:spcPts val="600"/>
-              </a:spcAft>
-            </a:pPr>
-            <a:r>
-              <a:rPr sz="2000" b="0">
-                <a:solidFill>
-                  <a:srgbClr val="1F1F1F"/>
-                </a:solidFill>
-                <a:latin typeface="Arial"/>
-              </a:rPr>
-              <a:t>A013 no repite el adelanto de noviembre–diciembre y empieza con la caída posterior.</a:t>
-            </a:r>
-          </a:p>
-        </p:txBody>
-      </p:sp>
-    </p:spTree>
-  </p:cSld>
-  <p:clrMapOvr>
-    <a:masterClrMapping/>
-  </p:clrMapOvr>
-</p:sld>
-</file>
-
-<file path=ppt/slides/slide3.xml><?xml version="1.0" encoding="utf-8"?>
-<p:sld xmlns:a="http://schemas.openxmlformats.org/drawingml/2006/main" xmlns:p="http://schemas.openxmlformats.org/presentationml/2006/main" xmlns:r="http://schemas.openxmlformats.org/officeDocument/2006/relationships">
-  <p:cSld>
-    <p:spTree>
-      <p:nvGrpSpPr>
-        <p:cNvPr id="1" name=""/>
-        <p:cNvGrpSpPr/>
-        <p:nvPr/>
-      </p:nvGrpSpPr>
-      <p:grpSpPr/>
-      <p:sp>
-        <p:nvSpPr>
-          <p:cNvPr id="2" name="Rectangle 1"/>
-          <p:cNvSpPr/>
-          <p:nvPr/>
-        </p:nvSpPr>
-        <p:spPr>
-          <a:xfrm>
-            <a:off x="457200" y="411480"/>
-            <a:ext cx="109728" cy="822960"/>
-          </a:xfrm>
-          <a:prstGeom prst="rect">
+          <a:prstGeom prst="roundRect">
             <a:avLst/>
           </a:prstGeom>
           <a:solidFill>
-            <a:srgbClr val="0072B2"/>
+            <a:srgbClr val="F0F3F5"/>
           </a:solidFill>
           <a:ln>
-            <a:noFill/>
+            <a:solidFill>
+              <a:srgbClr val="D3E2EC"/>
+            </a:solidFill>
           </a:ln>
         </p:spPr>
         <p:style>
@@ -4916,3694 +6640,16 @@
           <a:bodyPr rtlCol="0" anchor="ctr"/>
           <a:lstStyle/>
           <a:p>
-            <a:pPr algn="ctr"/>
-          </a:p>
-        </p:txBody>
-      </p:sp>
-      <p:sp>
-        <p:nvSpPr>
-          <p:cNvPr id="3" name="TextBox 2"/>
-          <p:cNvSpPr txBox="1"/>
-          <p:nvPr/>
-        </p:nvSpPr>
-        <p:spPr>
-          <a:xfrm>
-            <a:off x="685800" y="320040"/>
-            <a:ext cx="10972800" cy="1005840"/>
-          </a:xfrm>
-          <a:prstGeom prst="rect">
-            <a:avLst/>
-          </a:prstGeom>
-          <a:noFill/>
-        </p:spPr>
-        <p:txBody>
-          <a:bodyPr wrap="square" lIns="45720" rIns="45720" anchor="ctr">
-            <a:spAutoFit/>
-          </a:bodyPr>
-          <a:lstStyle/>
-          <a:p>
             <a:pPr>
-              <a:spcAft>
-                <a:spcPts val="600"/>
-              </a:spcAft>
-            </a:pPr>
-            <a:r>
-              <a:rPr sz="2800" b="1">
+              <a:defRPr sz="1800">
                 <a:solidFill>
-                  <a:srgbClr val="1F1F1F"/>
+                  <a:srgbClr val="333333"/>
                 </a:solidFill>
                 <a:latin typeface="Arial"/>
-              </a:rPr>
-              <a:t>Demanda prevista de A013: unos 18.500 coches (−10,8 %)</a:t>
-            </a:r>
-          </a:p>
-        </p:txBody>
-      </p:sp>
-      <p:sp>
-        <p:nvSpPr>
-          <p:cNvPr id="4" name="TextBox 3"/>
-          <p:cNvSpPr txBox="1"/>
-          <p:nvPr/>
-        </p:nvSpPr>
-        <p:spPr>
-          <a:xfrm>
-            <a:off x="11155680" y="6400800"/>
-            <a:ext cx="731520" cy="320040"/>
-          </a:xfrm>
-          <a:prstGeom prst="rect">
-            <a:avLst/>
-          </a:prstGeom>
-          <a:noFill/>
-        </p:spPr>
-        <p:txBody>
-          <a:bodyPr wrap="square" lIns="45720" rIns="45720">
-            <a:spAutoFit/>
-          </a:bodyPr>
-          <a:lstStyle/>
-          <a:p>
-            <a:pPr algn="r">
-              <a:spcAft>
-                <a:spcPts val="600"/>
-              </a:spcAft>
+              </a:defRPr>
             </a:pPr>
             <a:r>
-              <a:rPr sz="1200" b="0">
-                <a:solidFill>
-                  <a:srgbClr val="555555"/>
-                </a:solidFill>
-                <a:latin typeface="Arial"/>
-              </a:rPr>
-              <a:t>3</a:t>
-            </a:r>
-          </a:p>
-        </p:txBody>
-      </p:sp>
-      <p:pic>
-        <p:nvPicPr>
-          <p:cNvPr id="5" name="Picture 4" descr="demanda_prevision_a013_segmento.png"/>
-          <p:cNvPicPr>
-            <a:picLocks noChangeAspect="1"/>
-          </p:cNvPicPr>
-          <p:nvPr/>
-        </p:nvPicPr>
-        <p:blipFill>
-          <a:blip r:embed="rId3"/>
-          <a:stretch>
-            <a:fillRect/>
-          </a:stretch>
-        </p:blipFill>
-        <p:spPr>
-          <a:xfrm>
-            <a:off x="457200" y="1554480"/>
-            <a:ext cx="7863840" cy="3862373"/>
-          </a:xfrm>
-          <a:prstGeom prst="rect">
-            <a:avLst/>
-          </a:prstGeom>
-        </p:spPr>
-      </p:pic>
-      <p:sp>
-        <p:nvSpPr>
-          <p:cNvPr id="6" name="TextBox 5"/>
-          <p:cNvSpPr txBox="1"/>
-          <p:nvPr/>
-        </p:nvSpPr>
-        <p:spPr>
-          <a:xfrm>
-            <a:off x="8503920" y="1645920"/>
-            <a:ext cx="3474720" cy="4572000"/>
-          </a:xfrm>
-          <a:prstGeom prst="rect">
-            <a:avLst/>
-          </a:prstGeom>
-          <a:noFill/>
-        </p:spPr>
-        <p:txBody>
-          <a:bodyPr wrap="square" lIns="45720" rIns="45720">
-            <a:spAutoFit/>
-          </a:bodyPr>
-          <a:lstStyle/>
-          <a:p>
-            <a:pPr>
-              <a:spcAft>
-                <a:spcPts val="1400"/>
-              </a:spcAft>
-            </a:pPr>
-            <a:r>
-              <a:rPr sz="2000" b="0">
-                <a:solidFill>
-                  <a:srgbClr val="1F1F1F"/>
-                </a:solidFill>
-                <a:latin typeface="Arial"/>
-              </a:rPr>
-              <a:t>−19,5 % sin CSUV.</a:t>
-            </a:r>
-          </a:p>
-          <a:p>
-            <a:pPr>
-              <a:spcAft>
-                <a:spcPts val="1400"/>
-              </a:spcAft>
-            </a:pPr>
-            <a:r>
-              <a:rPr sz="2000" b="0">
-                <a:solidFill>
-                  <a:srgbClr val="1F1F1F"/>
-                </a:solidFill>
-                <a:latin typeface="Arial"/>
-              </a:rPr>
-              <a:t>Sin adelanto, con caída posterior y con la confianza 19 puntos más baja.</a:t>
-            </a:r>
-          </a:p>
-          <a:p>
-            <a:pPr>
-              <a:spcAft>
-                <a:spcPts val="1400"/>
-              </a:spcAft>
-            </a:pPr>
-            <a:r>
-              <a:rPr sz="2000" b="0">
-                <a:solidFill>
-                  <a:srgbClr val="1F1F1F"/>
-                </a:solidFill>
-                <a:latin typeface="Arial"/>
-              </a:rPr>
-              <a:t>Error mensual del 13 % en el total; B, S y MD son poco fiables.</a:t>
-            </a:r>
-          </a:p>
-        </p:txBody>
-      </p:sp>
-      <p:sp>
-        <p:nvSpPr>
-          <p:cNvPr id="7" name="TextBox 6"/>
-          <p:cNvSpPr txBox="1"/>
-          <p:nvPr/>
-        </p:nvSpPr>
-        <p:spPr>
-          <a:xfrm>
-            <a:off x="457200" y="5989320"/>
-            <a:ext cx="7863840" cy="457200"/>
-          </a:xfrm>
-          <a:prstGeom prst="rect">
-            <a:avLst/>
-          </a:prstGeom>
-          <a:noFill/>
-        </p:spPr>
-        <p:txBody>
-          <a:bodyPr wrap="square" lIns="45720" rIns="45720">
-            <a:spAutoFit/>
-          </a:bodyPr>
-          <a:lstStyle/>
-          <a:p>
-            <a:pPr>
-              <a:spcAft>
-                <a:spcPts val="600"/>
-              </a:spcAft>
-            </a:pPr>
-            <a:r>
-              <a:rPr sz="1400" b="0">
-                <a:solidFill>
-                  <a:srgbClr val="555555"/>
-                </a:solidFill>
-                <a:latin typeface="Arial"/>
-              </a:rPr>
-              <a:t>Banda: rango de error de validación (P10–P90). Fuente: prevision_demanda_a013.csv.</a:t>
-            </a:r>
-          </a:p>
-        </p:txBody>
-      </p:sp>
-    </p:spTree>
-  </p:cSld>
-  <p:clrMapOvr>
-    <a:masterClrMapping/>
-  </p:clrMapOvr>
-</p:sld>
-</file>
-
-<file path=ppt/slides/slide4.xml><?xml version="1.0" encoding="utf-8"?>
-<p:sld xmlns:a="http://schemas.openxmlformats.org/drawingml/2006/main" xmlns:p="http://schemas.openxmlformats.org/presentationml/2006/main" xmlns:r="http://schemas.openxmlformats.org/officeDocument/2006/relationships">
-  <p:cSld>
-    <p:spTree>
-      <p:nvGrpSpPr>
-        <p:cNvPr id="1" name=""/>
-        <p:cNvGrpSpPr/>
-        <p:nvPr/>
-      </p:nvGrpSpPr>
-      <p:grpSpPr/>
-      <p:sp>
-        <p:nvSpPr>
-          <p:cNvPr id="2" name="Rectangle 1"/>
-          <p:cNvSpPr/>
-          <p:nvPr/>
-        </p:nvSpPr>
-        <p:spPr>
-          <a:xfrm>
-            <a:off x="457200" y="411480"/>
-            <a:ext cx="109728" cy="822960"/>
-          </a:xfrm>
-          <a:prstGeom prst="rect">
-            <a:avLst/>
-          </a:prstGeom>
-          <a:solidFill>
-            <a:srgbClr val="0072B2"/>
-          </a:solidFill>
-          <a:ln>
-            <a:noFill/>
-          </a:ln>
-        </p:spPr>
-        <p:style>
-          <a:lnRef idx="1">
-            <a:schemeClr val="accent1"/>
-          </a:lnRef>
-          <a:fillRef idx="3">
-            <a:schemeClr val="accent1"/>
-          </a:fillRef>
-          <a:effectRef idx="2">
-            <a:schemeClr val="accent1"/>
-          </a:effectRef>
-          <a:fontRef idx="minor">
-            <a:schemeClr val="lt1"/>
-          </a:fontRef>
-        </p:style>
-        <p:txBody>
-          <a:bodyPr rtlCol="0" anchor="ctr"/>
-          <a:lstStyle/>
-          <a:p>
-            <a:pPr algn="ctr"/>
-          </a:p>
-        </p:txBody>
-      </p:sp>
-      <p:sp>
-        <p:nvSpPr>
-          <p:cNvPr id="3" name="TextBox 2"/>
-          <p:cNvSpPr txBox="1"/>
-          <p:nvPr/>
-        </p:nvSpPr>
-        <p:spPr>
-          <a:xfrm>
-            <a:off x="685800" y="320040"/>
-            <a:ext cx="10972800" cy="1005840"/>
-          </a:xfrm>
-          <a:prstGeom prst="rect">
-            <a:avLst/>
-          </a:prstGeom>
-          <a:noFill/>
-        </p:spPr>
-        <p:txBody>
-          <a:bodyPr wrap="square" lIns="45720" rIns="45720" anchor="ctr">
-            <a:spAutoFit/>
-          </a:bodyPr>
-          <a:lstStyle/>
-          <a:p>
-            <a:pPr>
-              <a:spcAft>
-                <a:spcPts val="600"/>
-              </a:spcAft>
-            </a:pPr>
-            <a:r>
-              <a:rPr sz="2800" b="1">
-                <a:solidFill>
-                  <a:srgbClr val="1F1F1F"/>
-                </a:solidFill>
-                <a:latin typeface="Arial"/>
-              </a:rPr>
-              <a:t>Tres escenarios traducen la tabla 4 a parámetros del modelo</a:t>
-            </a:r>
-          </a:p>
-        </p:txBody>
-      </p:sp>
-      <p:sp>
-        <p:nvSpPr>
-          <p:cNvPr id="4" name="TextBox 3"/>
-          <p:cNvSpPr txBox="1"/>
-          <p:nvPr/>
-        </p:nvSpPr>
-        <p:spPr>
-          <a:xfrm>
-            <a:off x="11155680" y="6400800"/>
-            <a:ext cx="731520" cy="320040"/>
-          </a:xfrm>
-          <a:prstGeom prst="rect">
-            <a:avLst/>
-          </a:prstGeom>
-          <a:noFill/>
-        </p:spPr>
-        <p:txBody>
-          <a:bodyPr wrap="square" lIns="45720" rIns="45720">
-            <a:spAutoFit/>
-          </a:bodyPr>
-          <a:lstStyle/>
-          <a:p>
-            <a:pPr algn="r">
-              <a:spcAft>
-                <a:spcPts val="600"/>
-              </a:spcAft>
-            </a:pPr>
-            <a:r>
-              <a:rPr sz="1200" b="0">
-                <a:solidFill>
-                  <a:srgbClr val="555555"/>
-                </a:solidFill>
-                <a:latin typeface="Arial"/>
-              </a:rPr>
-              <a:t>4</a:t>
-            </a:r>
-          </a:p>
-        </p:txBody>
-      </p:sp>
-      <p:graphicFrame>
-        <p:nvGraphicFramePr>
-          <p:cNvPr id="5" name="Table 4"/>
-          <p:cNvGraphicFramePr>
-            <a:graphicFrameLocks noGrp="1"/>
-          </p:cNvGraphicFramePr>
-          <p:nvPr/>
-        </p:nvGraphicFramePr>
-        <p:xfrm>
-          <a:off x="685800" y="1600200"/>
-          <a:ext cx="10789920" cy="3657600"/>
-        </p:xfrm>
-        <a:graphic>
-          <a:graphicData uri="http://schemas.openxmlformats.org/drawingml/2006/table">
-            <a:tbl>
-              <a:tblPr firstRow="0" bandRow="0">
-                <a:tableStyleId>{5C22544A-7EE6-4342-B048-85BDC9FD1C3A}</a:tableStyleId>
-              </a:tblPr>
-              <a:tblGrid>
-                <a:gridCol w="3474720"/>
-                <a:gridCol w="2926080"/>
-                <a:gridCol w="1645920"/>
-                <a:gridCol w="2743200"/>
-              </a:tblGrid>
-              <a:tr h="457200">
-                <a:tc>
-                  <a:txBody>
-                    <a:bodyPr wrap="square"/>
-                    <a:lstStyle/>
-                    <a:p>
-                      <a:pPr algn="l"/>
-                      <a:r>
-                        <a:rPr sz="1600" b="1">
-                          <a:solidFill>
-                            <a:srgbClr val="1F1F1F"/>
-                          </a:solidFill>
-                          <a:latin typeface="Arial"/>
-                        </a:rPr>
-                        <a:t>Parámetro</a:t>
-                      </a:r>
-                    </a:p>
-                  </a:txBody>
-                  <a:tcPr marL="73152" marR="73152" marT="27432" marB="27432" anchor="ctr">
-                    <a:solidFill>
-                      <a:srgbClr val="DCEBF5"/>
-                    </a:solidFill>
-                  </a:tcPr>
-                </a:tc>
-                <a:tc>
-                  <a:txBody>
-                    <a:bodyPr wrap="square"/>
-                    <a:lstStyle/>
-                    <a:p>
-                      <a:pPr algn="r"/>
-                      <a:r>
-                        <a:rPr sz="1600" b="1">
-                          <a:solidFill>
-                            <a:srgbClr val="1F1F1F"/>
-                          </a:solidFill>
-                          <a:latin typeface="Arial"/>
-                        </a:rPr>
-                        <a:t>Pesimista</a:t>
-                      </a:r>
-                    </a:p>
-                  </a:txBody>
-                  <a:tcPr marL="73152" marR="73152" marT="27432" marB="27432" anchor="ctr">
-                    <a:solidFill>
-                      <a:srgbClr val="DCEBF5"/>
-                    </a:solidFill>
-                  </a:tcPr>
-                </a:tc>
-                <a:tc>
-                  <a:txBody>
-                    <a:bodyPr wrap="square"/>
-                    <a:lstStyle/>
-                    <a:p>
-                      <a:pPr algn="r"/>
-                      <a:r>
-                        <a:rPr sz="1600" b="1">
-                          <a:solidFill>
-                            <a:srgbClr val="1F1F1F"/>
-                          </a:solidFill>
-                          <a:latin typeface="Arial"/>
-                        </a:rPr>
-                        <a:t>Central</a:t>
-                      </a:r>
-                    </a:p>
-                  </a:txBody>
-                  <a:tcPr marL="73152" marR="73152" marT="27432" marB="27432" anchor="ctr">
-                    <a:solidFill>
-                      <a:srgbClr val="DCEBF5"/>
-                    </a:solidFill>
-                  </a:tcPr>
-                </a:tc>
-                <a:tc>
-                  <a:txBody>
-                    <a:bodyPr wrap="square"/>
-                    <a:lstStyle/>
-                    <a:p>
-                      <a:pPr algn="r"/>
-                      <a:r>
-                        <a:rPr sz="1600" b="1">
-                          <a:solidFill>
-                            <a:srgbClr val="1F1F1F"/>
-                          </a:solidFill>
-                          <a:latin typeface="Arial"/>
-                        </a:rPr>
-                        <a:t>Optimista</a:t>
-                      </a:r>
-                    </a:p>
-                  </a:txBody>
-                  <a:tcPr marL="73152" marR="73152" marT="27432" marB="27432" anchor="ctr">
-                    <a:solidFill>
-                      <a:srgbClr val="DCEBF5"/>
-                    </a:solidFill>
-                  </a:tcPr>
-                </a:tc>
-              </a:tr>
-              <a:tr h="457200">
-                <a:tc>
-                  <a:txBody>
-                    <a:bodyPr wrap="square"/>
-                    <a:lstStyle/>
-                    <a:p>
-                      <a:pPr algn="l"/>
-                      <a:r>
-                        <a:rPr sz="1600" b="0">
-                          <a:solidFill>
-                            <a:srgbClr val="1F1F1F"/>
-                          </a:solidFill>
-                          <a:latin typeface="Arial"/>
-                        </a:rPr>
-                        <a:t>Confianza desde enero</a:t>
-                      </a:r>
-                    </a:p>
-                  </a:txBody>
-                  <a:tcPr marL="73152" marR="73152" marT="27432" marB="27432" anchor="ctr">
-                    <a:solidFill>
-                      <a:srgbClr val="FFFFFF"/>
-                    </a:solidFill>
-                  </a:tcPr>
-                </a:tc>
-                <a:tc>
-                  <a:txBody>
-                    <a:bodyPr wrap="square"/>
-                    <a:lstStyle/>
-                    <a:p>
-                      <a:pPr algn="r"/>
-                      <a:r>
-                        <a:rPr sz="1600" b="0">
-                          <a:solidFill>
-                            <a:srgbClr val="1F1F1F"/>
-                          </a:solidFill>
-                          <a:latin typeface="Arial"/>
-                        </a:rPr>
-                        <a:t>61,4</a:t>
-                      </a:r>
-                    </a:p>
-                  </a:txBody>
-                  <a:tcPr marL="73152" marR="73152" marT="27432" marB="27432" anchor="ctr">
-                    <a:solidFill>
-                      <a:srgbClr val="FFFFFF"/>
-                    </a:solidFill>
-                  </a:tcPr>
-                </a:tc>
-                <a:tc>
-                  <a:txBody>
-                    <a:bodyPr wrap="square"/>
-                    <a:lstStyle/>
-                    <a:p>
-                      <a:pPr algn="r"/>
-                      <a:r>
-                        <a:rPr sz="1600" b="0">
-                          <a:solidFill>
-                            <a:srgbClr val="1F1F1F"/>
-                          </a:solidFill>
-                          <a:latin typeface="Arial"/>
-                        </a:rPr>
-                        <a:t>77,7</a:t>
-                      </a:r>
-                    </a:p>
-                  </a:txBody>
-                  <a:tcPr marL="73152" marR="73152" marT="27432" marB="27432" anchor="ctr">
-                    <a:solidFill>
-                      <a:srgbClr val="FFFFFF"/>
-                    </a:solidFill>
-                  </a:tcPr>
-                </a:tc>
-                <a:tc>
-                  <a:txBody>
-                    <a:bodyPr wrap="square"/>
-                    <a:lstStyle/>
-                    <a:p>
-                      <a:pPr algn="r"/>
-                      <a:r>
-                        <a:rPr sz="1600" b="0">
-                          <a:solidFill>
-                            <a:srgbClr val="1F1F1F"/>
-                          </a:solidFill>
-                          <a:latin typeface="Arial"/>
-                        </a:rPr>
-                        <a:t>96,8</a:t>
-                      </a:r>
-                    </a:p>
-                  </a:txBody>
-                  <a:tcPr marL="73152" marR="73152" marT="27432" marB="27432" anchor="ctr">
-                    <a:solidFill>
-                      <a:srgbClr val="FFFFFF"/>
-                    </a:solidFill>
-                  </a:tcPr>
-                </a:tc>
-              </a:tr>
-              <a:tr h="457200">
-                <a:tc>
-                  <a:txBody>
-                    <a:bodyPr wrap="square"/>
-                    <a:lstStyle/>
-                    <a:p>
-                      <a:pPr algn="l"/>
-                      <a:r>
-                        <a:rPr sz="1600" b="0">
-                          <a:solidFill>
-                            <a:srgbClr val="1F1F1F"/>
-                          </a:solidFill>
-                          <a:latin typeface="Arial"/>
-                        </a:rPr>
-                        <a:t>Caída tras el adelanto</a:t>
-                      </a:r>
-                    </a:p>
-                  </a:txBody>
-                  <a:tcPr marL="73152" marR="73152" marT="27432" marB="27432" anchor="ctr">
-                    <a:solidFill>
-                      <a:srgbClr val="FFFFFF"/>
-                    </a:solidFill>
-                  </a:tcPr>
-                </a:tc>
-                <a:tc>
-                  <a:txBody>
-                    <a:bodyPr wrap="square"/>
-                    <a:lstStyle/>
-                    <a:p>
-                      <a:pPr algn="r"/>
-                      <a:r>
-                        <a:rPr sz="1600" b="0">
-                          <a:solidFill>
-                            <a:srgbClr val="1F1F1F"/>
-                          </a:solidFill>
-                          <a:latin typeface="Arial"/>
-                        </a:rPr>
-                        <a:t>6 meses</a:t>
-                      </a:r>
-                    </a:p>
-                  </a:txBody>
-                  <a:tcPr marL="73152" marR="73152" marT="27432" marB="27432" anchor="ctr">
-                    <a:solidFill>
-                      <a:srgbClr val="FFFFFF"/>
-                    </a:solidFill>
-                  </a:tcPr>
-                </a:tc>
-                <a:tc>
-                  <a:txBody>
-                    <a:bodyPr wrap="square"/>
-                    <a:lstStyle/>
-                    <a:p>
-                      <a:pPr algn="r"/>
-                      <a:r>
-                        <a:rPr sz="1600" b="0">
-                          <a:solidFill>
-                            <a:srgbClr val="1F1F1F"/>
-                          </a:solidFill>
-                          <a:latin typeface="Arial"/>
-                        </a:rPr>
-                        <a:t>3 meses</a:t>
-                      </a:r>
-                    </a:p>
-                  </a:txBody>
-                  <a:tcPr marL="73152" marR="73152" marT="27432" marB="27432" anchor="ctr">
-                    <a:solidFill>
-                      <a:srgbClr val="FFFFFF"/>
-                    </a:solidFill>
-                  </a:tcPr>
-                </a:tc>
-                <a:tc>
-                  <a:txBody>
-                    <a:bodyPr wrap="square"/>
-                    <a:lstStyle/>
-                    <a:p>
-                      <a:pPr algn="r"/>
-                      <a:r>
-                        <a:rPr sz="1600" b="0">
-                          <a:solidFill>
-                            <a:srgbClr val="1F1F1F"/>
-                          </a:solidFill>
-                          <a:latin typeface="Arial"/>
-                        </a:rPr>
-                        <a:t>1 mes</a:t>
-                      </a:r>
-                    </a:p>
-                  </a:txBody>
-                  <a:tcPr marL="73152" marR="73152" marT="27432" marB="27432" anchor="ctr">
-                    <a:solidFill>
-                      <a:srgbClr val="FFFFFF"/>
-                    </a:solidFill>
-                  </a:tcPr>
-                </a:tc>
-              </a:tr>
-              <a:tr h="457200">
-                <a:tc>
-                  <a:txBody>
-                    <a:bodyPr wrap="square"/>
-                    <a:lstStyle/>
-                    <a:p>
-                      <a:pPr algn="l"/>
-                      <a:r>
-                        <a:rPr sz="1600" b="0">
-                          <a:solidFill>
-                            <a:srgbClr val="1F1F1F"/>
-                          </a:solidFill>
-                          <a:latin typeface="Arial"/>
-                        </a:rPr>
-                        <a:t>Plan de ayuda</a:t>
-                      </a:r>
-                    </a:p>
-                  </a:txBody>
-                  <a:tcPr marL="73152" marR="73152" marT="27432" marB="27432" anchor="ctr">
-                    <a:solidFill>
-                      <a:srgbClr val="FFFFFF"/>
-                    </a:solidFill>
-                  </a:tcPr>
-                </a:tc>
-                <a:tc>
-                  <a:txBody>
-                    <a:bodyPr wrap="square"/>
-                    <a:lstStyle/>
-                    <a:p>
-                      <a:pPr algn="r"/>
-                      <a:r>
-                        <a:rPr sz="1600" b="0">
-                          <a:solidFill>
-                            <a:srgbClr val="1F1F1F"/>
-                          </a:solidFill>
-                          <a:latin typeface="Arial"/>
-                        </a:rPr>
-                        <a:t>—</a:t>
-                      </a:r>
-                    </a:p>
-                  </a:txBody>
-                  <a:tcPr marL="73152" marR="73152" marT="27432" marB="27432" anchor="ctr">
-                    <a:solidFill>
-                      <a:srgbClr val="FFFFFF"/>
-                    </a:solidFill>
-                  </a:tcPr>
-                </a:tc>
-                <a:tc>
-                  <a:txBody>
-                    <a:bodyPr wrap="square"/>
-                    <a:lstStyle/>
-                    <a:p>
-                      <a:pPr algn="r"/>
-                      <a:r>
-                        <a:rPr sz="1600" b="0">
-                          <a:solidFill>
-                            <a:srgbClr val="1F1F1F"/>
-                          </a:solidFill>
-                          <a:latin typeface="Arial"/>
-                        </a:rPr>
-                        <a:t>—</a:t>
-                      </a:r>
-                    </a:p>
-                  </a:txBody>
-                  <a:tcPr marL="73152" marR="73152" marT="27432" marB="27432" anchor="ctr">
-                    <a:solidFill>
-                      <a:srgbClr val="FFFFFF"/>
-                    </a:solidFill>
-                  </a:tcPr>
-                </a:tc>
-                <a:tc>
-                  <a:txBody>
-                    <a:bodyPr wrap="square"/>
-                    <a:lstStyle/>
-                    <a:p>
-                      <a:pPr algn="r"/>
-                      <a:r>
-                        <a:rPr sz="1600" b="0">
-                          <a:solidFill>
-                            <a:srgbClr val="1F1F1F"/>
-                          </a:solidFill>
-                          <a:latin typeface="Arial"/>
-                        </a:rPr>
-                        <a:t>abril–dic.</a:t>
-                      </a:r>
-                    </a:p>
-                  </a:txBody>
-                  <a:tcPr marL="73152" marR="73152" marT="27432" marB="27432" anchor="ctr">
-                    <a:solidFill>
-                      <a:srgbClr val="FFFFFF"/>
-                    </a:solidFill>
-                  </a:tcPr>
-                </a:tc>
-              </a:tr>
-              <a:tr h="457200">
-                <a:tc>
-                  <a:txBody>
-                    <a:bodyPr wrap="square"/>
-                    <a:lstStyle/>
-                    <a:p>
-                      <a:pPr algn="l"/>
-                      <a:r>
-                        <a:rPr sz="1600" b="0">
-                          <a:solidFill>
-                            <a:srgbClr val="1F1F1F"/>
-                          </a:solidFill>
-                          <a:latin typeface="Arial"/>
-                        </a:rPr>
-                        <a:t>Prima de CO2</a:t>
-                      </a:r>
-                    </a:p>
-                  </a:txBody>
-                  <a:tcPr marL="73152" marR="73152" marT="27432" marB="27432" anchor="ctr">
-                    <a:solidFill>
-                      <a:srgbClr val="FFFFFF"/>
-                    </a:solidFill>
-                  </a:tcPr>
-                </a:tc>
-                <a:tc>
-                  <a:txBody>
-                    <a:bodyPr wrap="square"/>
-                    <a:lstStyle/>
-                    <a:p>
-                      <a:pPr algn="r"/>
-                      <a:r>
-                        <a:rPr sz="1600" b="0">
-                          <a:solidFill>
-                            <a:srgbClr val="1F1F1F"/>
-                          </a:solidFill>
-                          <a:latin typeface="Arial"/>
-                        </a:rPr>
-                        <a:t>47 M€</a:t>
-                      </a:r>
-                    </a:p>
-                  </a:txBody>
-                  <a:tcPr marL="73152" marR="73152" marT="27432" marB="27432" anchor="ctr">
-                    <a:solidFill>
-                      <a:srgbClr val="FFFFFF"/>
-                    </a:solidFill>
-                  </a:tcPr>
-                </a:tc>
-                <a:tc>
-                  <a:txBody>
-                    <a:bodyPr wrap="square"/>
-                    <a:lstStyle/>
-                    <a:p>
-                      <a:pPr algn="r"/>
-                      <a:r>
-                        <a:rPr sz="1600" b="0">
-                          <a:solidFill>
-                            <a:srgbClr val="1F1F1F"/>
-                          </a:solidFill>
-                          <a:latin typeface="Arial"/>
-                        </a:rPr>
-                        <a:t>—</a:t>
-                      </a:r>
-                    </a:p>
-                  </a:txBody>
-                  <a:tcPr marL="73152" marR="73152" marT="27432" marB="27432" anchor="ctr">
-                    <a:solidFill>
-                      <a:srgbClr val="FFFFFF"/>
-                    </a:solidFill>
-                  </a:tcPr>
-                </a:tc>
-                <a:tc>
-                  <a:txBody>
-                    <a:bodyPr wrap="square"/>
-                    <a:lstStyle/>
-                    <a:p>
-                      <a:pPr algn="r"/>
-                      <a:r>
-                        <a:rPr sz="1600" b="0">
-                          <a:solidFill>
-                            <a:srgbClr val="1F1F1F"/>
-                          </a:solidFill>
-                          <a:latin typeface="Arial"/>
-                        </a:rPr>
-                        <a:t>—</a:t>
-                      </a:r>
-                    </a:p>
-                  </a:txBody>
-                  <a:tcPr marL="73152" marR="73152" marT="27432" marB="27432" anchor="ctr">
-                    <a:solidFill>
-                      <a:srgbClr val="FFFFFF"/>
-                    </a:solidFill>
-                  </a:tcPr>
-                </a:tc>
-              </a:tr>
-              <a:tr h="457200">
-                <a:tc>
-                  <a:txBody>
-                    <a:bodyPr wrap="square"/>
-                    <a:lstStyle/>
-                    <a:p>
-                      <a:pPr algn="l"/>
-                      <a:r>
-                        <a:rPr sz="1600" b="0">
-                          <a:solidFill>
-                            <a:srgbClr val="1F1F1F"/>
-                          </a:solidFill>
-                          <a:latin typeface="Arial"/>
-                        </a:rPr>
-                        <a:t>Cuota de códigos nuevos</a:t>
-                      </a:r>
-                    </a:p>
-                  </a:txBody>
-                  <a:tcPr marL="73152" marR="73152" marT="27432" marB="27432" anchor="ctr">
-                    <a:solidFill>
-                      <a:srgbClr val="FFFFFF"/>
-                    </a:solidFill>
-                  </a:tcPr>
-                </a:tc>
-                <a:tc>
-                  <a:txBody>
-                    <a:bodyPr wrap="square"/>
-                    <a:lstStyle/>
-                    <a:p>
-                      <a:pPr algn="r"/>
-                      <a:r>
-                        <a:rPr sz="1600" b="0">
-                          <a:solidFill>
-                            <a:srgbClr val="1F1F1F"/>
-                          </a:solidFill>
-                          <a:latin typeface="Arial"/>
-                        </a:rPr>
-                        <a:t>MSUV −11 % (3 meses)</a:t>
-                      </a:r>
-                    </a:p>
-                  </a:txBody>
-                  <a:tcPr marL="73152" marR="73152" marT="27432" marB="27432" anchor="ctr">
-                    <a:solidFill>
-                      <a:srgbClr val="FFFFFF"/>
-                    </a:solidFill>
-                  </a:tcPr>
-                </a:tc>
-                <a:tc>
-                  <a:txBody>
-                    <a:bodyPr wrap="square"/>
-                    <a:lstStyle/>
-                    <a:p>
-                      <a:pPr algn="r"/>
-                      <a:r>
-                        <a:rPr sz="1600" b="0">
-                          <a:solidFill>
-                            <a:srgbClr val="1F1F1F"/>
-                          </a:solidFill>
-                          <a:latin typeface="Arial"/>
-                        </a:rPr>
-                        <a:t>—</a:t>
-                      </a:r>
-                    </a:p>
-                  </a:txBody>
-                  <a:tcPr marL="73152" marR="73152" marT="27432" marB="27432" anchor="ctr">
-                    <a:solidFill>
-                      <a:srgbClr val="FFFFFF"/>
-                    </a:solidFill>
-                  </a:tcPr>
-                </a:tc>
-                <a:tc>
-                  <a:txBody>
-                    <a:bodyPr wrap="square"/>
-                    <a:lstStyle/>
-                    <a:p>
-                      <a:pPr algn="r"/>
-                      <a:r>
-                        <a:rPr sz="1600" b="0">
-                          <a:solidFill>
-                            <a:srgbClr val="1F1F1F"/>
-                          </a:solidFill>
-                          <a:latin typeface="Arial"/>
-                        </a:rPr>
-                        <a:t>+11 % en 4 segmentos</a:t>
-                      </a:r>
-                    </a:p>
-                  </a:txBody>
-                  <a:tcPr marL="73152" marR="73152" marT="27432" marB="27432" anchor="ctr">
-                    <a:solidFill>
-                      <a:srgbClr val="FFFFFF"/>
-                    </a:solidFill>
-                  </a:tcPr>
-                </a:tc>
-              </a:tr>
-              <a:tr h="457200">
-                <a:tc>
-                  <a:txBody>
-                    <a:bodyPr wrap="square"/>
-                    <a:lstStyle/>
-                    <a:p>
-                      <a:pPr algn="l"/>
-                      <a:r>
-                        <a:rPr sz="1600" b="0">
-                          <a:solidFill>
-                            <a:srgbClr val="1F1F1F"/>
-                          </a:solidFill>
-                          <a:latin typeface="Arial"/>
-                        </a:rPr>
-                        <a:t>Alquiladores</a:t>
-                      </a:r>
-                    </a:p>
-                  </a:txBody>
-                  <a:tcPr marL="73152" marR="73152" marT="27432" marB="27432" anchor="ctr">
-                    <a:solidFill>
-                      <a:srgbClr val="FFFFFF"/>
-                    </a:solidFill>
-                  </a:tcPr>
-                </a:tc>
-                <a:tc>
-                  <a:txBody>
-                    <a:bodyPr wrap="square"/>
-                    <a:lstStyle/>
-                    <a:p>
-                      <a:pPr algn="r"/>
-                      <a:r>
-                        <a:rPr sz="1600" b="0">
-                          <a:solidFill>
-                            <a:srgbClr val="1F1F1F"/>
-                          </a:solidFill>
-                          <a:latin typeface="Arial"/>
-                        </a:rPr>
-                        <a:t>−24 %</a:t>
-                      </a:r>
-                    </a:p>
-                  </a:txBody>
-                  <a:tcPr marL="73152" marR="73152" marT="27432" marB="27432" anchor="ctr">
-                    <a:solidFill>
-                      <a:srgbClr val="FFFFFF"/>
-                    </a:solidFill>
-                  </a:tcPr>
-                </a:tc>
-                <a:tc>
-                  <a:txBody>
-                    <a:bodyPr wrap="square"/>
-                    <a:lstStyle/>
-                    <a:p>
-                      <a:pPr algn="r"/>
-                      <a:r>
-                        <a:rPr sz="1600" b="0">
-                          <a:solidFill>
-                            <a:srgbClr val="1F1F1F"/>
-                          </a:solidFill>
-                          <a:latin typeface="Arial"/>
-                        </a:rPr>
-                        <a:t>—</a:t>
-                      </a:r>
-                    </a:p>
-                  </a:txBody>
-                  <a:tcPr marL="73152" marR="73152" marT="27432" marB="27432" anchor="ctr">
-                    <a:solidFill>
-                      <a:srgbClr val="FFFFFF"/>
-                    </a:solidFill>
-                  </a:tcPr>
-                </a:tc>
-                <a:tc>
-                  <a:txBody>
-                    <a:bodyPr wrap="square"/>
-                    <a:lstStyle/>
-                    <a:p>
-                      <a:pPr algn="r"/>
-                      <a:r>
-                        <a:rPr sz="1600" b="0">
-                          <a:solidFill>
-                            <a:srgbClr val="1F1F1F"/>
-                          </a:solidFill>
-                          <a:latin typeface="Arial"/>
-                        </a:rPr>
-                        <a:t>+24 %</a:t>
-                      </a:r>
-                    </a:p>
-                  </a:txBody>
-                  <a:tcPr marL="73152" marR="73152" marT="27432" marB="27432" anchor="ctr">
-                    <a:solidFill>
-                      <a:srgbClr val="FFFFFF"/>
-                    </a:solidFill>
-                  </a:tcPr>
-                </a:tc>
-              </a:tr>
-              <a:tr h="457200">
-                <a:tc>
-                  <a:txBody>
-                    <a:bodyPr wrap="square"/>
-                    <a:lstStyle/>
-                    <a:p>
-                      <a:pPr algn="l"/>
-                      <a:r>
-                        <a:rPr sz="1600" b="0">
-                          <a:solidFill>
-                            <a:srgbClr val="1F1F1F"/>
-                          </a:solidFill>
-                          <a:latin typeface="Arial"/>
-                        </a:rPr>
-                        <a:t>Suministro</a:t>
-                      </a:r>
-                    </a:p>
-                  </a:txBody>
-                  <a:tcPr marL="73152" marR="73152" marT="27432" marB="27432" anchor="ctr">
-                    <a:solidFill>
-                      <a:srgbClr val="FFFFFF"/>
-                    </a:solidFill>
-                  </a:tcPr>
-                </a:tc>
-                <a:tc>
-                  <a:txBody>
-                    <a:bodyPr wrap="square"/>
-                    <a:lstStyle/>
-                    <a:p>
-                      <a:pPr algn="r"/>
-                      <a:r>
-                        <a:rPr sz="1600" b="0">
-                          <a:solidFill>
-                            <a:srgbClr val="1F1F1F"/>
-                          </a:solidFill>
-                          <a:latin typeface="Arial"/>
-                        </a:rPr>
-                        <a:t>MSUV sin llegadas en junio</a:t>
-                      </a:r>
-                    </a:p>
-                  </a:txBody>
-                  <a:tcPr marL="73152" marR="73152" marT="27432" marB="27432" anchor="ctr">
-                    <a:solidFill>
-                      <a:srgbClr val="FFFFFF"/>
-                    </a:solidFill>
-                  </a:tcPr>
-                </a:tc>
-                <a:tc>
-                  <a:txBody>
-                    <a:bodyPr wrap="square"/>
-                    <a:lstStyle/>
-                    <a:p>
-                      <a:pPr algn="r"/>
-                      <a:r>
-                        <a:rPr sz="1600" b="0">
-                          <a:solidFill>
-                            <a:srgbClr val="1F1F1F"/>
-                          </a:solidFill>
-                          <a:latin typeface="Arial"/>
-                        </a:rPr>
-                        <a:t>—</a:t>
-                      </a:r>
-                    </a:p>
-                  </a:txBody>
-                  <a:tcPr marL="73152" marR="73152" marT="27432" marB="27432" anchor="ctr">
-                    <a:solidFill>
-                      <a:srgbClr val="FFFFFF"/>
-                    </a:solidFill>
-                  </a:tcPr>
-                </a:tc>
-                <a:tc>
-                  <a:txBody>
-                    <a:bodyPr wrap="square"/>
-                    <a:lstStyle/>
-                    <a:p>
-                      <a:pPr algn="r"/>
-                      <a:r>
-                        <a:rPr sz="1600" b="0">
-                          <a:solidFill>
-                            <a:srgbClr val="1F1F1F"/>
-                          </a:solidFill>
-                          <a:latin typeface="Arial"/>
-                        </a:rPr>
-                        <a:t>—</a:t>
-                      </a:r>
-                    </a:p>
-                  </a:txBody>
-                  <a:tcPr marL="73152" marR="73152" marT="27432" marB="27432" anchor="ctr">
-                    <a:solidFill>
-                      <a:srgbClr val="FFFFFF"/>
-                    </a:solidFill>
-                  </a:tcPr>
-                </a:tc>
-              </a:tr>
-            </a:tbl>
-          </a:graphicData>
-        </a:graphic>
-      </p:graphicFrame>
-      <p:sp>
-        <p:nvSpPr>
-          <p:cNvPr id="6" name="TextBox 5"/>
-          <p:cNvSpPr txBox="1"/>
-          <p:nvPr/>
-        </p:nvSpPr>
-        <p:spPr>
-          <a:xfrm>
-            <a:off x="685800" y="5440680"/>
-            <a:ext cx="10789920" cy="914400"/>
-          </a:xfrm>
-          <a:prstGeom prst="rect">
-            <a:avLst/>
-          </a:prstGeom>
-          <a:noFill/>
-        </p:spPr>
-        <p:txBody>
-          <a:bodyPr wrap="square" lIns="45720" rIns="45720">
-            <a:spAutoFit/>
-          </a:bodyPr>
-          <a:lstStyle/>
-          <a:p>
-            <a:pPr>
-              <a:spcAft>
-                <a:spcPts val="600"/>
-              </a:spcAft>
-            </a:pPr>
-            <a:r>
-              <a:rPr sz="2000" b="0">
-                <a:solidFill>
-                  <a:srgbClr val="1F1F1F"/>
-                </a:solidFill>
-                <a:latin typeface="Arial"/>
-              </a:rPr>
-              <a:t>1.000 repeticiones por escenario, mismo plan de partida y mismos errores de demanda.</a:t>
-            </a:r>
-          </a:p>
-        </p:txBody>
-      </p:sp>
-    </p:spTree>
-  </p:cSld>
-  <p:clrMapOvr>
-    <a:masterClrMapping/>
-  </p:clrMapOvr>
-</p:sld>
-</file>
-
-<file path=ppt/slides/slide5.xml><?xml version="1.0" encoding="utf-8"?>
-<p:sld xmlns:a="http://schemas.openxmlformats.org/drawingml/2006/main" xmlns:p="http://schemas.openxmlformats.org/presentationml/2006/main" xmlns:r="http://schemas.openxmlformats.org/officeDocument/2006/relationships">
-  <p:cSld>
-    <p:spTree>
-      <p:nvGrpSpPr>
-        <p:cNvPr id="1" name=""/>
-        <p:cNvGrpSpPr/>
-        <p:nvPr/>
-      </p:nvGrpSpPr>
-      <p:grpSpPr/>
-      <p:sp>
-        <p:nvSpPr>
-          <p:cNvPr id="2" name="Rectangle 1"/>
-          <p:cNvSpPr/>
-          <p:nvPr/>
-        </p:nvSpPr>
-        <p:spPr>
-          <a:xfrm>
-            <a:off x="457200" y="411480"/>
-            <a:ext cx="109728" cy="822960"/>
-          </a:xfrm>
-          <a:prstGeom prst="rect">
-            <a:avLst/>
-          </a:prstGeom>
-          <a:solidFill>
-            <a:srgbClr val="0072B2"/>
-          </a:solidFill>
-          <a:ln>
-            <a:noFill/>
-          </a:ln>
-        </p:spPr>
-        <p:style>
-          <a:lnRef idx="1">
-            <a:schemeClr val="accent1"/>
-          </a:lnRef>
-          <a:fillRef idx="3">
-            <a:schemeClr val="accent1"/>
-          </a:fillRef>
-          <a:effectRef idx="2">
-            <a:schemeClr val="accent1"/>
-          </a:effectRef>
-          <a:fontRef idx="minor">
-            <a:schemeClr val="lt1"/>
-          </a:fontRef>
-        </p:style>
-        <p:txBody>
-          <a:bodyPr rtlCol="0" anchor="ctr"/>
-          <a:lstStyle/>
-          <a:p>
-            <a:pPr algn="ctr"/>
-          </a:p>
-        </p:txBody>
-      </p:sp>
-      <p:sp>
-        <p:nvSpPr>
-          <p:cNvPr id="3" name="TextBox 2"/>
-          <p:cNvSpPr txBox="1"/>
-          <p:nvPr/>
-        </p:nvSpPr>
-        <p:spPr>
-          <a:xfrm>
-            <a:off x="685800" y="320040"/>
-            <a:ext cx="10972800" cy="1005840"/>
-          </a:xfrm>
-          <a:prstGeom prst="rect">
-            <a:avLst/>
-          </a:prstGeom>
-          <a:noFill/>
-        </p:spPr>
-        <p:txBody>
-          <a:bodyPr wrap="square" lIns="45720" rIns="45720" anchor="ctr">
-            <a:spAutoFit/>
-          </a:bodyPr>
-          <a:lstStyle/>
-          <a:p>
-            <a:pPr>
-              <a:spcAft>
-                <a:spcPts val="600"/>
-              </a:spcAft>
-            </a:pPr>
-            <a:r>
-              <a:rPr sz="2800" b="1">
-                <a:solidFill>
-                  <a:srgbClr val="1F1F1F"/>
-                </a:solidFill>
-                <a:latin typeface="Arial"/>
-              </a:rPr>
-              <a:t>Con el plan recomendado: de 15,7 mil a 22,4 mil ventas y de 7,1 a 83,0 M€</a:t>
-            </a:r>
-          </a:p>
-        </p:txBody>
-      </p:sp>
-      <p:sp>
-        <p:nvSpPr>
-          <p:cNvPr id="4" name="TextBox 3"/>
-          <p:cNvSpPr txBox="1"/>
-          <p:nvPr/>
-        </p:nvSpPr>
-        <p:spPr>
-          <a:xfrm>
-            <a:off x="11155680" y="6400800"/>
-            <a:ext cx="731520" cy="320040"/>
-          </a:xfrm>
-          <a:prstGeom prst="rect">
-            <a:avLst/>
-          </a:prstGeom>
-          <a:noFill/>
-        </p:spPr>
-        <p:txBody>
-          <a:bodyPr wrap="square" lIns="45720" rIns="45720">
-            <a:spAutoFit/>
-          </a:bodyPr>
-          <a:lstStyle/>
-          <a:p>
-            <a:pPr algn="r">
-              <a:spcAft>
-                <a:spcPts val="600"/>
-              </a:spcAft>
-            </a:pPr>
-            <a:r>
-              <a:rPr sz="1200" b="0">
-                <a:solidFill>
-                  <a:srgbClr val="555555"/>
-                </a:solidFill>
-                <a:latin typeface="Arial"/>
-              </a:rPr>
-              <a:t>5</a:t>
-            </a:r>
-          </a:p>
-        </p:txBody>
-      </p:sp>
-      <p:graphicFrame>
-        <p:nvGraphicFramePr>
-          <p:cNvPr id="5" name="Table 4"/>
-          <p:cNvGraphicFramePr>
-            <a:graphicFrameLocks noGrp="1"/>
-          </p:cNvGraphicFramePr>
-          <p:nvPr/>
-        </p:nvGraphicFramePr>
-        <p:xfrm>
-          <a:off x="548640" y="1554480"/>
-          <a:ext cx="11064240" cy="3803904"/>
-        </p:xfrm>
-        <a:graphic>
-          <a:graphicData uri="http://schemas.openxmlformats.org/drawingml/2006/table">
-            <a:tbl>
-              <a:tblPr firstRow="0" bandRow="0">
-                <a:tableStyleId>{5C22544A-7EE6-4342-B048-85BDC9FD1C3A}</a:tableStyleId>
-              </a:tblPr>
-              <a:tblGrid>
-                <a:gridCol w="3383280"/>
-                <a:gridCol w="2651760"/>
-                <a:gridCol w="2651760"/>
-                <a:gridCol w="2377440"/>
-              </a:tblGrid>
-              <a:tr h="475488">
-                <a:tc>
-                  <a:txBody>
-                    <a:bodyPr wrap="square"/>
-                    <a:lstStyle/>
-                    <a:p>
-                      <a:pPr algn="l"/>
-                      <a:r>
-                        <a:rPr sz="1500" b="1">
-                          <a:solidFill>
-                            <a:srgbClr val="1F1F1F"/>
-                          </a:solidFill>
-                          <a:latin typeface="Arial"/>
-                        </a:rPr>
-                        <a:t>Mediana (P10–P90)</a:t>
-                      </a:r>
-                    </a:p>
-                  </a:txBody>
-                  <a:tcPr marL="73152" marR="73152" marT="27432" marB="27432" anchor="ctr">
-                    <a:solidFill>
-                      <a:srgbClr val="DCEBF5"/>
-                    </a:solidFill>
-                  </a:tcPr>
-                </a:tc>
-                <a:tc>
-                  <a:txBody>
-                    <a:bodyPr wrap="square"/>
-                    <a:lstStyle/>
-                    <a:p>
-                      <a:pPr algn="r"/>
-                      <a:r>
-                        <a:rPr sz="1500" b="1">
-                          <a:solidFill>
-                            <a:srgbClr val="1F1F1F"/>
-                          </a:solidFill>
-                          <a:latin typeface="Arial"/>
-                        </a:rPr>
-                        <a:t>Pesimista</a:t>
-                      </a:r>
-                    </a:p>
-                  </a:txBody>
-                  <a:tcPr marL="73152" marR="73152" marT="27432" marB="27432" anchor="ctr">
-                    <a:solidFill>
-                      <a:srgbClr val="DCEBF5"/>
-                    </a:solidFill>
-                  </a:tcPr>
-                </a:tc>
-                <a:tc>
-                  <a:txBody>
-                    <a:bodyPr wrap="square"/>
-                    <a:lstStyle/>
-                    <a:p>
-                      <a:pPr algn="r"/>
-                      <a:r>
-                        <a:rPr sz="1500" b="1">
-                          <a:solidFill>
-                            <a:srgbClr val="1F1F1F"/>
-                          </a:solidFill>
-                          <a:latin typeface="Arial"/>
-                        </a:rPr>
-                        <a:t>Central</a:t>
-                      </a:r>
-                    </a:p>
-                  </a:txBody>
-                  <a:tcPr marL="73152" marR="73152" marT="27432" marB="27432" anchor="ctr">
-                    <a:solidFill>
-                      <a:srgbClr val="DCEBF5"/>
-                    </a:solidFill>
-                  </a:tcPr>
-                </a:tc>
-                <a:tc>
-                  <a:txBody>
-                    <a:bodyPr wrap="square"/>
-                    <a:lstStyle/>
-                    <a:p>
-                      <a:pPr algn="r"/>
-                      <a:r>
-                        <a:rPr sz="1500" b="1">
-                          <a:solidFill>
-                            <a:srgbClr val="1F1F1F"/>
-                          </a:solidFill>
-                          <a:latin typeface="Arial"/>
-                        </a:rPr>
-                        <a:t>Optimista</a:t>
-                      </a:r>
-                    </a:p>
-                  </a:txBody>
-                  <a:tcPr marL="73152" marR="73152" marT="27432" marB="27432" anchor="ctr">
-                    <a:solidFill>
-                      <a:srgbClr val="DCEBF5"/>
-                    </a:solidFill>
-                  </a:tcPr>
-                </a:tc>
-              </a:tr>
-              <a:tr h="475488">
-                <a:tc>
-                  <a:txBody>
-                    <a:bodyPr wrap="square"/>
-                    <a:lstStyle/>
-                    <a:p>
-                      <a:pPr algn="l"/>
-                      <a:r>
-                        <a:rPr sz="1500" b="0">
-                          <a:solidFill>
-                            <a:srgbClr val="1F1F1F"/>
-                          </a:solidFill>
-                          <a:latin typeface="Arial"/>
-                        </a:rPr>
-                        <a:t>Coches vendidos</a:t>
-                      </a:r>
-                    </a:p>
-                  </a:txBody>
-                  <a:tcPr marL="73152" marR="73152" marT="27432" marB="27432" anchor="ctr">
-                    <a:solidFill>
-                      <a:srgbClr val="FFFFFF"/>
-                    </a:solidFill>
-                  </a:tcPr>
-                </a:tc>
-                <a:tc>
-                  <a:txBody>
-                    <a:bodyPr wrap="square"/>
-                    <a:lstStyle/>
-                    <a:p>
-                      <a:pPr algn="r"/>
-                      <a:r>
-                        <a:rPr sz="1500" b="0">
-                          <a:solidFill>
-                            <a:srgbClr val="1F1F1F"/>
-                          </a:solidFill>
-                          <a:latin typeface="Arial"/>
-                        </a:rPr>
-                        <a:t>15.693 (14.632–16.906)</a:t>
-                      </a:r>
-                    </a:p>
-                  </a:txBody>
-                  <a:tcPr marL="73152" marR="73152" marT="27432" marB="27432" anchor="ctr">
-                    <a:solidFill>
-                      <a:srgbClr val="FFFFFF"/>
-                    </a:solidFill>
-                  </a:tcPr>
-                </a:tc>
-                <a:tc>
-                  <a:txBody>
-                    <a:bodyPr wrap="square"/>
-                    <a:lstStyle/>
-                    <a:p>
-                      <a:pPr algn="r"/>
-                      <a:r>
-                        <a:rPr sz="1500" b="0">
-                          <a:solidFill>
-                            <a:srgbClr val="1F1F1F"/>
-                          </a:solidFill>
-                          <a:latin typeface="Arial"/>
-                        </a:rPr>
-                        <a:t>17.910 (16.647–19.298)</a:t>
-                      </a:r>
-                    </a:p>
-                  </a:txBody>
-                  <a:tcPr marL="73152" marR="73152" marT="27432" marB="27432" anchor="ctr">
-                    <a:solidFill>
-                      <a:srgbClr val="FFFFFF"/>
-                    </a:solidFill>
-                  </a:tcPr>
-                </a:tc>
-                <a:tc>
-                  <a:txBody>
-                    <a:bodyPr wrap="square"/>
-                    <a:lstStyle/>
-                    <a:p>
-                      <a:pPr algn="r"/>
-                      <a:r>
-                        <a:rPr sz="1500" b="0">
-                          <a:solidFill>
-                            <a:srgbClr val="1F1F1F"/>
-                          </a:solidFill>
-                          <a:latin typeface="Arial"/>
-                        </a:rPr>
-                        <a:t>22.396 (21.027–23.860)</a:t>
-                      </a:r>
-                    </a:p>
-                  </a:txBody>
-                  <a:tcPr marL="73152" marR="73152" marT="27432" marB="27432" anchor="ctr">
-                    <a:solidFill>
-                      <a:srgbClr val="FFFFFF"/>
-                    </a:solidFill>
-                  </a:tcPr>
-                </a:tc>
-              </a:tr>
-              <a:tr h="475488">
-                <a:tc>
-                  <a:txBody>
-                    <a:bodyPr wrap="square"/>
-                    <a:lstStyle/>
-                    <a:p>
-                      <a:pPr algn="l"/>
-                      <a:r>
-                        <a:rPr sz="1500" b="0">
-                          <a:solidFill>
-                            <a:srgbClr val="1F1F1F"/>
-                          </a:solidFill>
-                          <a:latin typeface="Arial"/>
-                        </a:rPr>
-                        <a:t>Coches fabricados</a:t>
-                      </a:r>
-                    </a:p>
-                  </a:txBody>
-                  <a:tcPr marL="73152" marR="73152" marT="27432" marB="27432" anchor="ctr">
-                    <a:solidFill>
-                      <a:srgbClr val="FFFFFF"/>
-                    </a:solidFill>
-                  </a:tcPr>
-                </a:tc>
-                <a:tc>
-                  <a:txBody>
-                    <a:bodyPr wrap="square"/>
-                    <a:lstStyle/>
-                    <a:p>
-                      <a:pPr algn="r"/>
-                      <a:r>
-                        <a:rPr sz="1500" b="0">
-                          <a:solidFill>
-                            <a:srgbClr val="1F1F1F"/>
-                          </a:solidFill>
-                          <a:latin typeface="Arial"/>
-                        </a:rPr>
-                        <a:t>14.708 (13.632–15.903)</a:t>
-                      </a:r>
-                    </a:p>
-                  </a:txBody>
-                  <a:tcPr marL="73152" marR="73152" marT="27432" marB="27432" anchor="ctr">
-                    <a:solidFill>
-                      <a:srgbClr val="FFFFFF"/>
-                    </a:solidFill>
-                  </a:tcPr>
-                </a:tc>
-                <a:tc>
-                  <a:txBody>
-                    <a:bodyPr wrap="square"/>
-                    <a:lstStyle/>
-                    <a:p>
-                      <a:pPr algn="r"/>
-                      <a:r>
-                        <a:rPr sz="1500" b="0">
-                          <a:solidFill>
-                            <a:srgbClr val="1F1F1F"/>
-                          </a:solidFill>
-                          <a:latin typeface="Arial"/>
-                        </a:rPr>
-                        <a:t>16.880 (15.469–18.309)</a:t>
-                      </a:r>
-                    </a:p>
-                  </a:txBody>
-                  <a:tcPr marL="73152" marR="73152" marT="27432" marB="27432" anchor="ctr">
-                    <a:solidFill>
-                      <a:srgbClr val="FFFFFF"/>
-                    </a:solidFill>
-                  </a:tcPr>
-                </a:tc>
-                <a:tc>
-                  <a:txBody>
-                    <a:bodyPr wrap="square"/>
-                    <a:lstStyle/>
-                    <a:p>
-                      <a:pPr algn="r"/>
-                      <a:r>
-                        <a:rPr sz="1500" b="0">
-                          <a:solidFill>
-                            <a:srgbClr val="1F1F1F"/>
-                          </a:solidFill>
-                          <a:latin typeface="Arial"/>
-                        </a:rPr>
-                        <a:t>20.879 (19.378–22.423)</a:t>
-                      </a:r>
-                    </a:p>
-                  </a:txBody>
-                  <a:tcPr marL="73152" marR="73152" marT="27432" marB="27432" anchor="ctr">
-                    <a:solidFill>
-                      <a:srgbClr val="FFFFFF"/>
-                    </a:solidFill>
-                  </a:tcPr>
-                </a:tc>
-              </a:tr>
-              <a:tr h="475488">
-                <a:tc>
-                  <a:txBody>
-                    <a:bodyPr wrap="square"/>
-                    <a:lstStyle/>
-                    <a:p>
-                      <a:pPr algn="l"/>
-                      <a:r>
-                        <a:rPr sz="1500" b="0">
-                          <a:solidFill>
-                            <a:srgbClr val="1F1F1F"/>
-                          </a:solidFill>
-                          <a:latin typeface="Arial"/>
-                        </a:rPr>
-                        <a:t>Stock medio (meses de venta)</a:t>
-                      </a:r>
-                    </a:p>
-                  </a:txBody>
-                  <a:tcPr marL="73152" marR="73152" marT="27432" marB="27432" anchor="ctr">
-                    <a:solidFill>
-                      <a:srgbClr val="FFFFFF"/>
-                    </a:solidFill>
-                  </a:tcPr>
-                </a:tc>
-                <a:tc>
-                  <a:txBody>
-                    <a:bodyPr wrap="square"/>
-                    <a:lstStyle/>
-                    <a:p>
-                      <a:pPr algn="r"/>
-                      <a:r>
-                        <a:rPr sz="1500" b="0">
-                          <a:solidFill>
-                            <a:srgbClr val="1F1F1F"/>
-                          </a:solidFill>
-                          <a:latin typeface="Arial"/>
-                        </a:rPr>
-                        <a:t>2,2 (1,8–2,5)</a:t>
-                      </a:r>
-                    </a:p>
-                  </a:txBody>
-                  <a:tcPr marL="73152" marR="73152" marT="27432" marB="27432" anchor="ctr">
-                    <a:solidFill>
-                      <a:srgbClr val="FFFFFF"/>
-                    </a:solidFill>
-                  </a:tcPr>
-                </a:tc>
-                <a:tc>
-                  <a:txBody>
-                    <a:bodyPr wrap="square"/>
-                    <a:lstStyle/>
-                    <a:p>
-                      <a:pPr algn="r"/>
-                      <a:r>
-                        <a:rPr sz="1500" b="0">
-                          <a:solidFill>
-                            <a:srgbClr val="1F1F1F"/>
-                          </a:solidFill>
-                          <a:latin typeface="Arial"/>
-                        </a:rPr>
-                        <a:t>1,8 (1,5–2,1)</a:t>
-                      </a:r>
-                    </a:p>
-                  </a:txBody>
-                  <a:tcPr marL="73152" marR="73152" marT="27432" marB="27432" anchor="ctr">
-                    <a:solidFill>
-                      <a:srgbClr val="FFFFFF"/>
-                    </a:solidFill>
-                  </a:tcPr>
-                </a:tc>
-                <a:tc>
-                  <a:txBody>
-                    <a:bodyPr wrap="square"/>
-                    <a:lstStyle/>
-                    <a:p>
-                      <a:pPr algn="r"/>
-                      <a:r>
-                        <a:rPr sz="1500" b="0">
-                          <a:solidFill>
-                            <a:srgbClr val="1F1F1F"/>
-                          </a:solidFill>
-                          <a:latin typeface="Arial"/>
-                        </a:rPr>
-                        <a:t>1,1 (0,9–1,3)</a:t>
-                      </a:r>
-                    </a:p>
-                  </a:txBody>
-                  <a:tcPr marL="73152" marR="73152" marT="27432" marB="27432" anchor="ctr">
-                    <a:solidFill>
-                      <a:srgbClr val="FFFFFF"/>
-                    </a:solidFill>
-                  </a:tcPr>
-                </a:tc>
-              </a:tr>
-              <a:tr h="475488">
-                <a:tc>
-                  <a:txBody>
-                    <a:bodyPr wrap="square"/>
-                    <a:lstStyle/>
-                    <a:p>
-                      <a:pPr algn="l"/>
-                      <a:r>
-                        <a:rPr sz="1500" b="0">
-                          <a:solidFill>
-                            <a:srgbClr val="1F1F1F"/>
-                          </a:solidFill>
-                          <a:latin typeface="Arial"/>
-                        </a:rPr>
-                        <a:t>Coste del stock (M€)</a:t>
-                      </a:r>
-                    </a:p>
-                  </a:txBody>
-                  <a:tcPr marL="73152" marR="73152" marT="27432" marB="27432" anchor="ctr">
-                    <a:solidFill>
-                      <a:srgbClr val="FFFFFF"/>
-                    </a:solidFill>
-                  </a:tcPr>
-                </a:tc>
-                <a:tc>
-                  <a:txBody>
-                    <a:bodyPr wrap="square"/>
-                    <a:lstStyle/>
-                    <a:p>
-                      <a:pPr algn="r"/>
-                      <a:r>
-                        <a:rPr sz="1500" b="0">
-                          <a:solidFill>
-                            <a:srgbClr val="1F1F1F"/>
-                          </a:solidFill>
-                          <a:latin typeface="Arial"/>
-                        </a:rPr>
-                        <a:t>2,0 (1,8–2,1)</a:t>
-                      </a:r>
-                    </a:p>
-                  </a:txBody>
-                  <a:tcPr marL="73152" marR="73152" marT="27432" marB="27432" anchor="ctr">
-                    <a:solidFill>
-                      <a:srgbClr val="FFFFFF"/>
-                    </a:solidFill>
-                  </a:tcPr>
-                </a:tc>
-                <a:tc>
-                  <a:txBody>
-                    <a:bodyPr wrap="square"/>
-                    <a:lstStyle/>
-                    <a:p>
-                      <a:pPr algn="r"/>
-                      <a:r>
-                        <a:rPr sz="1500" b="0">
-                          <a:solidFill>
-                            <a:srgbClr val="1F1F1F"/>
-                          </a:solidFill>
-                          <a:latin typeface="Arial"/>
-                        </a:rPr>
-                        <a:t>1,9 (1,8–2,1)</a:t>
-                      </a:r>
-                    </a:p>
-                  </a:txBody>
-                  <a:tcPr marL="73152" marR="73152" marT="27432" marB="27432" anchor="ctr">
-                    <a:solidFill>
-                      <a:srgbClr val="FFFFFF"/>
-                    </a:solidFill>
-                  </a:tcPr>
-                </a:tc>
-                <a:tc>
-                  <a:txBody>
-                    <a:bodyPr wrap="square"/>
-                    <a:lstStyle/>
-                    <a:p>
-                      <a:pPr algn="r"/>
-                      <a:r>
-                        <a:rPr sz="1500" b="0">
-                          <a:solidFill>
-                            <a:srgbClr val="1F1F1F"/>
-                          </a:solidFill>
-                          <a:latin typeface="Arial"/>
-                        </a:rPr>
-                        <a:t>1,5 (1,4–1,7)</a:t>
-                      </a:r>
-                    </a:p>
-                  </a:txBody>
-                  <a:tcPr marL="73152" marR="73152" marT="27432" marB="27432" anchor="ctr">
-                    <a:solidFill>
-                      <a:srgbClr val="FFFFFF"/>
-                    </a:solidFill>
-                  </a:tcPr>
-                </a:tc>
-              </a:tr>
-              <a:tr h="475488">
-                <a:tc>
-                  <a:txBody>
-                    <a:bodyPr wrap="square"/>
-                    <a:lstStyle/>
-                    <a:p>
-                      <a:pPr algn="l"/>
-                      <a:r>
-                        <a:rPr sz="1500" b="0">
-                          <a:solidFill>
-                            <a:srgbClr val="1F1F1F"/>
-                          </a:solidFill>
-                          <a:latin typeface="Arial"/>
-                        </a:rPr>
-                        <a:t>Ventas perdidas (coches)</a:t>
-                      </a:r>
-                    </a:p>
-                  </a:txBody>
-                  <a:tcPr marL="73152" marR="73152" marT="27432" marB="27432" anchor="ctr">
-                    <a:solidFill>
-                      <a:srgbClr val="FFFFFF"/>
-                    </a:solidFill>
-                  </a:tcPr>
-                </a:tc>
-                <a:tc>
-                  <a:txBody>
-                    <a:bodyPr wrap="square"/>
-                    <a:lstStyle/>
-                    <a:p>
-                      <a:pPr algn="r"/>
-                      <a:r>
-                        <a:rPr sz="1500" b="0">
-                          <a:solidFill>
-                            <a:srgbClr val="1F1F1F"/>
-                          </a:solidFill>
-                          <a:latin typeface="Arial"/>
-                        </a:rPr>
-                        <a:t>381 (111–864)</a:t>
-                      </a:r>
-                    </a:p>
-                  </a:txBody>
-                  <a:tcPr marL="73152" marR="73152" marT="27432" marB="27432" anchor="ctr">
-                    <a:solidFill>
-                      <a:srgbClr val="FFFFFF"/>
-                    </a:solidFill>
-                  </a:tcPr>
-                </a:tc>
-                <a:tc>
-                  <a:txBody>
-                    <a:bodyPr wrap="square"/>
-                    <a:lstStyle/>
-                    <a:p>
-                      <a:pPr algn="r"/>
-                      <a:r>
-                        <a:rPr sz="1500" b="0">
-                          <a:solidFill>
-                            <a:srgbClr val="1F1F1F"/>
-                          </a:solidFill>
-                          <a:latin typeface="Arial"/>
-                        </a:rPr>
-                        <a:t>458 (173–908)</a:t>
-                      </a:r>
-                    </a:p>
-                  </a:txBody>
-                  <a:tcPr marL="73152" marR="73152" marT="27432" marB="27432" anchor="ctr">
-                    <a:solidFill>
-                      <a:srgbClr val="FFFFFF"/>
-                    </a:solidFill>
-                  </a:tcPr>
-                </a:tc>
-                <a:tc>
-                  <a:txBody>
-                    <a:bodyPr wrap="square"/>
-                    <a:lstStyle/>
-                    <a:p>
-                      <a:pPr algn="r"/>
-                      <a:r>
-                        <a:rPr sz="1500" b="0">
-                          <a:solidFill>
-                            <a:srgbClr val="1F1F1F"/>
-                          </a:solidFill>
-                          <a:latin typeface="Arial"/>
-                        </a:rPr>
-                        <a:t>1.814 (1.015–2.909)</a:t>
-                      </a:r>
-                    </a:p>
-                  </a:txBody>
-                  <a:tcPr marL="73152" marR="73152" marT="27432" marB="27432" anchor="ctr">
-                    <a:solidFill>
-                      <a:srgbClr val="FFFFFF"/>
-                    </a:solidFill>
-                  </a:tcPr>
-                </a:tc>
-              </a:tr>
-              <a:tr h="475488">
-                <a:tc>
-                  <a:txBody>
-                    <a:bodyPr wrap="square"/>
-                    <a:lstStyle/>
-                    <a:p>
-                      <a:pPr algn="l"/>
-                      <a:r>
-                        <a:rPr sz="1500" b="0">
-                          <a:solidFill>
-                            <a:srgbClr val="1F1F1F"/>
-                          </a:solidFill>
-                          <a:latin typeface="Arial"/>
-                        </a:rPr>
-                        <a:t>Prima de CO2 (M€)</a:t>
-                      </a:r>
-                    </a:p>
-                  </a:txBody>
-                  <a:tcPr marL="73152" marR="73152" marT="27432" marB="27432" anchor="ctr">
-                    <a:solidFill>
-                      <a:srgbClr val="FFFFFF"/>
-                    </a:solidFill>
-                  </a:tcPr>
-                </a:tc>
-                <a:tc>
-                  <a:txBody>
-                    <a:bodyPr wrap="square"/>
-                    <a:lstStyle/>
-                    <a:p>
-                      <a:pPr algn="r"/>
-                      <a:r>
-                        <a:rPr sz="1500" b="0">
-                          <a:solidFill>
-                            <a:srgbClr val="1F1F1F"/>
-                          </a:solidFill>
-                          <a:latin typeface="Arial"/>
-                        </a:rPr>
-                        <a:t>47,2 (43,8–50,9)</a:t>
-                      </a:r>
-                    </a:p>
-                  </a:txBody>
-                  <a:tcPr marL="73152" marR="73152" marT="27432" marB="27432" anchor="ctr">
-                    <a:solidFill>
-                      <a:srgbClr val="FFFFFF"/>
-                    </a:solidFill>
-                  </a:tcPr>
-                </a:tc>
-                <a:tc>
-                  <a:txBody>
-                    <a:bodyPr wrap="square"/>
-                    <a:lstStyle/>
-                    <a:p>
-                      <a:pPr algn="r"/>
-                      <a:r>
-                        <a:rPr sz="1500" b="0">
-                          <a:solidFill>
-                            <a:srgbClr val="1F1F1F"/>
-                          </a:solidFill>
-                          <a:latin typeface="Arial"/>
-                        </a:rPr>
-                        <a:t>0,0 (0,0–0,0)</a:t>
-                      </a:r>
-                    </a:p>
-                  </a:txBody>
-                  <a:tcPr marL="73152" marR="73152" marT="27432" marB="27432" anchor="ctr">
-                    <a:solidFill>
-                      <a:srgbClr val="FFFFFF"/>
-                    </a:solidFill>
-                  </a:tcPr>
-                </a:tc>
-                <a:tc>
-                  <a:txBody>
-                    <a:bodyPr wrap="square"/>
-                    <a:lstStyle/>
-                    <a:p>
-                      <a:pPr algn="r"/>
-                      <a:r>
-                        <a:rPr sz="1500" b="0">
-                          <a:solidFill>
-                            <a:srgbClr val="1F1F1F"/>
-                          </a:solidFill>
-                          <a:latin typeface="Arial"/>
-                        </a:rPr>
-                        <a:t>0,0 (0,0–0,0)</a:t>
-                      </a:r>
-                    </a:p>
-                  </a:txBody>
-                  <a:tcPr marL="73152" marR="73152" marT="27432" marB="27432" anchor="ctr">
-                    <a:solidFill>
-                      <a:srgbClr val="FFFFFF"/>
-                    </a:solidFill>
-                  </a:tcPr>
-                </a:tc>
-              </a:tr>
-              <a:tr h="475488">
-                <a:tc>
-                  <a:txBody>
-                    <a:bodyPr wrap="square"/>
-                    <a:lstStyle/>
-                    <a:p>
-                      <a:pPr algn="l"/>
-                      <a:r>
-                        <a:rPr sz="1500" b="0">
-                          <a:solidFill>
-                            <a:srgbClr val="1F1F1F"/>
-                          </a:solidFill>
-                          <a:latin typeface="Arial"/>
-                        </a:rPr>
-                        <a:t>Resultado (M€)</a:t>
-                      </a:r>
-                    </a:p>
-                  </a:txBody>
-                  <a:tcPr marL="73152" marR="73152" marT="27432" marB="27432" anchor="ctr">
-                    <a:solidFill>
-                      <a:srgbClr val="FFFFFF"/>
-                    </a:solidFill>
-                  </a:tcPr>
-                </a:tc>
-                <a:tc>
-                  <a:txBody>
-                    <a:bodyPr wrap="square"/>
-                    <a:lstStyle/>
-                    <a:p>
-                      <a:pPr algn="r"/>
-                      <a:r>
-                        <a:rPr sz="1500" b="0">
-                          <a:solidFill>
-                            <a:srgbClr val="1F1F1F"/>
-                          </a:solidFill>
-                          <a:latin typeface="Arial"/>
-                        </a:rPr>
-                        <a:t>7,1 (5,7–8,6)</a:t>
-                      </a:r>
-                    </a:p>
-                  </a:txBody>
-                  <a:tcPr marL="73152" marR="73152" marT="27432" marB="27432" anchor="ctr">
-                    <a:solidFill>
-                      <a:srgbClr val="FFFFFF"/>
-                    </a:solidFill>
-                  </a:tcPr>
-                </a:tc>
-                <a:tc>
-                  <a:txBody>
-                    <a:bodyPr wrap="square"/>
-                    <a:lstStyle/>
-                    <a:p>
-                      <a:pPr algn="r"/>
-                      <a:r>
-                        <a:rPr sz="1500" b="0">
-                          <a:solidFill>
-                            <a:srgbClr val="1F1F1F"/>
-                          </a:solidFill>
-                          <a:latin typeface="Arial"/>
-                        </a:rPr>
-                        <a:t>63,5 (58,1–69,4)</a:t>
-                      </a:r>
-                    </a:p>
-                  </a:txBody>
-                  <a:tcPr marL="73152" marR="73152" marT="27432" marB="27432" anchor="ctr">
-                    <a:solidFill>
-                      <a:srgbClr val="FFFFFF"/>
-                    </a:solidFill>
-                  </a:tcPr>
-                </a:tc>
-                <a:tc>
-                  <a:txBody>
-                    <a:bodyPr wrap="square"/>
-                    <a:lstStyle/>
-                    <a:p>
-                      <a:pPr algn="r"/>
-                      <a:r>
-                        <a:rPr sz="1500" b="0">
-                          <a:solidFill>
-                            <a:srgbClr val="1F1F1F"/>
-                          </a:solidFill>
-                          <a:latin typeface="Arial"/>
-                        </a:rPr>
-                        <a:t>83,0 (76,3–89,6)</a:t>
-                      </a:r>
-                    </a:p>
-                  </a:txBody>
-                  <a:tcPr marL="73152" marR="73152" marT="27432" marB="27432" anchor="ctr">
-                    <a:solidFill>
-                      <a:srgbClr val="FFFFFF"/>
-                    </a:solidFill>
-                  </a:tcPr>
-                </a:tc>
-              </a:tr>
-            </a:tbl>
-          </a:graphicData>
-        </a:graphic>
-      </p:graphicFrame>
-      <p:sp>
-        <p:nvSpPr>
-          <p:cNvPr id="6" name="TextBox 5"/>
-          <p:cNvSpPr txBox="1"/>
-          <p:nvPr/>
-        </p:nvSpPr>
-        <p:spPr>
-          <a:xfrm>
-            <a:off x="548640" y="5486400"/>
-            <a:ext cx="11064240" cy="822960"/>
-          </a:xfrm>
-          <a:prstGeom prst="rect">
-            <a:avLst/>
-          </a:prstGeom>
-          <a:noFill/>
-        </p:spPr>
-        <p:txBody>
-          <a:bodyPr wrap="square" lIns="45720" rIns="45720">
-            <a:spAutoFit/>
-          </a:bodyPr>
-          <a:lstStyle/>
-          <a:p>
-            <a:pPr>
-              <a:spcAft>
-                <a:spcPts val="600"/>
-              </a:spcAft>
-            </a:pPr>
-            <a:r>
-              <a:rPr sz="2000" b="0">
-                <a:solidFill>
-                  <a:srgbClr val="1F1F1F"/>
-                </a:solidFill>
-                <a:latin typeface="Arial"/>
-              </a:rPr>
-              <a:t>La prima de CO2 (47 M€) hunde el pesimista: sin ella, dejaría unos 54 M€.</a:t>
-            </a:r>
-          </a:p>
-        </p:txBody>
-      </p:sp>
-    </p:spTree>
-  </p:cSld>
-  <p:clrMapOvr>
-    <a:masterClrMapping/>
-  </p:clrMapOvr>
-</p:sld>
-</file>
-
-<file path=ppt/slides/slide6.xml><?xml version="1.0" encoding="utf-8"?>
-<p:sld xmlns:a="http://schemas.openxmlformats.org/drawingml/2006/main" xmlns:p="http://schemas.openxmlformats.org/presentationml/2006/main" xmlns:r="http://schemas.openxmlformats.org/officeDocument/2006/relationships">
-  <p:cSld>
-    <p:spTree>
-      <p:nvGrpSpPr>
-        <p:cNvPr id="1" name=""/>
-        <p:cNvGrpSpPr/>
-        <p:nvPr/>
-      </p:nvGrpSpPr>
-      <p:grpSpPr/>
-      <p:sp>
-        <p:nvSpPr>
-          <p:cNvPr id="2" name="Rectangle 1"/>
-          <p:cNvSpPr/>
-          <p:nvPr/>
-        </p:nvSpPr>
-        <p:spPr>
-          <a:xfrm>
-            <a:off x="457200" y="411480"/>
-            <a:ext cx="109728" cy="822960"/>
-          </a:xfrm>
-          <a:prstGeom prst="rect">
-            <a:avLst/>
-          </a:prstGeom>
-          <a:solidFill>
-            <a:srgbClr val="0072B2"/>
-          </a:solidFill>
-          <a:ln>
-            <a:noFill/>
-          </a:ln>
-        </p:spPr>
-        <p:style>
-          <a:lnRef idx="1">
-            <a:schemeClr val="accent1"/>
-          </a:lnRef>
-          <a:fillRef idx="3">
-            <a:schemeClr val="accent1"/>
-          </a:fillRef>
-          <a:effectRef idx="2">
-            <a:schemeClr val="accent1"/>
-          </a:effectRef>
-          <a:fontRef idx="minor">
-            <a:schemeClr val="lt1"/>
-          </a:fontRef>
-        </p:style>
-        <p:txBody>
-          <a:bodyPr rtlCol="0" anchor="ctr"/>
-          <a:lstStyle/>
-          <a:p>
-            <a:pPr algn="ctr"/>
-          </a:p>
-        </p:txBody>
-      </p:sp>
-      <p:sp>
-        <p:nvSpPr>
-          <p:cNvPr id="3" name="TextBox 2"/>
-          <p:cNvSpPr txBox="1"/>
-          <p:nvPr/>
-        </p:nvSpPr>
-        <p:spPr>
-          <a:xfrm>
-            <a:off x="685800" y="320040"/>
-            <a:ext cx="10972800" cy="1005840"/>
-          </a:xfrm>
-          <a:prstGeom prst="rect">
-            <a:avLst/>
-          </a:prstGeom>
-          <a:noFill/>
-        </p:spPr>
-        <p:txBody>
-          <a:bodyPr wrap="square" lIns="45720" rIns="45720" anchor="ctr">
-            <a:spAutoFit/>
-          </a:bodyPr>
-          <a:lstStyle/>
-          <a:p>
-            <a:pPr>
-              <a:spcAft>
-                <a:spcPts val="600"/>
-              </a:spcAft>
-            </a:pPr>
-            <a:r>
-              <a:rPr sz="2800" b="1">
-                <a:solidFill>
-                  <a:srgbClr val="1F1F1F"/>
-                </a:solidFill>
-                <a:latin typeface="Arial"/>
-              </a:rPr>
-              <a:t>Plan recomendado: 17.400 coches, con las llegadas en los SUV de margen</a:t>
-            </a:r>
-          </a:p>
-        </p:txBody>
-      </p:sp>
-      <p:sp>
-        <p:nvSpPr>
-          <p:cNvPr id="4" name="TextBox 3"/>
-          <p:cNvSpPr txBox="1"/>
-          <p:nvPr/>
-        </p:nvSpPr>
-        <p:spPr>
-          <a:xfrm>
-            <a:off x="11155680" y="6400800"/>
-            <a:ext cx="731520" cy="320040"/>
-          </a:xfrm>
-          <a:prstGeom prst="rect">
-            <a:avLst/>
-          </a:prstGeom>
-          <a:noFill/>
-        </p:spPr>
-        <p:txBody>
-          <a:bodyPr wrap="square" lIns="45720" rIns="45720">
-            <a:spAutoFit/>
-          </a:bodyPr>
-          <a:lstStyle/>
-          <a:p>
-            <a:pPr algn="r">
-              <a:spcAft>
-                <a:spcPts val="600"/>
-              </a:spcAft>
-            </a:pPr>
-            <a:r>
-              <a:rPr sz="1200" b="0">
-                <a:solidFill>
-                  <a:srgbClr val="555555"/>
-                </a:solidFill>
-                <a:latin typeface="Arial"/>
-              </a:rPr>
-              <a:t>6</a:t>
-            </a:r>
-          </a:p>
-        </p:txBody>
-      </p:sp>
-      <p:pic>
-        <p:nvPicPr>
-          <p:cNvPr id="5" name="Picture 4" descr="plan_recomendado_segmento_a013.png"/>
-          <p:cNvPicPr>
-            <a:picLocks noChangeAspect="1"/>
-          </p:cNvPicPr>
-          <p:nvPr/>
-        </p:nvPicPr>
-        <p:blipFill>
-          <a:blip r:embed="rId3"/>
-          <a:stretch>
-            <a:fillRect/>
-          </a:stretch>
-        </p:blipFill>
-        <p:spPr>
-          <a:xfrm>
-            <a:off x="457200" y="1554480"/>
-            <a:ext cx="7863840" cy="3858341"/>
-          </a:xfrm>
-          <a:prstGeom prst="rect">
-            <a:avLst/>
-          </a:prstGeom>
-        </p:spPr>
-      </p:pic>
-      <p:sp>
-        <p:nvSpPr>
-          <p:cNvPr id="6" name="TextBox 5"/>
-          <p:cNvSpPr txBox="1"/>
-          <p:nvPr/>
-        </p:nvSpPr>
-        <p:spPr>
-          <a:xfrm>
-            <a:off x="8503920" y="1645920"/>
-            <a:ext cx="3474720" cy="4572000"/>
-          </a:xfrm>
-          <a:prstGeom prst="rect">
-            <a:avLst/>
-          </a:prstGeom>
-          <a:noFill/>
-        </p:spPr>
-        <p:txBody>
-          <a:bodyPr wrap="square" lIns="45720" rIns="45720">
-            <a:spAutoFit/>
-          </a:bodyPr>
-          <a:lstStyle/>
-          <a:p>
-            <a:pPr>
-              <a:spcAft>
-                <a:spcPts val="1200"/>
-              </a:spcAft>
-            </a:pPr>
-            <a:r>
-              <a:rPr sz="2000" b="0">
-                <a:solidFill>
-                  <a:srgbClr val="1F1F1F"/>
-                </a:solidFill>
-                <a:latin typeface="Arial"/>
-              </a:rPr>
-              <a:t>No pedir C hasta septiembre ni CSUV hasta junio.</a:t>
-            </a:r>
-          </a:p>
-          <a:p>
-            <a:pPr>
-              <a:spcAft>
-                <a:spcPts val="1200"/>
-              </a:spcAft>
-            </a:pPr>
-            <a:r>
-              <a:rPr sz="2000" b="0">
-                <a:solidFill>
-                  <a:srgbClr val="1F1F1F"/>
-                </a:solidFill>
-                <a:latin typeface="Arial"/>
-              </a:rPr>
-              <a:t>Marzo: SSUV 885, MSUV 384 y S 116.</a:t>
-            </a:r>
-          </a:p>
-          <a:p>
-            <a:pPr>
-              <a:spcAft>
-                <a:spcPts val="1200"/>
-              </a:spcAft>
-            </a:pPr>
-            <a:r>
-              <a:rPr sz="2000" b="0">
-                <a:solidFill>
-                  <a:srgbClr val="1F1F1F"/>
-                </a:solidFill>
-                <a:latin typeface="Arial"/>
-              </a:rPr>
-              <a:t>B sin stock de seguridad.</a:t>
-            </a:r>
-          </a:p>
-          <a:p>
-            <a:pPr>
-              <a:spcAft>
-                <a:spcPts val="1200"/>
-              </a:spcAft>
-            </a:pPr>
-            <a:r>
-              <a:rPr sz="2000" b="0">
-                <a:solidFill>
-                  <a:srgbClr val="1F1F1F"/>
-                </a:solidFill>
-                <a:latin typeface="Arial"/>
-              </a:rPr>
-              <a:t>Stock medio de 1,8 meses de venta.</a:t>
-            </a:r>
-          </a:p>
-        </p:txBody>
-      </p:sp>
-    </p:spTree>
-  </p:cSld>
-  <p:clrMapOvr>
-    <a:masterClrMapping/>
-  </p:clrMapOvr>
-</p:sld>
-</file>
-
-<file path=ppt/slides/slide7.xml><?xml version="1.0" encoding="utf-8"?>
-<p:sld xmlns:a="http://schemas.openxmlformats.org/drawingml/2006/main" xmlns:p="http://schemas.openxmlformats.org/presentationml/2006/main" xmlns:r="http://schemas.openxmlformats.org/officeDocument/2006/relationships">
-  <p:cSld>
-    <p:spTree>
-      <p:nvGrpSpPr>
-        <p:cNvPr id="1" name=""/>
-        <p:cNvGrpSpPr/>
-        <p:nvPr/>
-      </p:nvGrpSpPr>
-      <p:grpSpPr/>
-      <p:sp>
-        <p:nvSpPr>
-          <p:cNvPr id="2" name="Rectangle 1"/>
-          <p:cNvSpPr/>
-          <p:nvPr/>
-        </p:nvSpPr>
-        <p:spPr>
-          <a:xfrm>
-            <a:off x="457200" y="411480"/>
-            <a:ext cx="109728" cy="822960"/>
-          </a:xfrm>
-          <a:prstGeom prst="rect">
-            <a:avLst/>
-          </a:prstGeom>
-          <a:solidFill>
-            <a:srgbClr val="0072B2"/>
-          </a:solidFill>
-          <a:ln>
-            <a:noFill/>
-          </a:ln>
-        </p:spPr>
-        <p:style>
-          <a:lnRef idx="1">
-            <a:schemeClr val="accent1"/>
-          </a:lnRef>
-          <a:fillRef idx="3">
-            <a:schemeClr val="accent1"/>
-          </a:fillRef>
-          <a:effectRef idx="2">
-            <a:schemeClr val="accent1"/>
-          </a:effectRef>
-          <a:fontRef idx="minor">
-            <a:schemeClr val="lt1"/>
-          </a:fontRef>
-        </p:style>
-        <p:txBody>
-          <a:bodyPr rtlCol="0" anchor="ctr"/>
-          <a:lstStyle/>
-          <a:p>
-            <a:pPr algn="ctr"/>
-          </a:p>
-        </p:txBody>
-      </p:sp>
-      <p:sp>
-        <p:nvSpPr>
-          <p:cNvPr id="3" name="TextBox 2"/>
-          <p:cNvSpPr txBox="1"/>
-          <p:nvPr/>
-        </p:nvSpPr>
-        <p:spPr>
-          <a:xfrm>
-            <a:off x="685800" y="320040"/>
-            <a:ext cx="10972800" cy="1005840"/>
-          </a:xfrm>
-          <a:prstGeom prst="rect">
-            <a:avLst/>
-          </a:prstGeom>
-          <a:noFill/>
-        </p:spPr>
-        <p:txBody>
-          <a:bodyPr wrap="square" lIns="45720" rIns="45720" anchor="ctr">
-            <a:spAutoFit/>
-          </a:bodyPr>
-          <a:lstStyle/>
-          <a:p>
-            <a:pPr>
-              <a:spcAft>
-                <a:spcPts val="600"/>
-              </a:spcAft>
-            </a:pPr>
-            <a:r>
-              <a:rPr sz="2800" b="1">
-                <a:solidFill>
-                  <a:srgbClr val="1F1F1F"/>
-                </a:solidFill>
-                <a:latin typeface="Arial"/>
-              </a:rPr>
-              <a:t>Quedarse corto cuesta mucho más que sobrar</a:t>
-            </a:r>
-          </a:p>
-        </p:txBody>
-      </p:sp>
-      <p:sp>
-        <p:nvSpPr>
-          <p:cNvPr id="4" name="TextBox 3"/>
-          <p:cNvSpPr txBox="1"/>
-          <p:nvPr/>
-        </p:nvSpPr>
-        <p:spPr>
-          <a:xfrm>
-            <a:off x="11155680" y="6400800"/>
-            <a:ext cx="731520" cy="320040"/>
-          </a:xfrm>
-          <a:prstGeom prst="rect">
-            <a:avLst/>
-          </a:prstGeom>
-          <a:noFill/>
-        </p:spPr>
-        <p:txBody>
-          <a:bodyPr wrap="square" lIns="45720" rIns="45720">
-            <a:spAutoFit/>
-          </a:bodyPr>
-          <a:lstStyle/>
-          <a:p>
-            <a:pPr algn="r">
-              <a:spcAft>
-                <a:spcPts val="600"/>
-              </a:spcAft>
-            </a:pPr>
-            <a:r>
-              <a:rPr sz="1200" b="0">
-                <a:solidFill>
-                  <a:srgbClr val="555555"/>
-                </a:solidFill>
-                <a:latin typeface="Arial"/>
-              </a:rPr>
-              <a:t>7</a:t>
-            </a:r>
-          </a:p>
-        </p:txBody>
-      </p:sp>
-      <p:graphicFrame>
-        <p:nvGraphicFramePr>
-          <p:cNvPr id="5" name="Table 4"/>
-          <p:cNvGraphicFramePr>
-            <a:graphicFrameLocks noGrp="1"/>
-          </p:cNvGraphicFramePr>
-          <p:nvPr/>
-        </p:nvGraphicFramePr>
-        <p:xfrm>
-          <a:off x="548640" y="1554480"/>
-          <a:ext cx="6035040" cy="3657600"/>
-        </p:xfrm>
-        <a:graphic>
-          <a:graphicData uri="http://schemas.openxmlformats.org/drawingml/2006/table">
-            <a:tbl>
-              <a:tblPr firstRow="0" bandRow="0">
-                <a:tableStyleId>{5C22544A-7EE6-4342-B048-85BDC9FD1C3A}</a:tableStyleId>
-              </a:tblPr>
-              <a:tblGrid>
-                <a:gridCol w="1371600"/>
-                <a:gridCol w="1645920"/>
-                <a:gridCol w="1645920"/>
-                <a:gridCol w="1371600"/>
-              </a:tblGrid>
-              <a:tr h="457200">
-                <a:tc>
-                  <a:txBody>
-                    <a:bodyPr wrap="square"/>
-                    <a:lstStyle/>
-                    <a:p>
-                      <a:pPr algn="l"/>
-                      <a:r>
-                        <a:rPr sz="1600" b="1">
-                          <a:solidFill>
-                            <a:srgbClr val="1F1F1F"/>
-                          </a:solidFill>
-                          <a:latin typeface="Arial"/>
-                        </a:rPr>
-                        <a:t>Segmento</a:t>
-                      </a:r>
-                    </a:p>
-                  </a:txBody>
-                  <a:tcPr marL="73152" marR="73152" marT="27432" marB="27432" anchor="ctr">
-                    <a:solidFill>
-                      <a:srgbClr val="DCEBF5"/>
-                    </a:solidFill>
-                  </a:tcPr>
-                </a:tc>
-                <a:tc>
-                  <a:txBody>
-                    <a:bodyPr wrap="square"/>
-                    <a:lstStyle/>
-                    <a:p>
-                      <a:pPr algn="r"/>
-                      <a:r>
-                        <a:rPr sz="1600" b="1">
-                          <a:solidFill>
-                            <a:srgbClr val="1F1F1F"/>
-                          </a:solidFill>
-                          <a:latin typeface="Arial"/>
-                        </a:rPr>
-                        <a:t>CVP (€/coche)</a:t>
-                      </a:r>
-                    </a:p>
-                  </a:txBody>
-                  <a:tcPr marL="73152" marR="73152" marT="27432" marB="27432" anchor="ctr">
-                    <a:solidFill>
-                      <a:srgbClr val="DCEBF5"/>
-                    </a:solidFill>
-                  </a:tcPr>
-                </a:tc>
-                <a:tc>
-                  <a:txBody>
-                    <a:bodyPr wrap="square"/>
-                    <a:lstStyle/>
-                    <a:p>
-                      <a:pPr algn="r"/>
-                      <a:r>
-                        <a:rPr sz="1600" b="1">
-                          <a:solidFill>
-                            <a:srgbClr val="1F1F1F"/>
-                          </a:solidFill>
-                          <a:latin typeface="Arial"/>
-                        </a:rPr>
-                        <a:t>Con prima CO2</a:t>
-                      </a:r>
-                    </a:p>
-                  </a:txBody>
-                  <a:tcPr marL="73152" marR="73152" marT="27432" marB="27432" anchor="ctr">
-                    <a:solidFill>
-                      <a:srgbClr val="DCEBF5"/>
-                    </a:solidFill>
-                  </a:tcPr>
-                </a:tc>
-                <a:tc>
-                  <a:txBody>
-                    <a:bodyPr wrap="square"/>
-                    <a:lstStyle/>
-                    <a:p>
-                      <a:pPr algn="r"/>
-                      <a:r>
-                        <a:rPr sz="1600" b="1">
-                          <a:solidFill>
-                            <a:srgbClr val="1F1F1F"/>
-                          </a:solidFill>
-                          <a:latin typeface="Arial"/>
-                        </a:rPr>
-                        <a:t>z elegida</a:t>
-                      </a:r>
-                    </a:p>
-                  </a:txBody>
-                  <a:tcPr marL="73152" marR="73152" marT="27432" marB="27432" anchor="ctr">
-                    <a:solidFill>
-                      <a:srgbClr val="DCEBF5"/>
-                    </a:solidFill>
-                  </a:tcPr>
-                </a:tc>
-              </a:tr>
-              <a:tr h="457200">
-                <a:tc>
-                  <a:txBody>
-                    <a:bodyPr wrap="square"/>
-                    <a:lstStyle/>
-                    <a:p>
-                      <a:pPr algn="l"/>
-                      <a:r>
-                        <a:rPr sz="1600" b="0">
-                          <a:solidFill>
-                            <a:srgbClr val="1F1F1F"/>
-                          </a:solidFill>
-                          <a:latin typeface="Arial"/>
-                        </a:rPr>
-                        <a:t>MSUV</a:t>
-                      </a:r>
-                    </a:p>
-                  </a:txBody>
-                  <a:tcPr marL="73152" marR="73152" marT="27432" marB="27432" anchor="ctr">
-                    <a:solidFill>
-                      <a:srgbClr val="FFFFFF"/>
-                    </a:solidFill>
-                  </a:tcPr>
-                </a:tc>
-                <a:tc>
-                  <a:txBody>
-                    <a:bodyPr wrap="square"/>
-                    <a:lstStyle/>
-                    <a:p>
-                      <a:pPr algn="r"/>
-                      <a:r>
-                        <a:rPr sz="1600" b="0">
-                          <a:solidFill>
-                            <a:srgbClr val="1F1F1F"/>
-                          </a:solidFill>
-                          <a:latin typeface="Arial"/>
-                        </a:rPr>
-                        <a:t>5.887</a:t>
-                      </a:r>
-                    </a:p>
-                  </a:txBody>
-                  <a:tcPr marL="73152" marR="73152" marT="27432" marB="27432" anchor="ctr">
-                    <a:solidFill>
-                      <a:srgbClr val="FFFFFF"/>
-                    </a:solidFill>
-                  </a:tcPr>
-                </a:tc>
-                <a:tc>
-                  <a:txBody>
-                    <a:bodyPr wrap="square"/>
-                    <a:lstStyle/>
-                    <a:p>
-                      <a:pPr algn="r"/>
-                      <a:r>
-                        <a:rPr sz="1600" b="0">
-                          <a:solidFill>
-                            <a:srgbClr val="1F1F1F"/>
-                          </a:solidFill>
-                          <a:latin typeface="Arial"/>
-                        </a:rPr>
-                        <a:t>1.684</a:t>
-                      </a:r>
-                    </a:p>
-                  </a:txBody>
-                  <a:tcPr marL="73152" marR="73152" marT="27432" marB="27432" anchor="ctr">
-                    <a:solidFill>
-                      <a:srgbClr val="FFFFFF"/>
-                    </a:solidFill>
-                  </a:tcPr>
-                </a:tc>
-                <a:tc>
-                  <a:txBody>
-                    <a:bodyPr wrap="square"/>
-                    <a:lstStyle/>
-                    <a:p>
-                      <a:pPr algn="r"/>
-                      <a:r>
-                        <a:rPr sz="1600" b="0">
-                          <a:solidFill>
-                            <a:srgbClr val="1F1F1F"/>
-                          </a:solidFill>
-                          <a:latin typeface="Arial"/>
-                        </a:rPr>
-                        <a:t>3,00</a:t>
-                      </a:r>
-                    </a:p>
-                  </a:txBody>
-                  <a:tcPr marL="73152" marR="73152" marT="27432" marB="27432" anchor="ctr">
-                    <a:solidFill>
-                      <a:srgbClr val="FFFFFF"/>
-                    </a:solidFill>
-                  </a:tcPr>
-                </a:tc>
-              </a:tr>
-              <a:tr h="457200">
-                <a:tc>
-                  <a:txBody>
-                    <a:bodyPr wrap="square"/>
-                    <a:lstStyle/>
-                    <a:p>
-                      <a:pPr algn="l"/>
-                      <a:r>
-                        <a:rPr sz="1600" b="0">
-                          <a:solidFill>
-                            <a:srgbClr val="1F1F1F"/>
-                          </a:solidFill>
-                          <a:latin typeface="Arial"/>
-                        </a:rPr>
-                        <a:t>S</a:t>
-                      </a:r>
-                    </a:p>
-                  </a:txBody>
-                  <a:tcPr marL="73152" marR="73152" marT="27432" marB="27432" anchor="ctr">
-                    <a:solidFill>
-                      <a:srgbClr val="FFFFFF"/>
-                    </a:solidFill>
-                  </a:tcPr>
-                </a:tc>
-                <a:tc>
-                  <a:txBody>
-                    <a:bodyPr wrap="square"/>
-                    <a:lstStyle/>
-                    <a:p>
-                      <a:pPr algn="r"/>
-                      <a:r>
-                        <a:rPr sz="1600" b="0">
-                          <a:solidFill>
-                            <a:srgbClr val="1F1F1F"/>
-                          </a:solidFill>
-                          <a:latin typeface="Arial"/>
-                        </a:rPr>
-                        <a:t>4.954</a:t>
-                      </a:r>
-                    </a:p>
-                  </a:txBody>
-                  <a:tcPr marL="73152" marR="73152" marT="27432" marB="27432" anchor="ctr">
-                    <a:solidFill>
-                      <a:srgbClr val="FFFFFF"/>
-                    </a:solidFill>
-                  </a:tcPr>
-                </a:tc>
-                <a:tc>
-                  <a:txBody>
-                    <a:bodyPr wrap="square"/>
-                    <a:lstStyle/>
-                    <a:p>
-                      <a:pPr algn="r"/>
-                      <a:r>
-                        <a:rPr sz="1600" b="0">
-                          <a:solidFill>
-                            <a:srgbClr val="1F1F1F"/>
-                          </a:solidFill>
-                          <a:latin typeface="Arial"/>
-                        </a:rPr>
-                        <a:t>461</a:t>
-                      </a:r>
-                    </a:p>
-                  </a:txBody>
-                  <a:tcPr marL="73152" marR="73152" marT="27432" marB="27432" anchor="ctr">
-                    <a:solidFill>
-                      <a:srgbClr val="FFFFFF"/>
-                    </a:solidFill>
-                  </a:tcPr>
-                </a:tc>
-                <a:tc>
-                  <a:txBody>
-                    <a:bodyPr wrap="square"/>
-                    <a:lstStyle/>
-                    <a:p>
-                      <a:pPr algn="r"/>
-                      <a:r>
-                        <a:rPr sz="1600" b="0">
-                          <a:solidFill>
-                            <a:srgbClr val="1F1F1F"/>
-                          </a:solidFill>
-                          <a:latin typeface="Arial"/>
-                        </a:rPr>
-                        <a:t>1,65</a:t>
-                      </a:r>
-                    </a:p>
-                  </a:txBody>
-                  <a:tcPr marL="73152" marR="73152" marT="27432" marB="27432" anchor="ctr">
-                    <a:solidFill>
-                      <a:srgbClr val="FFFFFF"/>
-                    </a:solidFill>
-                  </a:tcPr>
-                </a:tc>
-              </a:tr>
-              <a:tr h="457200">
-                <a:tc>
-                  <a:txBody>
-                    <a:bodyPr wrap="square"/>
-                    <a:lstStyle/>
-                    <a:p>
-                      <a:pPr algn="l"/>
-                      <a:r>
-                        <a:rPr sz="1600" b="0">
-                          <a:solidFill>
-                            <a:srgbClr val="1F1F1F"/>
-                          </a:solidFill>
-                          <a:latin typeface="Arial"/>
-                        </a:rPr>
-                        <a:t>MD</a:t>
-                      </a:r>
-                    </a:p>
-                  </a:txBody>
-                  <a:tcPr marL="73152" marR="73152" marT="27432" marB="27432" anchor="ctr">
-                    <a:solidFill>
-                      <a:srgbClr val="FFFFFF"/>
-                    </a:solidFill>
-                  </a:tcPr>
-                </a:tc>
-                <a:tc>
-                  <a:txBody>
-                    <a:bodyPr wrap="square"/>
-                    <a:lstStyle/>
-                    <a:p>
-                      <a:pPr algn="r"/>
-                      <a:r>
-                        <a:rPr sz="1600" b="0">
-                          <a:solidFill>
-                            <a:srgbClr val="1F1F1F"/>
-                          </a:solidFill>
-                          <a:latin typeface="Arial"/>
-                        </a:rPr>
-                        <a:t>4.044</a:t>
-                      </a:r>
-                    </a:p>
-                  </a:txBody>
-                  <a:tcPr marL="73152" marR="73152" marT="27432" marB="27432" anchor="ctr">
-                    <a:solidFill>
-                      <a:srgbClr val="FFFFFF"/>
-                    </a:solidFill>
-                  </a:tcPr>
-                </a:tc>
-                <a:tc>
-                  <a:txBody>
-                    <a:bodyPr wrap="square"/>
-                    <a:lstStyle/>
-                    <a:p>
-                      <a:pPr algn="r"/>
-                      <a:r>
-                        <a:rPr sz="1600" b="0">
-                          <a:solidFill>
-                            <a:srgbClr val="1F1F1F"/>
-                          </a:solidFill>
-                          <a:latin typeface="Arial"/>
-                        </a:rPr>
-                        <a:t>1.962</a:t>
-                      </a:r>
-                    </a:p>
-                  </a:txBody>
-                  <a:tcPr marL="73152" marR="73152" marT="27432" marB="27432" anchor="ctr">
-                    <a:solidFill>
-                      <a:srgbClr val="FFFFFF"/>
-                    </a:solidFill>
-                  </a:tcPr>
-                </a:tc>
-                <a:tc>
-                  <a:txBody>
-                    <a:bodyPr wrap="square"/>
-                    <a:lstStyle/>
-                    <a:p>
-                      <a:pPr algn="r"/>
-                      <a:r>
-                        <a:rPr sz="1600" b="0">
-                          <a:solidFill>
-                            <a:srgbClr val="1F1F1F"/>
-                          </a:solidFill>
-                          <a:latin typeface="Arial"/>
-                        </a:rPr>
-                        <a:t>1,65</a:t>
-                      </a:r>
-                    </a:p>
-                  </a:txBody>
-                  <a:tcPr marL="73152" marR="73152" marT="27432" marB="27432" anchor="ctr">
-                    <a:solidFill>
-                      <a:srgbClr val="FFFFFF"/>
-                    </a:solidFill>
-                  </a:tcPr>
-                </a:tc>
-              </a:tr>
-              <a:tr h="457200">
-                <a:tc>
-                  <a:txBody>
-                    <a:bodyPr wrap="square"/>
-                    <a:lstStyle/>
-                    <a:p>
-                      <a:pPr algn="l"/>
-                      <a:r>
-                        <a:rPr sz="1600" b="0">
-                          <a:solidFill>
-                            <a:srgbClr val="1F1F1F"/>
-                          </a:solidFill>
-                          <a:latin typeface="Arial"/>
-                        </a:rPr>
-                        <a:t>CSUV</a:t>
-                      </a:r>
-                    </a:p>
-                  </a:txBody>
-                  <a:tcPr marL="73152" marR="73152" marT="27432" marB="27432" anchor="ctr">
-                    <a:solidFill>
-                      <a:srgbClr val="FFFFFF"/>
-                    </a:solidFill>
-                  </a:tcPr>
-                </a:tc>
-                <a:tc>
-                  <a:txBody>
-                    <a:bodyPr wrap="square"/>
-                    <a:lstStyle/>
-                    <a:p>
-                      <a:pPr algn="r"/>
-                      <a:r>
-                        <a:rPr sz="1600" b="0">
-                          <a:solidFill>
-                            <a:srgbClr val="1F1F1F"/>
-                          </a:solidFill>
-                          <a:latin typeface="Arial"/>
-                        </a:rPr>
-                        <a:t>3.804</a:t>
-                      </a:r>
-                    </a:p>
-                  </a:txBody>
-                  <a:tcPr marL="73152" marR="73152" marT="27432" marB="27432" anchor="ctr">
-                    <a:solidFill>
-                      <a:srgbClr val="FFFFFF"/>
-                    </a:solidFill>
-                  </a:tcPr>
-                </a:tc>
-                <a:tc>
-                  <a:txBody>
-                    <a:bodyPr wrap="square"/>
-                    <a:lstStyle/>
-                    <a:p>
-                      <a:pPr algn="r"/>
-                      <a:r>
-                        <a:rPr sz="1600" b="0">
-                          <a:solidFill>
-                            <a:srgbClr val="1F1F1F"/>
-                          </a:solidFill>
-                          <a:latin typeface="Arial"/>
-                        </a:rPr>
-                        <a:t>1.892</a:t>
-                      </a:r>
-                    </a:p>
-                  </a:txBody>
-                  <a:tcPr marL="73152" marR="73152" marT="27432" marB="27432" anchor="ctr">
-                    <a:solidFill>
-                      <a:srgbClr val="FFFFFF"/>
-                    </a:solidFill>
-                  </a:tcPr>
-                </a:tc>
-                <a:tc>
-                  <a:txBody>
-                    <a:bodyPr wrap="square"/>
-                    <a:lstStyle/>
-                    <a:p>
-                      <a:pPr algn="r"/>
-                      <a:r>
-                        <a:rPr sz="1600" b="0">
-                          <a:solidFill>
-                            <a:srgbClr val="1F1F1F"/>
-                          </a:solidFill>
-                          <a:latin typeface="Arial"/>
-                        </a:rPr>
-                        <a:t>2,33</a:t>
-                      </a:r>
-                    </a:p>
-                  </a:txBody>
-                  <a:tcPr marL="73152" marR="73152" marT="27432" marB="27432" anchor="ctr">
-                    <a:solidFill>
-                      <a:srgbClr val="FFFFFF"/>
-                    </a:solidFill>
-                  </a:tcPr>
-                </a:tc>
-              </a:tr>
-              <a:tr h="457200">
-                <a:tc>
-                  <a:txBody>
-                    <a:bodyPr wrap="square"/>
-                    <a:lstStyle/>
-                    <a:p>
-                      <a:pPr algn="l"/>
-                      <a:r>
-                        <a:rPr sz="1600" b="0">
-                          <a:solidFill>
-                            <a:srgbClr val="1F1F1F"/>
-                          </a:solidFill>
-                          <a:latin typeface="Arial"/>
-                        </a:rPr>
-                        <a:t>SSUV</a:t>
-                      </a:r>
-                    </a:p>
-                  </a:txBody>
-                  <a:tcPr marL="73152" marR="73152" marT="27432" marB="27432" anchor="ctr">
-                    <a:solidFill>
-                      <a:srgbClr val="FFFFFF"/>
-                    </a:solidFill>
-                  </a:tcPr>
-                </a:tc>
-                <a:tc>
-                  <a:txBody>
-                    <a:bodyPr wrap="square"/>
-                    <a:lstStyle/>
-                    <a:p>
-                      <a:pPr algn="r"/>
-                      <a:r>
-                        <a:rPr sz="1600" b="0">
-                          <a:solidFill>
-                            <a:srgbClr val="1F1F1F"/>
-                          </a:solidFill>
-                          <a:latin typeface="Arial"/>
-                        </a:rPr>
-                        <a:t>2.857</a:t>
-                      </a:r>
-                    </a:p>
-                  </a:txBody>
-                  <a:tcPr marL="73152" marR="73152" marT="27432" marB="27432" anchor="ctr">
-                    <a:solidFill>
-                      <a:srgbClr val="FFFFFF"/>
-                    </a:solidFill>
-                  </a:tcPr>
-                </a:tc>
-                <a:tc>
-                  <a:txBody>
-                    <a:bodyPr wrap="square"/>
-                    <a:lstStyle/>
-                    <a:p>
-                      <a:pPr algn="r"/>
-                      <a:r>
-                        <a:rPr sz="1600" b="0">
-                          <a:solidFill>
-                            <a:srgbClr val="1F1F1F"/>
-                          </a:solidFill>
-                          <a:latin typeface="Arial"/>
-                        </a:rPr>
-                        <a:t>27</a:t>
-                      </a:r>
-                    </a:p>
-                  </a:txBody>
-                  <a:tcPr marL="73152" marR="73152" marT="27432" marB="27432" anchor="ctr">
-                    <a:solidFill>
-                      <a:srgbClr val="FFFFFF"/>
-                    </a:solidFill>
-                  </a:tcPr>
-                </a:tc>
-                <a:tc>
-                  <a:txBody>
-                    <a:bodyPr wrap="square"/>
-                    <a:lstStyle/>
-                    <a:p>
-                      <a:pPr algn="r"/>
-                      <a:r>
-                        <a:rPr sz="1600" b="0">
-                          <a:solidFill>
-                            <a:srgbClr val="1F1F1F"/>
-                          </a:solidFill>
-                          <a:latin typeface="Arial"/>
-                        </a:rPr>
-                        <a:t>2,33</a:t>
-                      </a:r>
-                    </a:p>
-                  </a:txBody>
-                  <a:tcPr marL="73152" marR="73152" marT="27432" marB="27432" anchor="ctr">
-                    <a:solidFill>
-                      <a:srgbClr val="FFFFFF"/>
-                    </a:solidFill>
-                  </a:tcPr>
-                </a:tc>
-              </a:tr>
-              <a:tr h="457200">
-                <a:tc>
-                  <a:txBody>
-                    <a:bodyPr wrap="square"/>
-                    <a:lstStyle/>
-                    <a:p>
-                      <a:pPr algn="l"/>
-                      <a:r>
-                        <a:rPr sz="1600" b="0">
-                          <a:solidFill>
-                            <a:srgbClr val="1F1F1F"/>
-                          </a:solidFill>
-                          <a:latin typeface="Arial"/>
-                        </a:rPr>
-                        <a:t>C</a:t>
-                      </a:r>
-                    </a:p>
-                  </a:txBody>
-                  <a:tcPr marL="73152" marR="73152" marT="27432" marB="27432" anchor="ctr">
-                    <a:solidFill>
-                      <a:srgbClr val="FFFFFF"/>
-                    </a:solidFill>
-                  </a:tcPr>
-                </a:tc>
-                <a:tc>
-                  <a:txBody>
-                    <a:bodyPr wrap="square"/>
-                    <a:lstStyle/>
-                    <a:p>
-                      <a:pPr algn="r"/>
-                      <a:r>
-                        <a:rPr sz="1600" b="0">
-                          <a:solidFill>
-                            <a:srgbClr val="1F1F1F"/>
-                          </a:solidFill>
-                          <a:latin typeface="Arial"/>
-                        </a:rPr>
-                        <a:t>1.367</a:t>
-                      </a:r>
-                    </a:p>
-                  </a:txBody>
-                  <a:tcPr marL="73152" marR="73152" marT="27432" marB="27432" anchor="ctr">
-                    <a:solidFill>
-                      <a:srgbClr val="FFFFFF"/>
-                    </a:solidFill>
-                  </a:tcPr>
-                </a:tc>
-                <a:tc>
-                  <a:txBody>
-                    <a:bodyPr wrap="square"/>
-                    <a:lstStyle/>
-                    <a:p>
-                      <a:pPr algn="r"/>
-                      <a:r>
-                        <a:rPr sz="1600" b="0">
-                          <a:solidFill>
-                            <a:srgbClr val="1F1F1F"/>
-                          </a:solidFill>
-                          <a:latin typeface="Arial"/>
-                        </a:rPr>
-                        <a:t>−585</a:t>
-                      </a:r>
-                    </a:p>
-                  </a:txBody>
-                  <a:tcPr marL="73152" marR="73152" marT="27432" marB="27432" anchor="ctr">
-                    <a:solidFill>
-                      <a:srgbClr val="FFFFFF"/>
-                    </a:solidFill>
-                  </a:tcPr>
-                </a:tc>
-                <a:tc>
-                  <a:txBody>
-                    <a:bodyPr wrap="square"/>
-                    <a:lstStyle/>
-                    <a:p>
-                      <a:pPr algn="r"/>
-                      <a:r>
-                        <a:rPr sz="1600" b="0">
-                          <a:solidFill>
-                            <a:srgbClr val="1F1F1F"/>
-                          </a:solidFill>
-                          <a:latin typeface="Arial"/>
-                        </a:rPr>
-                        <a:t>0,84</a:t>
-                      </a:r>
-                    </a:p>
-                  </a:txBody>
-                  <a:tcPr marL="73152" marR="73152" marT="27432" marB="27432" anchor="ctr">
-                    <a:solidFill>
-                      <a:srgbClr val="FFFFFF"/>
-                    </a:solidFill>
-                  </a:tcPr>
-                </a:tc>
-              </a:tr>
-              <a:tr h="457200">
-                <a:tc>
-                  <a:txBody>
-                    <a:bodyPr wrap="square"/>
-                    <a:lstStyle/>
-                    <a:p>
-                      <a:pPr algn="l"/>
-                      <a:r>
-                        <a:rPr sz="1600" b="0">
-                          <a:solidFill>
-                            <a:srgbClr val="1F1F1F"/>
-                          </a:solidFill>
-                          <a:latin typeface="Arial"/>
-                        </a:rPr>
-                        <a:t>B</a:t>
-                      </a:r>
-                    </a:p>
-                  </a:txBody>
-                  <a:tcPr marL="73152" marR="73152" marT="27432" marB="27432" anchor="ctr">
-                    <a:solidFill>
-                      <a:srgbClr val="FFFFFF"/>
-                    </a:solidFill>
-                  </a:tcPr>
-                </a:tc>
-                <a:tc>
-                  <a:txBody>
-                    <a:bodyPr wrap="square"/>
-                    <a:lstStyle/>
-                    <a:p>
-                      <a:pPr algn="r"/>
-                      <a:r>
-                        <a:rPr sz="1600" b="0">
-                          <a:solidFill>
-                            <a:srgbClr val="1F1F1F"/>
-                          </a:solidFill>
-                          <a:latin typeface="Arial"/>
-                        </a:rPr>
-                        <a:t>125</a:t>
-                      </a:r>
-                    </a:p>
-                  </a:txBody>
-                  <a:tcPr marL="73152" marR="73152" marT="27432" marB="27432" anchor="ctr">
-                    <a:solidFill>
-                      <a:srgbClr val="FFFFFF"/>
-                    </a:solidFill>
-                  </a:tcPr>
-                </a:tc>
-                <a:tc>
-                  <a:txBody>
-                    <a:bodyPr wrap="square"/>
-                    <a:lstStyle/>
-                    <a:p>
-                      <a:pPr algn="r"/>
-                      <a:r>
-                        <a:rPr sz="1600" b="0">
-                          <a:solidFill>
-                            <a:srgbClr val="1F1F1F"/>
-                          </a:solidFill>
-                          <a:latin typeface="Arial"/>
-                        </a:rPr>
-                        <a:t>−2.430</a:t>
-                      </a:r>
-                    </a:p>
-                  </a:txBody>
-                  <a:tcPr marL="73152" marR="73152" marT="27432" marB="27432" anchor="ctr">
-                    <a:solidFill>
-                      <a:srgbClr val="FFFFFF"/>
-                    </a:solidFill>
-                  </a:tcPr>
-                </a:tc>
-                <a:tc>
-                  <a:txBody>
-                    <a:bodyPr wrap="square"/>
-                    <a:lstStyle/>
-                    <a:p>
-                      <a:pPr algn="r"/>
-                      <a:r>
-                        <a:rPr sz="1600" b="0">
-                          <a:solidFill>
-                            <a:srgbClr val="1F1F1F"/>
-                          </a:solidFill>
-                          <a:latin typeface="Arial"/>
-                        </a:rPr>
-                        <a:t>0,00</a:t>
-                      </a:r>
-                    </a:p>
-                  </a:txBody>
-                  <a:tcPr marL="73152" marR="73152" marT="27432" marB="27432" anchor="ctr">
-                    <a:solidFill>
-                      <a:srgbClr val="FFFFFF"/>
-                    </a:solidFill>
-                  </a:tcPr>
-                </a:tc>
-              </a:tr>
-            </a:tbl>
-          </a:graphicData>
-        </a:graphic>
-      </p:graphicFrame>
-      <p:sp>
-        <p:nvSpPr>
-          <p:cNvPr id="6" name="TextBox 5"/>
-          <p:cNvSpPr txBox="1"/>
-          <p:nvPr/>
-        </p:nvSpPr>
-        <p:spPr>
-          <a:xfrm>
-            <a:off x="6949440" y="1554480"/>
-            <a:ext cx="4846320" cy="4572000"/>
-          </a:xfrm>
-          <a:prstGeom prst="rect">
-            <a:avLst/>
-          </a:prstGeom>
-          <a:noFill/>
-        </p:spPr>
-        <p:txBody>
-          <a:bodyPr wrap="square" lIns="45720" rIns="45720">
-            <a:spAutoFit/>
-          </a:bodyPr>
-          <a:lstStyle/>
-          <a:p>
-            <a:pPr>
-              <a:spcAft>
-                <a:spcPts val="1200"/>
-              </a:spcAft>
-            </a:pPr>
-            <a:r>
-              <a:rPr sz="2000" b="1">
-                <a:solidFill>
-                  <a:srgbClr val="1F1F1F"/>
-                </a:solidFill>
-                <a:latin typeface="Arial"/>
-              </a:rPr>
-              <a:t>Un coche de más: 60 € al mes.</a:t>
-            </a:r>
-          </a:p>
-          <a:p>
-            <a:pPr>
-              <a:spcAft>
-                <a:spcPts val="1200"/>
-              </a:spcAft>
-            </a:pPr>
-            <a:r>
-              <a:rPr sz="2000" b="1">
-                <a:solidFill>
-                  <a:srgbClr val="1F1F1F"/>
-                </a:solidFill>
-                <a:latin typeface="Arial"/>
-              </a:rPr>
-              <a:t>Un coche de menos: su CVP, o 368–1.556 € con transfer.</a:t>
-            </a:r>
-          </a:p>
-          <a:p>
-            <a:pPr>
-              <a:spcAft>
-                <a:spcPts val="1200"/>
-              </a:spcAft>
-            </a:pPr>
-            <a:r>
-              <a:rPr sz="2000" b="0">
-                <a:solidFill>
-                  <a:srgbClr val="1F1F1F"/>
-                </a:solidFill>
-                <a:latin typeface="Arial"/>
-              </a:rPr>
-              <a:t>Optimista: 4,7 M€ perdidos (1,7 con transfers).</a:t>
-            </a:r>
-          </a:p>
-          <a:p>
-            <a:pPr>
-              <a:spcAft>
-                <a:spcPts val="1200"/>
-              </a:spcAft>
-            </a:pPr>
-            <a:r>
-              <a:rPr sz="2000" b="0">
-                <a:solidFill>
-                  <a:srgbClr val="1F1F1F"/>
-                </a:solidFill>
-                <a:latin typeface="Arial"/>
-              </a:rPr>
-              <a:t>Pesimista: pasarse cuesta solo 0,2 M€ más.</a:t>
-            </a:r>
-          </a:p>
-        </p:txBody>
-      </p:sp>
-      <p:sp>
-        <p:nvSpPr>
-          <p:cNvPr id="7" name="TextBox 6"/>
-          <p:cNvSpPr txBox="1"/>
-          <p:nvPr/>
-        </p:nvSpPr>
-        <p:spPr>
-          <a:xfrm>
-            <a:off x="548640" y="5486400"/>
-            <a:ext cx="6035040" cy="914400"/>
-          </a:xfrm>
-          <a:prstGeom prst="rect">
-            <a:avLst/>
-          </a:prstGeom>
-          <a:noFill/>
-        </p:spPr>
-        <p:txBody>
-          <a:bodyPr wrap="square" lIns="45720" rIns="45720">
-            <a:spAutoFit/>
-          </a:bodyPr>
-          <a:lstStyle/>
-          <a:p>
-            <a:pPr>
-              <a:spcAft>
-                <a:spcPts val="600"/>
-              </a:spcAft>
-            </a:pPr>
-            <a:r>
-              <a:rPr sz="2000" b="1">
-                <a:solidFill>
-                  <a:srgbClr val="0072B2"/>
-                </a:solidFill>
-                <a:latin typeface="Arial"/>
-              </a:rPr>
-              <a:t>Empujar: MSUV, S, CSUV, MD. Vigilar: SSUV. Frenar: B y C.</a:t>
-            </a:r>
-          </a:p>
-        </p:txBody>
-      </p:sp>
-    </p:spTree>
-  </p:cSld>
-  <p:clrMapOvr>
-    <a:masterClrMapping/>
-  </p:clrMapOvr>
-</p:sld>
-</file>
-
-<file path=ppt/slides/slide8.xml><?xml version="1.0" encoding="utf-8"?>
-<p:sld xmlns:a="http://schemas.openxmlformats.org/drawingml/2006/main" xmlns:p="http://schemas.openxmlformats.org/presentationml/2006/main" xmlns:r="http://schemas.openxmlformats.org/officeDocument/2006/relationships">
-  <p:cSld>
-    <p:spTree>
-      <p:nvGrpSpPr>
-        <p:cNvPr id="1" name=""/>
-        <p:cNvGrpSpPr/>
-        <p:nvPr/>
-      </p:nvGrpSpPr>
-      <p:grpSpPr/>
-      <p:sp>
-        <p:nvSpPr>
-          <p:cNvPr id="2" name="Rectangle 1"/>
-          <p:cNvSpPr/>
-          <p:nvPr/>
-        </p:nvSpPr>
-        <p:spPr>
-          <a:xfrm>
-            <a:off x="457200" y="411480"/>
-            <a:ext cx="109728" cy="822960"/>
-          </a:xfrm>
-          <a:prstGeom prst="rect">
-            <a:avLst/>
-          </a:prstGeom>
-          <a:solidFill>
-            <a:srgbClr val="0072B2"/>
-          </a:solidFill>
-          <a:ln>
-            <a:noFill/>
-          </a:ln>
-        </p:spPr>
-        <p:style>
-          <a:lnRef idx="1">
-            <a:schemeClr val="accent1"/>
-          </a:lnRef>
-          <a:fillRef idx="3">
-            <a:schemeClr val="accent1"/>
-          </a:fillRef>
-          <a:effectRef idx="2">
-            <a:schemeClr val="accent1"/>
-          </a:effectRef>
-          <a:fontRef idx="minor">
-            <a:schemeClr val="lt1"/>
-          </a:fontRef>
-        </p:style>
-        <p:txBody>
-          <a:bodyPr rtlCol="0" anchor="ctr"/>
-          <a:lstStyle/>
-          <a:p>
-            <a:pPr algn="ctr"/>
-          </a:p>
-        </p:txBody>
-      </p:sp>
-      <p:sp>
-        <p:nvSpPr>
-          <p:cNvPr id="3" name="TextBox 2"/>
-          <p:cNvSpPr txBox="1"/>
-          <p:nvPr/>
-        </p:nvSpPr>
-        <p:spPr>
-          <a:xfrm>
-            <a:off x="685800" y="320040"/>
-            <a:ext cx="10972800" cy="1005840"/>
-          </a:xfrm>
-          <a:prstGeom prst="rect">
-            <a:avLst/>
-          </a:prstGeom>
-          <a:noFill/>
-        </p:spPr>
-        <p:txBody>
-          <a:bodyPr wrap="square" lIns="45720" rIns="45720" anchor="ctr">
-            <a:spAutoFit/>
-          </a:bodyPr>
-          <a:lstStyle/>
-          <a:p>
-            <a:pPr>
-              <a:spcAft>
-                <a:spcPts val="600"/>
-              </a:spcAft>
-            </a:pPr>
-            <a:r>
-              <a:rPr sz="2800" b="1">
-                <a:solidFill>
-                  <a:srgbClr val="1F1F1F"/>
-                </a:solidFill>
-                <a:latin typeface="Arial"/>
-              </a:rPr>
-              <a:t>Qué vigilar y cuándo cambiar la producción</a:t>
-            </a:r>
-          </a:p>
-        </p:txBody>
-      </p:sp>
-      <p:sp>
-        <p:nvSpPr>
-          <p:cNvPr id="4" name="TextBox 3"/>
-          <p:cNvSpPr txBox="1"/>
-          <p:nvPr/>
-        </p:nvSpPr>
-        <p:spPr>
-          <a:xfrm>
-            <a:off x="11155680" y="6400800"/>
-            <a:ext cx="731520" cy="320040"/>
-          </a:xfrm>
-          <a:prstGeom prst="rect">
-            <a:avLst/>
-          </a:prstGeom>
-          <a:noFill/>
-        </p:spPr>
-        <p:txBody>
-          <a:bodyPr wrap="square" lIns="45720" rIns="45720">
-            <a:spAutoFit/>
-          </a:bodyPr>
-          <a:lstStyle/>
-          <a:p>
-            <a:pPr algn="r">
-              <a:spcAft>
-                <a:spcPts val="600"/>
-              </a:spcAft>
-            </a:pPr>
-            <a:r>
-              <a:rPr sz="1200" b="0">
-                <a:solidFill>
-                  <a:srgbClr val="555555"/>
-                </a:solidFill>
-                <a:latin typeface="Arial"/>
-              </a:rPr>
-              <a:t>8</a:t>
-            </a:r>
-          </a:p>
-        </p:txBody>
-      </p:sp>
-      <p:sp>
-        <p:nvSpPr>
-          <p:cNvPr id="5" name="TextBox 4"/>
-          <p:cNvSpPr txBox="1"/>
-          <p:nvPr/>
-        </p:nvSpPr>
-        <p:spPr>
-          <a:xfrm>
-            <a:off x="685800" y="1554480"/>
-            <a:ext cx="10881360" cy="3840480"/>
-          </a:xfrm>
-          <a:prstGeom prst="rect">
-            <a:avLst/>
-          </a:prstGeom>
-          <a:noFill/>
-        </p:spPr>
-        <p:txBody>
-          <a:bodyPr wrap="square" lIns="45720" rIns="45720">
-            <a:spAutoFit/>
-          </a:bodyPr>
-          <a:lstStyle/>
-          <a:p>
-            <a:pPr>
-              <a:spcAft>
-                <a:spcPts val="1800"/>
-              </a:spcAft>
-            </a:pPr>
-            <a:r>
-              <a:rPr sz="2200" b="0">
-                <a:solidFill>
-                  <a:srgbClr val="1F1F1F"/>
-                </a:solidFill>
-                <a:latin typeface="Arial"/>
-              </a:rPr>
-              <a:t>Ventas de los tres últimos meses fuera de 0,88–1,24 veces la previsión: revisar la llegada de t + 3.</a:t>
-            </a:r>
-          </a:p>
-          <a:p>
-            <a:pPr>
-              <a:spcAft>
-                <a:spcPts val="1800"/>
-              </a:spcAft>
-            </a:pPr>
-            <a:r>
-              <a:rPr sz="2200" b="0">
-                <a:solidFill>
-                  <a:srgbClr val="1F1F1F"/>
-                </a:solidFill>
-                <a:latin typeface="Arial"/>
-              </a:rPr>
-              <a:t>Confianza del consumidor: si vuelve a la media de enero–julio de A012, la demanda sube un 12 %.</a:t>
-            </a:r>
-          </a:p>
-          <a:p>
-            <a:pPr>
-              <a:spcAft>
-                <a:spcPts val="1800"/>
-              </a:spcAft>
-            </a:pPr>
-            <a:r>
-              <a:rPr sz="2200" b="0">
-                <a:solidFill>
-                  <a:srgbClr val="1F1F1F"/>
-                </a:solidFill>
-                <a:latin typeface="Arial"/>
-              </a:rPr>
-              <a:t>Prima de CO2: decidir antes de marzo; cambia el resultado de 63,5 a 7,1 M€.</a:t>
-            </a:r>
-          </a:p>
-          <a:p>
-            <a:pPr>
-              <a:spcAft>
-                <a:spcPts val="1800"/>
-              </a:spcAft>
-            </a:pPr>
-            <a:r>
-              <a:rPr sz="2200" b="0">
-                <a:solidFill>
-                  <a:srgbClr val="1F1F1F"/>
-                </a:solidFill>
-                <a:latin typeface="Arial"/>
-              </a:rPr>
-              <a:t>Más de 2,5 meses de cobertura en un segmento de margen alto, o stock envejecido en C y CSUV: parar llegadas.</a:t>
-            </a:r>
-          </a:p>
-        </p:txBody>
-      </p:sp>
-      <p:sp>
-        <p:nvSpPr>
-          <p:cNvPr id="6" name="TextBox 5"/>
-          <p:cNvSpPr txBox="1"/>
-          <p:nvPr/>
-        </p:nvSpPr>
-        <p:spPr>
-          <a:xfrm>
-            <a:off x="685800" y="5120640"/>
-            <a:ext cx="10881360" cy="1188720"/>
-          </a:xfrm>
-          <a:prstGeom prst="rect">
-            <a:avLst/>
-          </a:prstGeom>
-          <a:noFill/>
-        </p:spPr>
-        <p:txBody>
-          <a:bodyPr wrap="square" lIns="45720" rIns="45720">
-            <a:spAutoFit/>
-          </a:bodyPr>
-          <a:lstStyle/>
-          <a:p>
-            <a:pPr>
-              <a:spcAft>
-                <a:spcPts val="600"/>
-              </a:spcAft>
-            </a:pPr>
-            <a:r>
-              <a:rPr sz="1800" b="0">
-                <a:solidFill>
-                  <a:srgbClr val="555555"/>
-                </a:solidFill>
-                <a:latin typeface="Arial"/>
-              </a:rPr>
-              <a:t>Supuestos: llegadas de enero y febrero (2.110 al mes), sin automatriculaciones ni transfers; arancel y combustible sin cuantificar.</a:t>
+              <a:t>Pipeline, fechas de producto, combustible, arancel y divisa incluyen supuestos explícitos.</a:t>
             </a:r>
           </a:p>
         </p:txBody>
